--- a/!Report/Report_Figures.pptx
+++ b/!Report/Report_Figures.pptx
@@ -9,6 +9,7 @@
     <p:sldId id="257" r:id="rId3"/>
     <p:sldId id="258" r:id="rId4"/>
     <p:sldId id="259" r:id="rId5"/>
+    <p:sldId id="260" r:id="rId6"/>
   </p:sldIdLst>
   <p:sldSz cx="12192000" cy="6858000"/>
   <p:notesSz cx="6858000" cy="9144000"/>
@@ -122,6 +123,11 @@
             <p14:sldId id="259"/>
           </p14:sldIdLst>
         </p14:section>
+        <p14:section name="Untitled Section" id="{EC0180D3-008C-4847-9FF6-0EC2D2E4D2CD}">
+          <p14:sldIdLst>
+            <p14:sldId id="260"/>
+          </p14:sldIdLst>
+        </p14:section>
       </p14:sectionLst>
     </p:ext>
     <p:ext uri="{EFAFB233-063F-42B5-8137-9DF3F51BA10A}">
@@ -278,7 +284,7 @@
           <a:p>
             <a:fld id="{89AEAAD9-F181-47EB-B47E-CD6AC997518F}" type="datetimeFigureOut">
               <a:rPr lang="en-US" smtClean="0"/>
-              <a:t>11/22/2025</a:t>
+              <a:t>11/23/2025</a:t>
             </a:fld>
             <a:endParaRPr lang="en-US"/>
           </a:p>
@@ -476,7 +482,7 @@
           <a:p>
             <a:fld id="{89AEAAD9-F181-47EB-B47E-CD6AC997518F}" type="datetimeFigureOut">
               <a:rPr lang="en-US" smtClean="0"/>
-              <a:t>11/22/2025</a:t>
+              <a:t>11/23/2025</a:t>
             </a:fld>
             <a:endParaRPr lang="en-US"/>
           </a:p>
@@ -684,7 +690,7 @@
           <a:p>
             <a:fld id="{89AEAAD9-F181-47EB-B47E-CD6AC997518F}" type="datetimeFigureOut">
               <a:rPr lang="en-US" smtClean="0"/>
-              <a:t>11/22/2025</a:t>
+              <a:t>11/23/2025</a:t>
             </a:fld>
             <a:endParaRPr lang="en-US"/>
           </a:p>
@@ -882,7 +888,7 @@
           <a:p>
             <a:fld id="{89AEAAD9-F181-47EB-B47E-CD6AC997518F}" type="datetimeFigureOut">
               <a:rPr lang="en-US" smtClean="0"/>
-              <a:t>11/22/2025</a:t>
+              <a:t>11/23/2025</a:t>
             </a:fld>
             <a:endParaRPr lang="en-US"/>
           </a:p>
@@ -1157,7 +1163,7 @@
           <a:p>
             <a:fld id="{89AEAAD9-F181-47EB-B47E-CD6AC997518F}" type="datetimeFigureOut">
               <a:rPr lang="en-US" smtClean="0"/>
-              <a:t>11/22/2025</a:t>
+              <a:t>11/23/2025</a:t>
             </a:fld>
             <a:endParaRPr lang="en-US"/>
           </a:p>
@@ -1422,7 +1428,7 @@
           <a:p>
             <a:fld id="{89AEAAD9-F181-47EB-B47E-CD6AC997518F}" type="datetimeFigureOut">
               <a:rPr lang="en-US" smtClean="0"/>
-              <a:t>11/22/2025</a:t>
+              <a:t>11/23/2025</a:t>
             </a:fld>
             <a:endParaRPr lang="en-US"/>
           </a:p>
@@ -1834,7 +1840,7 @@
           <a:p>
             <a:fld id="{89AEAAD9-F181-47EB-B47E-CD6AC997518F}" type="datetimeFigureOut">
               <a:rPr lang="en-US" smtClean="0"/>
-              <a:t>11/22/2025</a:t>
+              <a:t>11/23/2025</a:t>
             </a:fld>
             <a:endParaRPr lang="en-US"/>
           </a:p>
@@ -1975,7 +1981,7 @@
           <a:p>
             <a:fld id="{89AEAAD9-F181-47EB-B47E-CD6AC997518F}" type="datetimeFigureOut">
               <a:rPr lang="en-US" smtClean="0"/>
-              <a:t>11/22/2025</a:t>
+              <a:t>11/23/2025</a:t>
             </a:fld>
             <a:endParaRPr lang="en-US"/>
           </a:p>
@@ -2088,7 +2094,7 @@
           <a:p>
             <a:fld id="{89AEAAD9-F181-47EB-B47E-CD6AC997518F}" type="datetimeFigureOut">
               <a:rPr lang="en-US" smtClean="0"/>
-              <a:t>11/22/2025</a:t>
+              <a:t>11/23/2025</a:t>
             </a:fld>
             <a:endParaRPr lang="en-US"/>
           </a:p>
@@ -2399,7 +2405,7 @@
           <a:p>
             <a:fld id="{89AEAAD9-F181-47EB-B47E-CD6AC997518F}" type="datetimeFigureOut">
               <a:rPr lang="en-US" smtClean="0"/>
-              <a:t>11/22/2025</a:t>
+              <a:t>11/23/2025</a:t>
             </a:fld>
             <a:endParaRPr lang="en-US"/>
           </a:p>
@@ -2687,7 +2693,7 @@
           <a:p>
             <a:fld id="{89AEAAD9-F181-47EB-B47E-CD6AC997518F}" type="datetimeFigureOut">
               <a:rPr lang="en-US" smtClean="0"/>
-              <a:t>11/22/2025</a:t>
+              <a:t>11/23/2025</a:t>
             </a:fld>
             <a:endParaRPr lang="en-US"/>
           </a:p>
@@ -2928,7 +2934,7 @@
           <a:p>
             <a:fld id="{89AEAAD9-F181-47EB-B47E-CD6AC997518F}" type="datetimeFigureOut">
               <a:rPr lang="en-US" smtClean="0"/>
-              <a:t>11/22/2025</a:t>
+              <a:t>11/23/2025</a:t>
             </a:fld>
             <a:endParaRPr lang="en-US"/>
           </a:p>
@@ -4753,6 +4759,1512 @@
 </p:sld>
 </file>
 
+<file path=ppt/slides/slide5.xml><?xml version="1.0" encoding="utf-8"?>
+<p:sld xmlns:a="http://schemas.openxmlformats.org/drawingml/2006/main" xmlns:r="http://schemas.openxmlformats.org/officeDocument/2006/relationships" xmlns:p="http://schemas.openxmlformats.org/presentationml/2006/main">
+  <p:cSld>
+    <p:spTree>
+      <p:nvGrpSpPr>
+        <p:cNvPr id="1" name=""/>
+        <p:cNvGrpSpPr/>
+        <p:nvPr/>
+      </p:nvGrpSpPr>
+      <p:grpSpPr>
+        <a:xfrm>
+          <a:off x="0" y="0"/>
+          <a:ext cx="0" cy="0"/>
+          <a:chOff x="0" y="0"/>
+          <a:chExt cx="0" cy="0"/>
+        </a:xfrm>
+      </p:grpSpPr>
+      <p:sp>
+        <p:nvSpPr>
+          <p:cNvPr id="4" name="Rectangle 3">
+            <a:extLst>
+              <a:ext uri="{FF2B5EF4-FFF2-40B4-BE49-F238E27FC236}">
+                <a16:creationId xmlns:a16="http://schemas.microsoft.com/office/drawing/2014/main" id="{DD8C24CC-EA55-ACEC-EEDB-B4E969FED59F}"/>
+              </a:ext>
+            </a:extLst>
+          </p:cNvPr>
+          <p:cNvSpPr>
+            <a:spLocks noChangeAspect="1"/>
+          </p:cNvSpPr>
+          <p:nvPr/>
+        </p:nvSpPr>
+        <p:spPr>
+          <a:xfrm>
+            <a:off x="1444752" y="2066544"/>
+            <a:ext cx="2176272" cy="2121408"/>
+          </a:xfrm>
+          <a:prstGeom prst="rect">
+            <a:avLst/>
+          </a:prstGeom>
+        </p:spPr>
+        <p:style>
+          <a:lnRef idx="2">
+            <a:schemeClr val="accent1">
+              <a:shade val="15000"/>
+            </a:schemeClr>
+          </a:lnRef>
+          <a:fillRef idx="1">
+            <a:schemeClr val="accent1"/>
+          </a:fillRef>
+          <a:effectRef idx="0">
+            <a:schemeClr val="accent1"/>
+          </a:effectRef>
+          <a:fontRef idx="minor">
+            <a:schemeClr val="lt1"/>
+          </a:fontRef>
+        </p:style>
+        <p:txBody>
+          <a:bodyPr rtlCol="0" anchor="ctr"/>
+          <a:lstStyle/>
+          <a:p>
+            <a:pPr algn="ctr"/>
+            <a:r>
+              <a:rPr lang="en-US" dirty="0"/>
+              <a:t> </a:t>
+            </a:r>
+          </a:p>
+        </p:txBody>
+      </p:sp>
+      <p:sp>
+        <p:nvSpPr>
+          <p:cNvPr id="5" name="Oval 4">
+            <a:extLst>
+              <a:ext uri="{FF2B5EF4-FFF2-40B4-BE49-F238E27FC236}">
+                <a16:creationId xmlns:a16="http://schemas.microsoft.com/office/drawing/2014/main" id="{90ACB39B-D175-4170-2C3D-3D2C9BD2DA19}"/>
+              </a:ext>
+            </a:extLst>
+          </p:cNvPr>
+          <p:cNvSpPr>
+            <a:spLocks noChangeAspect="1"/>
+          </p:cNvSpPr>
+          <p:nvPr/>
+        </p:nvSpPr>
+        <p:spPr>
+          <a:xfrm>
+            <a:off x="1261872" y="4004518"/>
+            <a:ext cx="365760" cy="365760"/>
+          </a:xfrm>
+          <a:prstGeom prst="ellipse">
+            <a:avLst/>
+          </a:prstGeom>
+          <a:solidFill>
+            <a:schemeClr val="bg1"/>
+          </a:solidFill>
+          <a:ln>
+            <a:solidFill>
+              <a:schemeClr val="tx1"/>
+            </a:solidFill>
+          </a:ln>
+        </p:spPr>
+        <p:style>
+          <a:lnRef idx="2">
+            <a:schemeClr val="accent1">
+              <a:shade val="15000"/>
+            </a:schemeClr>
+          </a:lnRef>
+          <a:fillRef idx="1">
+            <a:schemeClr val="accent1"/>
+          </a:fillRef>
+          <a:effectRef idx="0">
+            <a:schemeClr val="accent1"/>
+          </a:effectRef>
+          <a:fontRef idx="minor">
+            <a:schemeClr val="lt1"/>
+          </a:fontRef>
+        </p:style>
+        <p:txBody>
+          <a:bodyPr rtlCol="0" anchor="ctr"/>
+          <a:lstStyle/>
+          <a:p>
+            <a:pPr algn="ctr"/>
+            <a:r>
+              <a:rPr lang="en-US" dirty="0">
+                <a:solidFill>
+                  <a:schemeClr val="tx1"/>
+                </a:solidFill>
+              </a:rPr>
+              <a:t>1</a:t>
+            </a:r>
+          </a:p>
+        </p:txBody>
+      </p:sp>
+      <p:sp>
+        <p:nvSpPr>
+          <p:cNvPr id="6" name="Oval 5">
+            <a:extLst>
+              <a:ext uri="{FF2B5EF4-FFF2-40B4-BE49-F238E27FC236}">
+                <a16:creationId xmlns:a16="http://schemas.microsoft.com/office/drawing/2014/main" id="{12BA3A21-2E12-E810-0553-D74618845ABE}"/>
+              </a:ext>
+            </a:extLst>
+          </p:cNvPr>
+          <p:cNvSpPr>
+            <a:spLocks noChangeAspect="1"/>
+          </p:cNvSpPr>
+          <p:nvPr/>
+        </p:nvSpPr>
+        <p:spPr>
+          <a:xfrm>
+            <a:off x="3438144" y="4004518"/>
+            <a:ext cx="365760" cy="365760"/>
+          </a:xfrm>
+          <a:prstGeom prst="ellipse">
+            <a:avLst/>
+          </a:prstGeom>
+          <a:solidFill>
+            <a:schemeClr val="bg1"/>
+          </a:solidFill>
+          <a:ln>
+            <a:solidFill>
+              <a:schemeClr val="tx1"/>
+            </a:solidFill>
+          </a:ln>
+        </p:spPr>
+        <p:style>
+          <a:lnRef idx="2">
+            <a:schemeClr val="accent1">
+              <a:shade val="15000"/>
+            </a:schemeClr>
+          </a:lnRef>
+          <a:fillRef idx="1">
+            <a:schemeClr val="accent1"/>
+          </a:fillRef>
+          <a:effectRef idx="0">
+            <a:schemeClr val="accent1"/>
+          </a:effectRef>
+          <a:fontRef idx="minor">
+            <a:schemeClr val="lt1"/>
+          </a:fontRef>
+        </p:style>
+        <p:txBody>
+          <a:bodyPr rtlCol="0" anchor="ctr"/>
+          <a:lstStyle/>
+          <a:p>
+            <a:pPr algn="ctr"/>
+            <a:r>
+              <a:rPr lang="en-US" dirty="0">
+                <a:solidFill>
+                  <a:schemeClr val="tx1"/>
+                </a:solidFill>
+              </a:rPr>
+              <a:t>2</a:t>
+            </a:r>
+          </a:p>
+        </p:txBody>
+      </p:sp>
+      <p:sp>
+        <p:nvSpPr>
+          <p:cNvPr id="7" name="Oval 6">
+            <a:extLst>
+              <a:ext uri="{FF2B5EF4-FFF2-40B4-BE49-F238E27FC236}">
+                <a16:creationId xmlns:a16="http://schemas.microsoft.com/office/drawing/2014/main" id="{5BFCCDC5-A86E-B5F2-6C03-8B26ED870C51}"/>
+              </a:ext>
+            </a:extLst>
+          </p:cNvPr>
+          <p:cNvSpPr>
+            <a:spLocks noChangeAspect="1"/>
+          </p:cNvSpPr>
+          <p:nvPr/>
+        </p:nvSpPr>
+        <p:spPr>
+          <a:xfrm>
+            <a:off x="3438144" y="1883664"/>
+            <a:ext cx="365760" cy="365760"/>
+          </a:xfrm>
+          <a:prstGeom prst="ellipse">
+            <a:avLst/>
+          </a:prstGeom>
+          <a:solidFill>
+            <a:schemeClr val="bg1"/>
+          </a:solidFill>
+          <a:ln>
+            <a:solidFill>
+              <a:schemeClr val="tx1"/>
+            </a:solidFill>
+          </a:ln>
+        </p:spPr>
+        <p:style>
+          <a:lnRef idx="2">
+            <a:schemeClr val="accent1">
+              <a:shade val="15000"/>
+            </a:schemeClr>
+          </a:lnRef>
+          <a:fillRef idx="1">
+            <a:schemeClr val="accent1"/>
+          </a:fillRef>
+          <a:effectRef idx="0">
+            <a:schemeClr val="accent1"/>
+          </a:effectRef>
+          <a:fontRef idx="minor">
+            <a:schemeClr val="lt1"/>
+          </a:fontRef>
+        </p:style>
+        <p:txBody>
+          <a:bodyPr rtlCol="0" anchor="ctr"/>
+          <a:lstStyle/>
+          <a:p>
+            <a:pPr algn="ctr"/>
+            <a:r>
+              <a:rPr lang="en-US" dirty="0">
+                <a:solidFill>
+                  <a:schemeClr val="tx1"/>
+                </a:solidFill>
+              </a:rPr>
+              <a:t>3</a:t>
+            </a:r>
+          </a:p>
+        </p:txBody>
+      </p:sp>
+      <p:sp>
+        <p:nvSpPr>
+          <p:cNvPr id="8" name="Oval 7">
+            <a:extLst>
+              <a:ext uri="{FF2B5EF4-FFF2-40B4-BE49-F238E27FC236}">
+                <a16:creationId xmlns:a16="http://schemas.microsoft.com/office/drawing/2014/main" id="{63E32147-8036-0D02-D1D8-CA15E474A838}"/>
+              </a:ext>
+            </a:extLst>
+          </p:cNvPr>
+          <p:cNvSpPr>
+            <a:spLocks noChangeAspect="1"/>
+          </p:cNvSpPr>
+          <p:nvPr/>
+        </p:nvSpPr>
+        <p:spPr>
+          <a:xfrm>
+            <a:off x="1261872" y="1883664"/>
+            <a:ext cx="365760" cy="365760"/>
+          </a:xfrm>
+          <a:prstGeom prst="ellipse">
+            <a:avLst/>
+          </a:prstGeom>
+          <a:solidFill>
+            <a:schemeClr val="bg1"/>
+          </a:solidFill>
+          <a:ln>
+            <a:solidFill>
+              <a:schemeClr val="tx1"/>
+            </a:solidFill>
+          </a:ln>
+        </p:spPr>
+        <p:style>
+          <a:lnRef idx="2">
+            <a:schemeClr val="accent1">
+              <a:shade val="15000"/>
+            </a:schemeClr>
+          </a:lnRef>
+          <a:fillRef idx="1">
+            <a:schemeClr val="accent1"/>
+          </a:fillRef>
+          <a:effectRef idx="0">
+            <a:schemeClr val="accent1"/>
+          </a:effectRef>
+          <a:fontRef idx="minor">
+            <a:schemeClr val="lt1"/>
+          </a:fontRef>
+        </p:style>
+        <p:txBody>
+          <a:bodyPr rtlCol="0" anchor="ctr"/>
+          <a:lstStyle/>
+          <a:p>
+            <a:pPr algn="ctr"/>
+            <a:r>
+              <a:rPr lang="en-US" dirty="0">
+                <a:solidFill>
+                  <a:schemeClr val="tx1"/>
+                </a:solidFill>
+              </a:rPr>
+              <a:t>4</a:t>
+            </a:r>
+          </a:p>
+        </p:txBody>
+      </p:sp>
+      <p:sp>
+        <p:nvSpPr>
+          <p:cNvPr id="9" name="Oval 8">
+            <a:extLst>
+              <a:ext uri="{FF2B5EF4-FFF2-40B4-BE49-F238E27FC236}">
+                <a16:creationId xmlns:a16="http://schemas.microsoft.com/office/drawing/2014/main" id="{0BEBB53E-EF6E-FB98-5815-42A74FEB21D0}"/>
+              </a:ext>
+            </a:extLst>
+          </p:cNvPr>
+          <p:cNvSpPr>
+            <a:spLocks noChangeAspect="1"/>
+          </p:cNvSpPr>
+          <p:nvPr/>
+        </p:nvSpPr>
+        <p:spPr>
+          <a:xfrm>
+            <a:off x="2350008" y="4004518"/>
+            <a:ext cx="365760" cy="365760"/>
+          </a:xfrm>
+          <a:prstGeom prst="ellipse">
+            <a:avLst/>
+          </a:prstGeom>
+          <a:solidFill>
+            <a:schemeClr val="bg1"/>
+          </a:solidFill>
+          <a:ln>
+            <a:solidFill>
+              <a:schemeClr val="tx1"/>
+            </a:solidFill>
+          </a:ln>
+        </p:spPr>
+        <p:style>
+          <a:lnRef idx="2">
+            <a:schemeClr val="accent1">
+              <a:shade val="15000"/>
+            </a:schemeClr>
+          </a:lnRef>
+          <a:fillRef idx="1">
+            <a:schemeClr val="accent1"/>
+          </a:fillRef>
+          <a:effectRef idx="0">
+            <a:schemeClr val="accent1"/>
+          </a:effectRef>
+          <a:fontRef idx="minor">
+            <a:schemeClr val="lt1"/>
+          </a:fontRef>
+        </p:style>
+        <p:txBody>
+          <a:bodyPr rtlCol="0" anchor="ctr"/>
+          <a:lstStyle/>
+          <a:p>
+            <a:pPr algn="ctr"/>
+            <a:r>
+              <a:rPr lang="en-US" dirty="0">
+                <a:solidFill>
+                  <a:schemeClr val="tx1"/>
+                </a:solidFill>
+              </a:rPr>
+              <a:t>5</a:t>
+            </a:r>
+          </a:p>
+        </p:txBody>
+      </p:sp>
+      <p:sp>
+        <p:nvSpPr>
+          <p:cNvPr id="10" name="Oval 9">
+            <a:extLst>
+              <a:ext uri="{FF2B5EF4-FFF2-40B4-BE49-F238E27FC236}">
+                <a16:creationId xmlns:a16="http://schemas.microsoft.com/office/drawing/2014/main" id="{5A2A6FA3-72CF-8EFF-2CA6-B49920D37F85}"/>
+              </a:ext>
+            </a:extLst>
+          </p:cNvPr>
+          <p:cNvSpPr>
+            <a:spLocks noChangeAspect="1"/>
+          </p:cNvSpPr>
+          <p:nvPr/>
+        </p:nvSpPr>
+        <p:spPr>
+          <a:xfrm>
+            <a:off x="3438144" y="2944368"/>
+            <a:ext cx="365760" cy="365760"/>
+          </a:xfrm>
+          <a:prstGeom prst="ellipse">
+            <a:avLst/>
+          </a:prstGeom>
+          <a:solidFill>
+            <a:schemeClr val="bg1"/>
+          </a:solidFill>
+          <a:ln>
+            <a:solidFill>
+              <a:schemeClr val="tx1"/>
+            </a:solidFill>
+          </a:ln>
+        </p:spPr>
+        <p:style>
+          <a:lnRef idx="2">
+            <a:schemeClr val="accent1">
+              <a:shade val="15000"/>
+            </a:schemeClr>
+          </a:lnRef>
+          <a:fillRef idx="1">
+            <a:schemeClr val="accent1"/>
+          </a:fillRef>
+          <a:effectRef idx="0">
+            <a:schemeClr val="accent1"/>
+          </a:effectRef>
+          <a:fontRef idx="minor">
+            <a:schemeClr val="lt1"/>
+          </a:fontRef>
+        </p:style>
+        <p:txBody>
+          <a:bodyPr rtlCol="0" anchor="ctr"/>
+          <a:lstStyle/>
+          <a:p>
+            <a:pPr algn="ctr"/>
+            <a:r>
+              <a:rPr lang="en-US" dirty="0">
+                <a:solidFill>
+                  <a:schemeClr val="tx1"/>
+                </a:solidFill>
+              </a:rPr>
+              <a:t>6</a:t>
+            </a:r>
+          </a:p>
+        </p:txBody>
+      </p:sp>
+      <p:sp>
+        <p:nvSpPr>
+          <p:cNvPr id="11" name="Oval 10">
+            <a:extLst>
+              <a:ext uri="{FF2B5EF4-FFF2-40B4-BE49-F238E27FC236}">
+                <a16:creationId xmlns:a16="http://schemas.microsoft.com/office/drawing/2014/main" id="{99FFB259-17BC-E232-FB06-92D3593C114F}"/>
+              </a:ext>
+            </a:extLst>
+          </p:cNvPr>
+          <p:cNvSpPr>
+            <a:spLocks noChangeAspect="1"/>
+          </p:cNvSpPr>
+          <p:nvPr/>
+        </p:nvSpPr>
+        <p:spPr>
+          <a:xfrm>
+            <a:off x="2350008" y="1883664"/>
+            <a:ext cx="365760" cy="365760"/>
+          </a:xfrm>
+          <a:prstGeom prst="ellipse">
+            <a:avLst/>
+          </a:prstGeom>
+          <a:solidFill>
+            <a:schemeClr val="bg1"/>
+          </a:solidFill>
+          <a:ln>
+            <a:solidFill>
+              <a:schemeClr val="tx1"/>
+            </a:solidFill>
+          </a:ln>
+        </p:spPr>
+        <p:style>
+          <a:lnRef idx="2">
+            <a:schemeClr val="accent1">
+              <a:shade val="15000"/>
+            </a:schemeClr>
+          </a:lnRef>
+          <a:fillRef idx="1">
+            <a:schemeClr val="accent1"/>
+          </a:fillRef>
+          <a:effectRef idx="0">
+            <a:schemeClr val="accent1"/>
+          </a:effectRef>
+          <a:fontRef idx="minor">
+            <a:schemeClr val="lt1"/>
+          </a:fontRef>
+        </p:style>
+        <p:txBody>
+          <a:bodyPr rtlCol="0" anchor="ctr"/>
+          <a:lstStyle/>
+          <a:p>
+            <a:pPr algn="ctr"/>
+            <a:r>
+              <a:rPr lang="en-US" dirty="0">
+                <a:solidFill>
+                  <a:schemeClr val="tx1"/>
+                </a:solidFill>
+              </a:rPr>
+              <a:t>7</a:t>
+            </a:r>
+          </a:p>
+        </p:txBody>
+      </p:sp>
+      <p:sp>
+        <p:nvSpPr>
+          <p:cNvPr id="12" name="Oval 11">
+            <a:extLst>
+              <a:ext uri="{FF2B5EF4-FFF2-40B4-BE49-F238E27FC236}">
+                <a16:creationId xmlns:a16="http://schemas.microsoft.com/office/drawing/2014/main" id="{AC08D71B-951A-014D-A91C-12B19C5A1743}"/>
+              </a:ext>
+            </a:extLst>
+          </p:cNvPr>
+          <p:cNvSpPr>
+            <a:spLocks noChangeAspect="1"/>
+          </p:cNvSpPr>
+          <p:nvPr/>
+        </p:nvSpPr>
+        <p:spPr>
+          <a:xfrm>
+            <a:off x="1261872" y="2944368"/>
+            <a:ext cx="365760" cy="365760"/>
+          </a:xfrm>
+          <a:prstGeom prst="ellipse">
+            <a:avLst/>
+          </a:prstGeom>
+          <a:solidFill>
+            <a:schemeClr val="bg1"/>
+          </a:solidFill>
+          <a:ln>
+            <a:solidFill>
+              <a:schemeClr val="tx1"/>
+            </a:solidFill>
+          </a:ln>
+        </p:spPr>
+        <p:style>
+          <a:lnRef idx="2">
+            <a:schemeClr val="accent1">
+              <a:shade val="15000"/>
+            </a:schemeClr>
+          </a:lnRef>
+          <a:fillRef idx="1">
+            <a:schemeClr val="accent1"/>
+          </a:fillRef>
+          <a:effectRef idx="0">
+            <a:schemeClr val="accent1"/>
+          </a:effectRef>
+          <a:fontRef idx="minor">
+            <a:schemeClr val="lt1"/>
+          </a:fontRef>
+        </p:style>
+        <p:txBody>
+          <a:bodyPr rtlCol="0" anchor="ctr"/>
+          <a:lstStyle/>
+          <a:p>
+            <a:pPr algn="ctr"/>
+            <a:r>
+              <a:rPr lang="en-US" dirty="0">
+                <a:solidFill>
+                  <a:schemeClr val="tx1"/>
+                </a:solidFill>
+              </a:rPr>
+              <a:t>8</a:t>
+            </a:r>
+          </a:p>
+        </p:txBody>
+      </p:sp>
+      <p:sp>
+        <p:nvSpPr>
+          <p:cNvPr id="13" name="Rectangle 12">
+            <a:extLst>
+              <a:ext uri="{FF2B5EF4-FFF2-40B4-BE49-F238E27FC236}">
+                <a16:creationId xmlns:a16="http://schemas.microsoft.com/office/drawing/2014/main" id="{48E911B1-731E-FC0F-9A0D-97235F3947A1}"/>
+              </a:ext>
+            </a:extLst>
+          </p:cNvPr>
+          <p:cNvSpPr>
+            <a:spLocks noChangeAspect="1"/>
+          </p:cNvSpPr>
+          <p:nvPr/>
+        </p:nvSpPr>
+        <p:spPr>
+          <a:xfrm>
+            <a:off x="4931480" y="2066544"/>
+            <a:ext cx="2176272" cy="2121408"/>
+          </a:xfrm>
+          <a:prstGeom prst="rect">
+            <a:avLst/>
+          </a:prstGeom>
+        </p:spPr>
+        <p:style>
+          <a:lnRef idx="2">
+            <a:schemeClr val="accent1">
+              <a:shade val="15000"/>
+            </a:schemeClr>
+          </a:lnRef>
+          <a:fillRef idx="1">
+            <a:schemeClr val="accent1"/>
+          </a:fillRef>
+          <a:effectRef idx="0">
+            <a:schemeClr val="accent1"/>
+          </a:effectRef>
+          <a:fontRef idx="minor">
+            <a:schemeClr val="lt1"/>
+          </a:fontRef>
+        </p:style>
+        <p:txBody>
+          <a:bodyPr rtlCol="0" anchor="ctr"/>
+          <a:lstStyle/>
+          <a:p>
+            <a:pPr algn="ctr"/>
+            <a:r>
+              <a:rPr lang="en-US" dirty="0"/>
+              <a:t> </a:t>
+            </a:r>
+          </a:p>
+        </p:txBody>
+      </p:sp>
+      <p:sp>
+        <p:nvSpPr>
+          <p:cNvPr id="14" name="Oval 13">
+            <a:extLst>
+              <a:ext uri="{FF2B5EF4-FFF2-40B4-BE49-F238E27FC236}">
+                <a16:creationId xmlns:a16="http://schemas.microsoft.com/office/drawing/2014/main" id="{D0821093-2C7D-AA9F-3537-E86A5595E1A3}"/>
+              </a:ext>
+            </a:extLst>
+          </p:cNvPr>
+          <p:cNvSpPr>
+            <a:spLocks noChangeAspect="1"/>
+          </p:cNvSpPr>
+          <p:nvPr/>
+        </p:nvSpPr>
+        <p:spPr>
+          <a:xfrm>
+            <a:off x="4748600" y="4004518"/>
+            <a:ext cx="365760" cy="365760"/>
+          </a:xfrm>
+          <a:prstGeom prst="ellipse">
+            <a:avLst/>
+          </a:prstGeom>
+          <a:solidFill>
+            <a:schemeClr val="bg1"/>
+          </a:solidFill>
+          <a:ln>
+            <a:solidFill>
+              <a:schemeClr val="tx1"/>
+            </a:solidFill>
+          </a:ln>
+        </p:spPr>
+        <p:style>
+          <a:lnRef idx="2">
+            <a:schemeClr val="accent1">
+              <a:shade val="15000"/>
+            </a:schemeClr>
+          </a:lnRef>
+          <a:fillRef idx="1">
+            <a:schemeClr val="accent1"/>
+          </a:fillRef>
+          <a:effectRef idx="0">
+            <a:schemeClr val="accent1"/>
+          </a:effectRef>
+          <a:fontRef idx="minor">
+            <a:schemeClr val="lt1"/>
+          </a:fontRef>
+        </p:style>
+        <p:txBody>
+          <a:bodyPr rtlCol="0" anchor="ctr"/>
+          <a:lstStyle/>
+          <a:p>
+            <a:pPr algn="ctr"/>
+            <a:r>
+              <a:rPr lang="en-US" dirty="0">
+                <a:solidFill>
+                  <a:schemeClr val="tx1"/>
+                </a:solidFill>
+              </a:rPr>
+              <a:t>1</a:t>
+            </a:r>
+          </a:p>
+        </p:txBody>
+      </p:sp>
+      <p:sp>
+        <p:nvSpPr>
+          <p:cNvPr id="15" name="Oval 14">
+            <a:extLst>
+              <a:ext uri="{FF2B5EF4-FFF2-40B4-BE49-F238E27FC236}">
+                <a16:creationId xmlns:a16="http://schemas.microsoft.com/office/drawing/2014/main" id="{36119D4B-C93F-D111-9CAC-5757717C4B3D}"/>
+              </a:ext>
+            </a:extLst>
+          </p:cNvPr>
+          <p:cNvSpPr>
+            <a:spLocks noChangeAspect="1"/>
+          </p:cNvSpPr>
+          <p:nvPr/>
+        </p:nvSpPr>
+        <p:spPr>
+          <a:xfrm>
+            <a:off x="6924872" y="4004518"/>
+            <a:ext cx="365760" cy="365760"/>
+          </a:xfrm>
+          <a:prstGeom prst="ellipse">
+            <a:avLst/>
+          </a:prstGeom>
+          <a:solidFill>
+            <a:schemeClr val="bg1"/>
+          </a:solidFill>
+          <a:ln>
+            <a:solidFill>
+              <a:schemeClr val="tx1"/>
+            </a:solidFill>
+          </a:ln>
+        </p:spPr>
+        <p:style>
+          <a:lnRef idx="2">
+            <a:schemeClr val="accent1">
+              <a:shade val="15000"/>
+            </a:schemeClr>
+          </a:lnRef>
+          <a:fillRef idx="1">
+            <a:schemeClr val="accent1"/>
+          </a:fillRef>
+          <a:effectRef idx="0">
+            <a:schemeClr val="accent1"/>
+          </a:effectRef>
+          <a:fontRef idx="minor">
+            <a:schemeClr val="lt1"/>
+          </a:fontRef>
+        </p:style>
+        <p:txBody>
+          <a:bodyPr rtlCol="0" anchor="ctr"/>
+          <a:lstStyle/>
+          <a:p>
+            <a:pPr algn="ctr"/>
+            <a:r>
+              <a:rPr lang="en-US" dirty="0">
+                <a:solidFill>
+                  <a:schemeClr val="tx1"/>
+                </a:solidFill>
+              </a:rPr>
+              <a:t>2</a:t>
+            </a:r>
+          </a:p>
+        </p:txBody>
+      </p:sp>
+      <p:sp>
+        <p:nvSpPr>
+          <p:cNvPr id="16" name="Oval 15">
+            <a:extLst>
+              <a:ext uri="{FF2B5EF4-FFF2-40B4-BE49-F238E27FC236}">
+                <a16:creationId xmlns:a16="http://schemas.microsoft.com/office/drawing/2014/main" id="{426B807A-1676-F5FA-4764-0242F3551957}"/>
+              </a:ext>
+            </a:extLst>
+          </p:cNvPr>
+          <p:cNvSpPr>
+            <a:spLocks noChangeAspect="1"/>
+          </p:cNvSpPr>
+          <p:nvPr/>
+        </p:nvSpPr>
+        <p:spPr>
+          <a:xfrm>
+            <a:off x="6924872" y="1883664"/>
+            <a:ext cx="365760" cy="365760"/>
+          </a:xfrm>
+          <a:prstGeom prst="ellipse">
+            <a:avLst/>
+          </a:prstGeom>
+          <a:solidFill>
+            <a:schemeClr val="bg1"/>
+          </a:solidFill>
+          <a:ln>
+            <a:solidFill>
+              <a:schemeClr val="tx1"/>
+            </a:solidFill>
+          </a:ln>
+        </p:spPr>
+        <p:style>
+          <a:lnRef idx="2">
+            <a:schemeClr val="accent1">
+              <a:shade val="15000"/>
+            </a:schemeClr>
+          </a:lnRef>
+          <a:fillRef idx="1">
+            <a:schemeClr val="accent1"/>
+          </a:fillRef>
+          <a:effectRef idx="0">
+            <a:schemeClr val="accent1"/>
+          </a:effectRef>
+          <a:fontRef idx="minor">
+            <a:schemeClr val="lt1"/>
+          </a:fontRef>
+        </p:style>
+        <p:txBody>
+          <a:bodyPr rtlCol="0" anchor="ctr"/>
+          <a:lstStyle/>
+          <a:p>
+            <a:pPr algn="ctr"/>
+            <a:r>
+              <a:rPr lang="en-US" dirty="0">
+                <a:solidFill>
+                  <a:schemeClr val="tx1"/>
+                </a:solidFill>
+              </a:rPr>
+              <a:t>3</a:t>
+            </a:r>
+          </a:p>
+        </p:txBody>
+      </p:sp>
+      <p:sp>
+        <p:nvSpPr>
+          <p:cNvPr id="17" name="Oval 16">
+            <a:extLst>
+              <a:ext uri="{FF2B5EF4-FFF2-40B4-BE49-F238E27FC236}">
+                <a16:creationId xmlns:a16="http://schemas.microsoft.com/office/drawing/2014/main" id="{5D670BCA-0595-A3F0-13FA-1CDA1241B77A}"/>
+              </a:ext>
+            </a:extLst>
+          </p:cNvPr>
+          <p:cNvSpPr>
+            <a:spLocks noChangeAspect="1"/>
+          </p:cNvSpPr>
+          <p:nvPr/>
+        </p:nvSpPr>
+        <p:spPr>
+          <a:xfrm>
+            <a:off x="4748600" y="1883664"/>
+            <a:ext cx="365760" cy="365760"/>
+          </a:xfrm>
+          <a:prstGeom prst="ellipse">
+            <a:avLst/>
+          </a:prstGeom>
+          <a:solidFill>
+            <a:schemeClr val="bg1"/>
+          </a:solidFill>
+          <a:ln>
+            <a:solidFill>
+              <a:schemeClr val="tx1"/>
+            </a:solidFill>
+          </a:ln>
+        </p:spPr>
+        <p:style>
+          <a:lnRef idx="2">
+            <a:schemeClr val="accent1">
+              <a:shade val="15000"/>
+            </a:schemeClr>
+          </a:lnRef>
+          <a:fillRef idx="1">
+            <a:schemeClr val="accent1"/>
+          </a:fillRef>
+          <a:effectRef idx="0">
+            <a:schemeClr val="accent1"/>
+          </a:effectRef>
+          <a:fontRef idx="minor">
+            <a:schemeClr val="lt1"/>
+          </a:fontRef>
+        </p:style>
+        <p:txBody>
+          <a:bodyPr rtlCol="0" anchor="ctr"/>
+          <a:lstStyle/>
+          <a:p>
+            <a:pPr algn="ctr"/>
+            <a:r>
+              <a:rPr lang="en-US" dirty="0">
+                <a:solidFill>
+                  <a:schemeClr val="tx1"/>
+                </a:solidFill>
+              </a:rPr>
+              <a:t>4</a:t>
+            </a:r>
+          </a:p>
+        </p:txBody>
+      </p:sp>
+      <p:sp>
+        <p:nvSpPr>
+          <p:cNvPr id="18" name="Oval 17">
+            <a:extLst>
+              <a:ext uri="{FF2B5EF4-FFF2-40B4-BE49-F238E27FC236}">
+                <a16:creationId xmlns:a16="http://schemas.microsoft.com/office/drawing/2014/main" id="{575F7397-AD00-724D-1CD8-70FA2C28AE84}"/>
+              </a:ext>
+            </a:extLst>
+          </p:cNvPr>
+          <p:cNvSpPr>
+            <a:spLocks noChangeAspect="1"/>
+          </p:cNvSpPr>
+          <p:nvPr/>
+        </p:nvSpPr>
+        <p:spPr>
+          <a:xfrm>
+            <a:off x="5836736" y="4004518"/>
+            <a:ext cx="365760" cy="365760"/>
+          </a:xfrm>
+          <a:prstGeom prst="ellipse">
+            <a:avLst/>
+          </a:prstGeom>
+          <a:solidFill>
+            <a:schemeClr val="bg1"/>
+          </a:solidFill>
+          <a:ln>
+            <a:solidFill>
+              <a:schemeClr val="tx1"/>
+            </a:solidFill>
+          </a:ln>
+        </p:spPr>
+        <p:style>
+          <a:lnRef idx="2">
+            <a:schemeClr val="accent1">
+              <a:shade val="15000"/>
+            </a:schemeClr>
+          </a:lnRef>
+          <a:fillRef idx="1">
+            <a:schemeClr val="accent1"/>
+          </a:fillRef>
+          <a:effectRef idx="0">
+            <a:schemeClr val="accent1"/>
+          </a:effectRef>
+          <a:fontRef idx="minor">
+            <a:schemeClr val="lt1"/>
+          </a:fontRef>
+        </p:style>
+        <p:txBody>
+          <a:bodyPr rtlCol="0" anchor="ctr"/>
+          <a:lstStyle/>
+          <a:p>
+            <a:pPr algn="ctr"/>
+            <a:r>
+              <a:rPr lang="en-US" dirty="0">
+                <a:solidFill>
+                  <a:schemeClr val="tx1"/>
+                </a:solidFill>
+              </a:rPr>
+              <a:t>5</a:t>
+            </a:r>
+          </a:p>
+        </p:txBody>
+      </p:sp>
+      <p:sp>
+        <p:nvSpPr>
+          <p:cNvPr id="19" name="Oval 18">
+            <a:extLst>
+              <a:ext uri="{FF2B5EF4-FFF2-40B4-BE49-F238E27FC236}">
+                <a16:creationId xmlns:a16="http://schemas.microsoft.com/office/drawing/2014/main" id="{18B0ADB3-F5C2-F533-A203-19BDDCA0C819}"/>
+              </a:ext>
+            </a:extLst>
+          </p:cNvPr>
+          <p:cNvSpPr>
+            <a:spLocks noChangeAspect="1"/>
+          </p:cNvSpPr>
+          <p:nvPr/>
+        </p:nvSpPr>
+        <p:spPr>
+          <a:xfrm>
+            <a:off x="6924872" y="2944368"/>
+            <a:ext cx="365760" cy="365760"/>
+          </a:xfrm>
+          <a:prstGeom prst="ellipse">
+            <a:avLst/>
+          </a:prstGeom>
+          <a:solidFill>
+            <a:schemeClr val="bg1"/>
+          </a:solidFill>
+          <a:ln>
+            <a:solidFill>
+              <a:schemeClr val="tx1"/>
+            </a:solidFill>
+          </a:ln>
+        </p:spPr>
+        <p:style>
+          <a:lnRef idx="2">
+            <a:schemeClr val="accent1">
+              <a:shade val="15000"/>
+            </a:schemeClr>
+          </a:lnRef>
+          <a:fillRef idx="1">
+            <a:schemeClr val="accent1"/>
+          </a:fillRef>
+          <a:effectRef idx="0">
+            <a:schemeClr val="accent1"/>
+          </a:effectRef>
+          <a:fontRef idx="minor">
+            <a:schemeClr val="lt1"/>
+          </a:fontRef>
+        </p:style>
+        <p:txBody>
+          <a:bodyPr rtlCol="0" anchor="ctr"/>
+          <a:lstStyle/>
+          <a:p>
+            <a:pPr algn="ctr"/>
+            <a:r>
+              <a:rPr lang="en-US" dirty="0">
+                <a:solidFill>
+                  <a:schemeClr val="tx1"/>
+                </a:solidFill>
+              </a:rPr>
+              <a:t>6</a:t>
+            </a:r>
+          </a:p>
+        </p:txBody>
+      </p:sp>
+      <p:sp>
+        <p:nvSpPr>
+          <p:cNvPr id="20" name="Oval 19">
+            <a:extLst>
+              <a:ext uri="{FF2B5EF4-FFF2-40B4-BE49-F238E27FC236}">
+                <a16:creationId xmlns:a16="http://schemas.microsoft.com/office/drawing/2014/main" id="{3024DD33-D753-0773-20A1-AE4B9931DA35}"/>
+              </a:ext>
+            </a:extLst>
+          </p:cNvPr>
+          <p:cNvSpPr>
+            <a:spLocks noChangeAspect="1"/>
+          </p:cNvSpPr>
+          <p:nvPr/>
+        </p:nvSpPr>
+        <p:spPr>
+          <a:xfrm>
+            <a:off x="5836736" y="1883664"/>
+            <a:ext cx="365760" cy="365760"/>
+          </a:xfrm>
+          <a:prstGeom prst="ellipse">
+            <a:avLst/>
+          </a:prstGeom>
+          <a:solidFill>
+            <a:schemeClr val="bg1"/>
+          </a:solidFill>
+          <a:ln>
+            <a:solidFill>
+              <a:schemeClr val="tx1"/>
+            </a:solidFill>
+          </a:ln>
+        </p:spPr>
+        <p:style>
+          <a:lnRef idx="2">
+            <a:schemeClr val="accent1">
+              <a:shade val="15000"/>
+            </a:schemeClr>
+          </a:lnRef>
+          <a:fillRef idx="1">
+            <a:schemeClr val="accent1"/>
+          </a:fillRef>
+          <a:effectRef idx="0">
+            <a:schemeClr val="accent1"/>
+          </a:effectRef>
+          <a:fontRef idx="minor">
+            <a:schemeClr val="lt1"/>
+          </a:fontRef>
+        </p:style>
+        <p:txBody>
+          <a:bodyPr rtlCol="0" anchor="ctr"/>
+          <a:lstStyle/>
+          <a:p>
+            <a:pPr algn="ctr"/>
+            <a:r>
+              <a:rPr lang="en-US" dirty="0">
+                <a:solidFill>
+                  <a:schemeClr val="tx1"/>
+                </a:solidFill>
+              </a:rPr>
+              <a:t>7</a:t>
+            </a:r>
+          </a:p>
+        </p:txBody>
+      </p:sp>
+      <p:sp>
+        <p:nvSpPr>
+          <p:cNvPr id="22" name="Rectangle 21">
+            <a:extLst>
+              <a:ext uri="{FF2B5EF4-FFF2-40B4-BE49-F238E27FC236}">
+                <a16:creationId xmlns:a16="http://schemas.microsoft.com/office/drawing/2014/main" id="{8048BCD8-ABDD-F35B-CA7E-62BC354653B9}"/>
+              </a:ext>
+            </a:extLst>
+          </p:cNvPr>
+          <p:cNvSpPr>
+            <a:spLocks noChangeAspect="1"/>
+          </p:cNvSpPr>
+          <p:nvPr/>
+        </p:nvSpPr>
+        <p:spPr>
+          <a:xfrm>
+            <a:off x="8235328" y="2066544"/>
+            <a:ext cx="2176272" cy="2121408"/>
+          </a:xfrm>
+          <a:prstGeom prst="rect">
+            <a:avLst/>
+          </a:prstGeom>
+        </p:spPr>
+        <p:style>
+          <a:lnRef idx="2">
+            <a:schemeClr val="accent1">
+              <a:shade val="15000"/>
+            </a:schemeClr>
+          </a:lnRef>
+          <a:fillRef idx="1">
+            <a:schemeClr val="accent1"/>
+          </a:fillRef>
+          <a:effectRef idx="0">
+            <a:schemeClr val="accent1"/>
+          </a:effectRef>
+          <a:fontRef idx="minor">
+            <a:schemeClr val="lt1"/>
+          </a:fontRef>
+        </p:style>
+        <p:txBody>
+          <a:bodyPr rtlCol="0" anchor="ctr"/>
+          <a:lstStyle/>
+          <a:p>
+            <a:pPr algn="ctr"/>
+            <a:r>
+              <a:rPr lang="en-US" dirty="0"/>
+              <a:t> </a:t>
+            </a:r>
+          </a:p>
+        </p:txBody>
+      </p:sp>
+      <p:sp>
+        <p:nvSpPr>
+          <p:cNvPr id="23" name="Oval 22">
+            <a:extLst>
+              <a:ext uri="{FF2B5EF4-FFF2-40B4-BE49-F238E27FC236}">
+                <a16:creationId xmlns:a16="http://schemas.microsoft.com/office/drawing/2014/main" id="{5B66B8E5-7026-CCA5-89F7-8606AAFEC85B}"/>
+              </a:ext>
+            </a:extLst>
+          </p:cNvPr>
+          <p:cNvSpPr>
+            <a:spLocks noChangeAspect="1"/>
+          </p:cNvSpPr>
+          <p:nvPr/>
+        </p:nvSpPr>
+        <p:spPr>
+          <a:xfrm>
+            <a:off x="8052448" y="4004518"/>
+            <a:ext cx="365760" cy="365760"/>
+          </a:xfrm>
+          <a:prstGeom prst="ellipse">
+            <a:avLst/>
+          </a:prstGeom>
+          <a:solidFill>
+            <a:schemeClr val="bg1"/>
+          </a:solidFill>
+          <a:ln>
+            <a:solidFill>
+              <a:schemeClr val="tx1"/>
+            </a:solidFill>
+          </a:ln>
+        </p:spPr>
+        <p:style>
+          <a:lnRef idx="2">
+            <a:schemeClr val="accent1">
+              <a:shade val="15000"/>
+            </a:schemeClr>
+          </a:lnRef>
+          <a:fillRef idx="1">
+            <a:schemeClr val="accent1"/>
+          </a:fillRef>
+          <a:effectRef idx="0">
+            <a:schemeClr val="accent1"/>
+          </a:effectRef>
+          <a:fontRef idx="minor">
+            <a:schemeClr val="lt1"/>
+          </a:fontRef>
+        </p:style>
+        <p:txBody>
+          <a:bodyPr rtlCol="0" anchor="ctr"/>
+          <a:lstStyle/>
+          <a:p>
+            <a:pPr algn="ctr"/>
+            <a:r>
+              <a:rPr lang="en-US" dirty="0">
+                <a:solidFill>
+                  <a:schemeClr val="tx1"/>
+                </a:solidFill>
+              </a:rPr>
+              <a:t>1</a:t>
+            </a:r>
+          </a:p>
+        </p:txBody>
+      </p:sp>
+      <p:sp>
+        <p:nvSpPr>
+          <p:cNvPr id="24" name="Oval 23">
+            <a:extLst>
+              <a:ext uri="{FF2B5EF4-FFF2-40B4-BE49-F238E27FC236}">
+                <a16:creationId xmlns:a16="http://schemas.microsoft.com/office/drawing/2014/main" id="{552FF112-9ABC-417B-661A-47899A6A9BD7}"/>
+              </a:ext>
+            </a:extLst>
+          </p:cNvPr>
+          <p:cNvSpPr>
+            <a:spLocks noChangeAspect="1"/>
+          </p:cNvSpPr>
+          <p:nvPr/>
+        </p:nvSpPr>
+        <p:spPr>
+          <a:xfrm>
+            <a:off x="10228720" y="4004518"/>
+            <a:ext cx="365760" cy="365760"/>
+          </a:xfrm>
+          <a:prstGeom prst="ellipse">
+            <a:avLst/>
+          </a:prstGeom>
+          <a:solidFill>
+            <a:schemeClr val="bg1"/>
+          </a:solidFill>
+          <a:ln>
+            <a:solidFill>
+              <a:schemeClr val="tx1"/>
+            </a:solidFill>
+          </a:ln>
+        </p:spPr>
+        <p:style>
+          <a:lnRef idx="2">
+            <a:schemeClr val="accent1">
+              <a:shade val="15000"/>
+            </a:schemeClr>
+          </a:lnRef>
+          <a:fillRef idx="1">
+            <a:schemeClr val="accent1"/>
+          </a:fillRef>
+          <a:effectRef idx="0">
+            <a:schemeClr val="accent1"/>
+          </a:effectRef>
+          <a:fontRef idx="minor">
+            <a:schemeClr val="lt1"/>
+          </a:fontRef>
+        </p:style>
+        <p:txBody>
+          <a:bodyPr rtlCol="0" anchor="ctr"/>
+          <a:lstStyle/>
+          <a:p>
+            <a:pPr algn="ctr"/>
+            <a:r>
+              <a:rPr lang="en-US" dirty="0">
+                <a:solidFill>
+                  <a:schemeClr val="tx1"/>
+                </a:solidFill>
+              </a:rPr>
+              <a:t>2</a:t>
+            </a:r>
+          </a:p>
+        </p:txBody>
+      </p:sp>
+      <p:sp>
+        <p:nvSpPr>
+          <p:cNvPr id="25" name="Oval 24">
+            <a:extLst>
+              <a:ext uri="{FF2B5EF4-FFF2-40B4-BE49-F238E27FC236}">
+                <a16:creationId xmlns:a16="http://schemas.microsoft.com/office/drawing/2014/main" id="{A01FA29A-28BE-A07B-8B2B-FFA53F2038D2}"/>
+              </a:ext>
+            </a:extLst>
+          </p:cNvPr>
+          <p:cNvSpPr>
+            <a:spLocks noChangeAspect="1"/>
+          </p:cNvSpPr>
+          <p:nvPr/>
+        </p:nvSpPr>
+        <p:spPr>
+          <a:xfrm>
+            <a:off x="10228720" y="1883664"/>
+            <a:ext cx="365760" cy="365760"/>
+          </a:xfrm>
+          <a:prstGeom prst="ellipse">
+            <a:avLst/>
+          </a:prstGeom>
+          <a:solidFill>
+            <a:schemeClr val="bg1"/>
+          </a:solidFill>
+          <a:ln>
+            <a:solidFill>
+              <a:schemeClr val="tx1"/>
+            </a:solidFill>
+          </a:ln>
+        </p:spPr>
+        <p:style>
+          <a:lnRef idx="2">
+            <a:schemeClr val="accent1">
+              <a:shade val="15000"/>
+            </a:schemeClr>
+          </a:lnRef>
+          <a:fillRef idx="1">
+            <a:schemeClr val="accent1"/>
+          </a:fillRef>
+          <a:effectRef idx="0">
+            <a:schemeClr val="accent1"/>
+          </a:effectRef>
+          <a:fontRef idx="minor">
+            <a:schemeClr val="lt1"/>
+          </a:fontRef>
+        </p:style>
+        <p:txBody>
+          <a:bodyPr rtlCol="0" anchor="ctr"/>
+          <a:lstStyle/>
+          <a:p>
+            <a:pPr algn="ctr"/>
+            <a:r>
+              <a:rPr lang="en-US" dirty="0">
+                <a:solidFill>
+                  <a:schemeClr val="tx1"/>
+                </a:solidFill>
+              </a:rPr>
+              <a:t>3</a:t>
+            </a:r>
+          </a:p>
+        </p:txBody>
+      </p:sp>
+      <p:sp>
+        <p:nvSpPr>
+          <p:cNvPr id="26" name="Oval 25">
+            <a:extLst>
+              <a:ext uri="{FF2B5EF4-FFF2-40B4-BE49-F238E27FC236}">
+                <a16:creationId xmlns:a16="http://schemas.microsoft.com/office/drawing/2014/main" id="{EA30F116-61B6-4543-D51A-4A94D7F7B600}"/>
+              </a:ext>
+            </a:extLst>
+          </p:cNvPr>
+          <p:cNvSpPr>
+            <a:spLocks noChangeAspect="1"/>
+          </p:cNvSpPr>
+          <p:nvPr/>
+        </p:nvSpPr>
+        <p:spPr>
+          <a:xfrm>
+            <a:off x="8052448" y="1883664"/>
+            <a:ext cx="365760" cy="365760"/>
+          </a:xfrm>
+          <a:prstGeom prst="ellipse">
+            <a:avLst/>
+          </a:prstGeom>
+          <a:solidFill>
+            <a:schemeClr val="bg1"/>
+          </a:solidFill>
+          <a:ln>
+            <a:solidFill>
+              <a:schemeClr val="tx1"/>
+            </a:solidFill>
+          </a:ln>
+        </p:spPr>
+        <p:style>
+          <a:lnRef idx="2">
+            <a:schemeClr val="accent1">
+              <a:shade val="15000"/>
+            </a:schemeClr>
+          </a:lnRef>
+          <a:fillRef idx="1">
+            <a:schemeClr val="accent1"/>
+          </a:fillRef>
+          <a:effectRef idx="0">
+            <a:schemeClr val="accent1"/>
+          </a:effectRef>
+          <a:fontRef idx="minor">
+            <a:schemeClr val="lt1"/>
+          </a:fontRef>
+        </p:style>
+        <p:txBody>
+          <a:bodyPr rtlCol="0" anchor="ctr"/>
+          <a:lstStyle/>
+          <a:p>
+            <a:pPr algn="ctr"/>
+            <a:r>
+              <a:rPr lang="en-US" dirty="0">
+                <a:solidFill>
+                  <a:schemeClr val="tx1"/>
+                </a:solidFill>
+              </a:rPr>
+              <a:t>4</a:t>
+            </a:r>
+          </a:p>
+        </p:txBody>
+      </p:sp>
+      <p:sp>
+        <p:nvSpPr>
+          <p:cNvPr id="27" name="Oval 26">
+            <a:extLst>
+              <a:ext uri="{FF2B5EF4-FFF2-40B4-BE49-F238E27FC236}">
+                <a16:creationId xmlns:a16="http://schemas.microsoft.com/office/drawing/2014/main" id="{7AA3D8FE-3722-EA4C-A082-138E4625CFB1}"/>
+              </a:ext>
+            </a:extLst>
+          </p:cNvPr>
+          <p:cNvSpPr>
+            <a:spLocks noChangeAspect="1"/>
+          </p:cNvSpPr>
+          <p:nvPr/>
+        </p:nvSpPr>
+        <p:spPr>
+          <a:xfrm>
+            <a:off x="9140584" y="4004518"/>
+            <a:ext cx="365760" cy="365760"/>
+          </a:xfrm>
+          <a:prstGeom prst="ellipse">
+            <a:avLst/>
+          </a:prstGeom>
+          <a:solidFill>
+            <a:schemeClr val="bg1"/>
+          </a:solidFill>
+          <a:ln>
+            <a:solidFill>
+              <a:schemeClr val="tx1"/>
+            </a:solidFill>
+          </a:ln>
+        </p:spPr>
+        <p:style>
+          <a:lnRef idx="2">
+            <a:schemeClr val="accent1">
+              <a:shade val="15000"/>
+            </a:schemeClr>
+          </a:lnRef>
+          <a:fillRef idx="1">
+            <a:schemeClr val="accent1"/>
+          </a:fillRef>
+          <a:effectRef idx="0">
+            <a:schemeClr val="accent1"/>
+          </a:effectRef>
+          <a:fontRef idx="minor">
+            <a:schemeClr val="lt1"/>
+          </a:fontRef>
+        </p:style>
+        <p:txBody>
+          <a:bodyPr rtlCol="0" anchor="ctr"/>
+          <a:lstStyle/>
+          <a:p>
+            <a:pPr algn="ctr"/>
+            <a:r>
+              <a:rPr lang="en-US" dirty="0">
+                <a:solidFill>
+                  <a:schemeClr val="tx1"/>
+                </a:solidFill>
+              </a:rPr>
+              <a:t>5</a:t>
+            </a:r>
+          </a:p>
+        </p:txBody>
+      </p:sp>
+      <p:sp>
+        <p:nvSpPr>
+          <p:cNvPr id="28" name="Oval 27">
+            <a:extLst>
+              <a:ext uri="{FF2B5EF4-FFF2-40B4-BE49-F238E27FC236}">
+                <a16:creationId xmlns:a16="http://schemas.microsoft.com/office/drawing/2014/main" id="{2CF4A067-4F85-7EBC-85F9-55BB5C62AEDD}"/>
+              </a:ext>
+            </a:extLst>
+          </p:cNvPr>
+          <p:cNvSpPr>
+            <a:spLocks noChangeAspect="1"/>
+          </p:cNvSpPr>
+          <p:nvPr/>
+        </p:nvSpPr>
+        <p:spPr>
+          <a:xfrm>
+            <a:off x="10228720" y="2944368"/>
+            <a:ext cx="365760" cy="365760"/>
+          </a:xfrm>
+          <a:prstGeom prst="ellipse">
+            <a:avLst/>
+          </a:prstGeom>
+          <a:solidFill>
+            <a:schemeClr val="bg1"/>
+          </a:solidFill>
+          <a:ln>
+            <a:solidFill>
+              <a:schemeClr val="tx1"/>
+            </a:solidFill>
+          </a:ln>
+        </p:spPr>
+        <p:style>
+          <a:lnRef idx="2">
+            <a:schemeClr val="accent1">
+              <a:shade val="15000"/>
+            </a:schemeClr>
+          </a:lnRef>
+          <a:fillRef idx="1">
+            <a:schemeClr val="accent1"/>
+          </a:fillRef>
+          <a:effectRef idx="0">
+            <a:schemeClr val="accent1"/>
+          </a:effectRef>
+          <a:fontRef idx="minor">
+            <a:schemeClr val="lt1"/>
+          </a:fontRef>
+        </p:style>
+        <p:txBody>
+          <a:bodyPr rtlCol="0" anchor="ctr"/>
+          <a:lstStyle/>
+          <a:p>
+            <a:pPr algn="ctr"/>
+            <a:r>
+              <a:rPr lang="en-US" dirty="0">
+                <a:solidFill>
+                  <a:schemeClr val="tx1"/>
+                </a:solidFill>
+              </a:rPr>
+              <a:t>6</a:t>
+            </a:r>
+          </a:p>
+        </p:txBody>
+      </p:sp>
+    </p:spTree>
+    <p:extLst>
+      <p:ext uri="{BB962C8B-B14F-4D97-AF65-F5344CB8AC3E}">
+        <p14:creationId xmlns:p14="http://schemas.microsoft.com/office/powerpoint/2010/main" val="773246975"/>
+      </p:ext>
+    </p:extLst>
+  </p:cSld>
+  <p:clrMapOvr>
+    <a:masterClrMapping/>
+  </p:clrMapOvr>
+</p:sld>
+</file>
+
 <file path=ppt/theme/theme1.xml><?xml version="1.0" encoding="utf-8"?>
 <a:theme xmlns:a="http://schemas.openxmlformats.org/drawingml/2006/main" name="Office Theme">
   <a:themeElements>

--- a/!Report/Report_Figures.pptx
+++ b/!Report/Report_Figures.pptx
@@ -8,8 +8,14 @@
     <p:sldId id="256" r:id="rId2"/>
     <p:sldId id="257" r:id="rId3"/>
     <p:sldId id="258" r:id="rId4"/>
-    <p:sldId id="259" r:id="rId5"/>
+    <p:sldId id="263" r:id="rId5"/>
     <p:sldId id="260" r:id="rId6"/>
+    <p:sldId id="261" r:id="rId7"/>
+    <p:sldId id="262" r:id="rId8"/>
+    <p:sldId id="264" r:id="rId9"/>
+    <p:sldId id="265" r:id="rId10"/>
+    <p:sldId id="266" r:id="rId11"/>
+    <p:sldId id="267" r:id="rId12"/>
   </p:sldIdLst>
   <p:sldSz cx="12192000" cy="6858000"/>
   <p:notesSz cx="6858000" cy="9144000"/>
@@ -120,12 +126,18 @@
           <p14:sldIdLst>
             <p14:sldId id="257"/>
             <p14:sldId id="258"/>
-            <p14:sldId id="259"/>
+            <p14:sldId id="263"/>
           </p14:sldIdLst>
         </p14:section>
         <p14:section name="Untitled Section" id="{EC0180D3-008C-4847-9FF6-0EC2D2E4D2CD}">
           <p14:sldIdLst>
             <p14:sldId id="260"/>
+            <p14:sldId id="261"/>
+            <p14:sldId id="262"/>
+            <p14:sldId id="264"/>
+            <p14:sldId id="265"/>
+            <p14:sldId id="266"/>
+            <p14:sldId id="267"/>
           </p14:sldIdLst>
         </p14:section>
       </p14:sectionLst>
@@ -3752,6 +3764,670 @@
 </p:sld>
 </file>
 
+<file path=ppt/slides/slide10.xml><?xml version="1.0" encoding="utf-8"?>
+<p:sld xmlns:a="http://schemas.openxmlformats.org/drawingml/2006/main" xmlns:r="http://schemas.openxmlformats.org/officeDocument/2006/relationships" xmlns:p="http://schemas.openxmlformats.org/presentationml/2006/main">
+  <p:cSld>
+    <p:spTree>
+      <p:nvGrpSpPr>
+        <p:cNvPr id="1" name=""/>
+        <p:cNvGrpSpPr/>
+        <p:nvPr/>
+      </p:nvGrpSpPr>
+      <p:grpSpPr>
+        <a:xfrm>
+          <a:off x="0" y="0"/>
+          <a:ext cx="0" cy="0"/>
+          <a:chOff x="0" y="0"/>
+          <a:chExt cx="0" cy="0"/>
+        </a:xfrm>
+      </p:grpSpPr>
+      <p:sp>
+        <p:nvSpPr>
+          <p:cNvPr id="2" name="Title 1">
+            <a:extLst>
+              <a:ext uri="{FF2B5EF4-FFF2-40B4-BE49-F238E27FC236}">
+                <a16:creationId xmlns:a16="http://schemas.microsoft.com/office/drawing/2014/main" id="{D4307945-9BD7-2A78-CFFC-9CF1ACDB5CBF}"/>
+              </a:ext>
+            </a:extLst>
+          </p:cNvPr>
+          <p:cNvSpPr>
+            <a:spLocks noGrp="1"/>
+          </p:cNvSpPr>
+          <p:nvPr>
+            <p:ph type="title"/>
+          </p:nvPr>
+        </p:nvSpPr>
+        <p:spPr/>
+        <p:txBody>
+          <a:bodyPr/>
+          <a:lstStyle/>
+          <a:p>
+            <a:endParaRPr lang="en-US"/>
+          </a:p>
+        </p:txBody>
+      </p:sp>
+      <p:sp>
+        <p:nvSpPr>
+          <p:cNvPr id="3" name="Content Placeholder 2">
+            <a:extLst>
+              <a:ext uri="{FF2B5EF4-FFF2-40B4-BE49-F238E27FC236}">
+                <a16:creationId xmlns:a16="http://schemas.microsoft.com/office/drawing/2014/main" id="{65C5BBF1-0AC7-E443-0C27-C26F733585B1}"/>
+              </a:ext>
+            </a:extLst>
+          </p:cNvPr>
+          <p:cNvSpPr>
+            <a:spLocks noGrp="1"/>
+          </p:cNvSpPr>
+          <p:nvPr>
+            <p:ph idx="1"/>
+          </p:nvPr>
+        </p:nvSpPr>
+        <p:spPr/>
+        <p:txBody>
+          <a:bodyPr/>
+          <a:lstStyle/>
+          <a:p>
+            <a:endParaRPr lang="en-US" dirty="0"/>
+          </a:p>
+        </p:txBody>
+      </p:sp>
+      <p:pic>
+        <p:nvPicPr>
+          <p:cNvPr id="4" name="Picture 3">
+            <a:extLst>
+              <a:ext uri="{FF2B5EF4-FFF2-40B4-BE49-F238E27FC236}">
+                <a16:creationId xmlns:a16="http://schemas.microsoft.com/office/drawing/2014/main" id="{12310675-AF12-A371-A32E-390524AE3E16}"/>
+              </a:ext>
+            </a:extLst>
+          </p:cNvPr>
+          <p:cNvPicPr>
+            <a:picLocks noChangeAspect="1"/>
+          </p:cNvPicPr>
+          <p:nvPr/>
+        </p:nvPicPr>
+        <p:blipFill>
+          <a:blip r:embed="rId2"/>
+          <a:stretch>
+            <a:fillRect/>
+          </a:stretch>
+        </p:blipFill>
+        <p:spPr>
+          <a:xfrm>
+            <a:off x="-512410" y="2448227"/>
+            <a:ext cx="4272446" cy="2675414"/>
+          </a:xfrm>
+          <a:prstGeom prst="rect">
+            <a:avLst/>
+          </a:prstGeom>
+          <a:ln>
+            <a:solidFill>
+              <a:srgbClr val="FF0000"/>
+            </a:solidFill>
+          </a:ln>
+        </p:spPr>
+      </p:pic>
+      <p:pic>
+        <p:nvPicPr>
+          <p:cNvPr id="6" name="Picture 5">
+            <a:extLst>
+              <a:ext uri="{FF2B5EF4-FFF2-40B4-BE49-F238E27FC236}">
+                <a16:creationId xmlns:a16="http://schemas.microsoft.com/office/drawing/2014/main" id="{20C3652F-575E-4824-9D83-DB33FD07E5A6}"/>
+              </a:ext>
+            </a:extLst>
+          </p:cNvPr>
+          <p:cNvPicPr>
+            <a:picLocks noChangeAspect="1"/>
+          </p:cNvPicPr>
+          <p:nvPr/>
+        </p:nvPicPr>
+        <p:blipFill>
+          <a:blip r:embed="rId3"/>
+          <a:stretch>
+            <a:fillRect/>
+          </a:stretch>
+        </p:blipFill>
+        <p:spPr>
+          <a:xfrm>
+            <a:off x="3764282" y="2448227"/>
+            <a:ext cx="4374663" cy="2675414"/>
+          </a:xfrm>
+          <a:prstGeom prst="rect">
+            <a:avLst/>
+          </a:prstGeom>
+          <a:ln>
+            <a:solidFill>
+              <a:srgbClr val="FF0000"/>
+            </a:solidFill>
+          </a:ln>
+        </p:spPr>
+      </p:pic>
+      <p:pic>
+        <p:nvPicPr>
+          <p:cNvPr id="8" name="Picture 7">
+            <a:extLst>
+              <a:ext uri="{FF2B5EF4-FFF2-40B4-BE49-F238E27FC236}">
+                <a16:creationId xmlns:a16="http://schemas.microsoft.com/office/drawing/2014/main" id="{4610F456-AE07-5A8C-CDAE-52EC5943A79D}"/>
+              </a:ext>
+            </a:extLst>
+          </p:cNvPr>
+          <p:cNvPicPr>
+            <a:picLocks noChangeAspect="1"/>
+          </p:cNvPicPr>
+          <p:nvPr/>
+        </p:nvPicPr>
+        <p:blipFill>
+          <a:blip r:embed="rId4"/>
+          <a:stretch>
+            <a:fillRect/>
+          </a:stretch>
+        </p:blipFill>
+        <p:spPr>
+          <a:xfrm>
+            <a:off x="8138945" y="2448227"/>
+            <a:ext cx="4292152" cy="2675414"/>
+          </a:xfrm>
+          <a:prstGeom prst="rect">
+            <a:avLst/>
+          </a:prstGeom>
+          <a:ln>
+            <a:solidFill>
+              <a:srgbClr val="FF0000"/>
+            </a:solidFill>
+          </a:ln>
+        </p:spPr>
+      </p:pic>
+      <p:sp>
+        <p:nvSpPr>
+          <p:cNvPr id="9" name="Rectangle 8">
+            <a:extLst>
+              <a:ext uri="{FF2B5EF4-FFF2-40B4-BE49-F238E27FC236}">
+                <a16:creationId xmlns:a16="http://schemas.microsoft.com/office/drawing/2014/main" id="{B74316FF-9706-156E-402E-66CE1A53E2E6}"/>
+              </a:ext>
+            </a:extLst>
+          </p:cNvPr>
+          <p:cNvSpPr/>
+          <p:nvPr/>
+        </p:nvSpPr>
+        <p:spPr>
+          <a:xfrm>
+            <a:off x="1802310" y="2747442"/>
+            <a:ext cx="1380744" cy="448056"/>
+          </a:xfrm>
+          <a:prstGeom prst="rect">
+            <a:avLst/>
+          </a:prstGeom>
+        </p:spPr>
+        <p:style>
+          <a:lnRef idx="2">
+            <a:schemeClr val="accent1">
+              <a:shade val="15000"/>
+            </a:schemeClr>
+          </a:lnRef>
+          <a:fillRef idx="1">
+            <a:schemeClr val="accent1"/>
+          </a:fillRef>
+          <a:effectRef idx="0">
+            <a:schemeClr val="accent1"/>
+          </a:effectRef>
+          <a:fontRef idx="minor">
+            <a:schemeClr val="lt1"/>
+          </a:fontRef>
+        </p:style>
+        <p:txBody>
+          <a:bodyPr rtlCol="0" anchor="ctr"/>
+          <a:lstStyle/>
+          <a:p>
+            <a:pPr algn="ctr"/>
+            <a:r>
+              <a:rPr lang="en-US" dirty="0"/>
+              <a:t>CQ8_4</a:t>
+            </a:r>
+          </a:p>
+        </p:txBody>
+      </p:sp>
+      <p:sp>
+        <p:nvSpPr>
+          <p:cNvPr id="10" name="Rectangle 9">
+            <a:extLst>
+              <a:ext uri="{FF2B5EF4-FFF2-40B4-BE49-F238E27FC236}">
+                <a16:creationId xmlns:a16="http://schemas.microsoft.com/office/drawing/2014/main" id="{0EC86A83-8C69-048B-1D1F-D2C250269E2E}"/>
+              </a:ext>
+            </a:extLst>
+          </p:cNvPr>
+          <p:cNvSpPr/>
+          <p:nvPr/>
+        </p:nvSpPr>
+        <p:spPr>
+          <a:xfrm>
+            <a:off x="6096000" y="2718973"/>
+            <a:ext cx="1380744" cy="448056"/>
+          </a:xfrm>
+          <a:prstGeom prst="rect">
+            <a:avLst/>
+          </a:prstGeom>
+        </p:spPr>
+        <p:style>
+          <a:lnRef idx="2">
+            <a:schemeClr val="accent1">
+              <a:shade val="15000"/>
+            </a:schemeClr>
+          </a:lnRef>
+          <a:fillRef idx="1">
+            <a:schemeClr val="accent1"/>
+          </a:fillRef>
+          <a:effectRef idx="0">
+            <a:schemeClr val="accent1"/>
+          </a:effectRef>
+          <a:fontRef idx="minor">
+            <a:schemeClr val="lt1"/>
+          </a:fontRef>
+        </p:style>
+        <p:txBody>
+          <a:bodyPr rtlCol="0" anchor="ctr"/>
+          <a:lstStyle/>
+          <a:p>
+            <a:pPr algn="ctr"/>
+            <a:r>
+              <a:rPr lang="en-US" dirty="0"/>
+              <a:t>CQ8_16</a:t>
+            </a:r>
+          </a:p>
+        </p:txBody>
+      </p:sp>
+      <p:sp>
+        <p:nvSpPr>
+          <p:cNvPr id="11" name="Rectangle 10">
+            <a:extLst>
+              <a:ext uri="{FF2B5EF4-FFF2-40B4-BE49-F238E27FC236}">
+                <a16:creationId xmlns:a16="http://schemas.microsoft.com/office/drawing/2014/main" id="{3E611FC3-462F-6829-8BC4-0B3332C60917}"/>
+              </a:ext>
+            </a:extLst>
+          </p:cNvPr>
+          <p:cNvSpPr/>
+          <p:nvPr/>
+        </p:nvSpPr>
+        <p:spPr>
+          <a:xfrm>
+            <a:off x="10470663" y="2718973"/>
+            <a:ext cx="1380744" cy="448056"/>
+          </a:xfrm>
+          <a:prstGeom prst="rect">
+            <a:avLst/>
+          </a:prstGeom>
+        </p:spPr>
+        <p:style>
+          <a:lnRef idx="2">
+            <a:schemeClr val="accent1">
+              <a:shade val="15000"/>
+            </a:schemeClr>
+          </a:lnRef>
+          <a:fillRef idx="1">
+            <a:schemeClr val="accent1"/>
+          </a:fillRef>
+          <a:effectRef idx="0">
+            <a:schemeClr val="accent1"/>
+          </a:effectRef>
+          <a:fontRef idx="minor">
+            <a:schemeClr val="lt1"/>
+          </a:fontRef>
+        </p:style>
+        <p:txBody>
+          <a:bodyPr rtlCol="0" anchor="ctr"/>
+          <a:lstStyle/>
+          <a:p>
+            <a:pPr algn="ctr"/>
+            <a:r>
+              <a:rPr lang="en-US" dirty="0"/>
+              <a:t>CQ8_28</a:t>
+            </a:r>
+          </a:p>
+        </p:txBody>
+      </p:sp>
+    </p:spTree>
+    <p:extLst>
+      <p:ext uri="{BB962C8B-B14F-4D97-AF65-F5344CB8AC3E}">
+        <p14:creationId xmlns:p14="http://schemas.microsoft.com/office/powerpoint/2010/main" val="2404499532"/>
+      </p:ext>
+    </p:extLst>
+  </p:cSld>
+  <p:clrMapOvr>
+    <a:masterClrMapping/>
+  </p:clrMapOvr>
+</p:sld>
+</file>
+
+<file path=ppt/slides/slide11.xml><?xml version="1.0" encoding="utf-8"?>
+<p:sld xmlns:a="http://schemas.openxmlformats.org/drawingml/2006/main" xmlns:r="http://schemas.openxmlformats.org/officeDocument/2006/relationships" xmlns:p="http://schemas.openxmlformats.org/presentationml/2006/main">
+  <p:cSld>
+    <p:spTree>
+      <p:nvGrpSpPr>
+        <p:cNvPr id="1" name=""/>
+        <p:cNvGrpSpPr/>
+        <p:nvPr/>
+      </p:nvGrpSpPr>
+      <p:grpSpPr>
+        <a:xfrm>
+          <a:off x="0" y="0"/>
+          <a:ext cx="0" cy="0"/>
+          <a:chOff x="0" y="0"/>
+          <a:chExt cx="0" cy="0"/>
+        </a:xfrm>
+      </p:grpSpPr>
+      <p:sp>
+        <p:nvSpPr>
+          <p:cNvPr id="2" name="Title 1">
+            <a:extLst>
+              <a:ext uri="{FF2B5EF4-FFF2-40B4-BE49-F238E27FC236}">
+                <a16:creationId xmlns:a16="http://schemas.microsoft.com/office/drawing/2014/main" id="{580373E3-BF77-3D0B-1EB0-D4C7D8B93DD4}"/>
+              </a:ext>
+            </a:extLst>
+          </p:cNvPr>
+          <p:cNvSpPr>
+            <a:spLocks noGrp="1"/>
+          </p:cNvSpPr>
+          <p:nvPr>
+            <p:ph type="title"/>
+          </p:nvPr>
+        </p:nvSpPr>
+        <p:spPr/>
+        <p:txBody>
+          <a:bodyPr/>
+          <a:lstStyle/>
+          <a:p>
+            <a:endParaRPr lang="en-US"/>
+          </a:p>
+        </p:txBody>
+      </p:sp>
+      <p:sp>
+        <p:nvSpPr>
+          <p:cNvPr id="3" name="Content Placeholder 2">
+            <a:extLst>
+              <a:ext uri="{FF2B5EF4-FFF2-40B4-BE49-F238E27FC236}">
+                <a16:creationId xmlns:a16="http://schemas.microsoft.com/office/drawing/2014/main" id="{4E671BAB-8C59-6851-EF3C-9C06E88013FF}"/>
+              </a:ext>
+            </a:extLst>
+          </p:cNvPr>
+          <p:cNvSpPr>
+            <a:spLocks noGrp="1"/>
+          </p:cNvSpPr>
+          <p:nvPr>
+            <p:ph idx="1"/>
+          </p:nvPr>
+        </p:nvSpPr>
+        <p:spPr/>
+        <p:txBody>
+          <a:bodyPr/>
+          <a:lstStyle/>
+          <a:p>
+            <a:endParaRPr lang="en-US" dirty="0"/>
+          </a:p>
+        </p:txBody>
+      </p:sp>
+      <p:pic>
+        <p:nvPicPr>
+          <p:cNvPr id="5" name="Picture 4">
+            <a:extLst>
+              <a:ext uri="{FF2B5EF4-FFF2-40B4-BE49-F238E27FC236}">
+                <a16:creationId xmlns:a16="http://schemas.microsoft.com/office/drawing/2014/main" id="{418D5F59-D232-9C3E-897F-E5B1F9EAFD22}"/>
+              </a:ext>
+            </a:extLst>
+          </p:cNvPr>
+          <p:cNvPicPr>
+            <a:picLocks noChangeAspect="1"/>
+          </p:cNvPicPr>
+          <p:nvPr/>
+        </p:nvPicPr>
+        <p:blipFill>
+          <a:blip r:embed="rId2"/>
+          <a:stretch>
+            <a:fillRect/>
+          </a:stretch>
+        </p:blipFill>
+        <p:spPr>
+          <a:xfrm>
+            <a:off x="-791245" y="2594041"/>
+            <a:ext cx="4001741" cy="2490594"/>
+          </a:xfrm>
+          <a:prstGeom prst="rect">
+            <a:avLst/>
+          </a:prstGeom>
+          <a:ln>
+            <a:solidFill>
+              <a:srgbClr val="FF0000"/>
+            </a:solidFill>
+          </a:ln>
+        </p:spPr>
+      </p:pic>
+      <p:pic>
+        <p:nvPicPr>
+          <p:cNvPr id="7" name="Picture 6">
+            <a:extLst>
+              <a:ext uri="{FF2B5EF4-FFF2-40B4-BE49-F238E27FC236}">
+                <a16:creationId xmlns:a16="http://schemas.microsoft.com/office/drawing/2014/main" id="{515E22C3-D375-B8EC-7F3D-B095E825D000}"/>
+              </a:ext>
+            </a:extLst>
+          </p:cNvPr>
+          <p:cNvPicPr>
+            <a:picLocks noChangeAspect="1"/>
+          </p:cNvPicPr>
+          <p:nvPr/>
+        </p:nvPicPr>
+        <p:blipFill>
+          <a:blip r:embed="rId3"/>
+          <a:stretch>
+            <a:fillRect/>
+          </a:stretch>
+        </p:blipFill>
+        <p:spPr>
+          <a:xfrm>
+            <a:off x="3210496" y="2594041"/>
+            <a:ext cx="3958400" cy="2486908"/>
+          </a:xfrm>
+          <a:prstGeom prst="rect">
+            <a:avLst/>
+          </a:prstGeom>
+          <a:ln>
+            <a:solidFill>
+              <a:srgbClr val="FF0000"/>
+            </a:solidFill>
+          </a:ln>
+        </p:spPr>
+      </p:pic>
+      <p:pic>
+        <p:nvPicPr>
+          <p:cNvPr id="9" name="Picture 8">
+            <a:extLst>
+              <a:ext uri="{FF2B5EF4-FFF2-40B4-BE49-F238E27FC236}">
+                <a16:creationId xmlns:a16="http://schemas.microsoft.com/office/drawing/2014/main" id="{F9346FED-E9F3-3523-4885-002978145877}"/>
+              </a:ext>
+            </a:extLst>
+          </p:cNvPr>
+          <p:cNvPicPr>
+            <a:picLocks noChangeAspect="1"/>
+          </p:cNvPicPr>
+          <p:nvPr/>
+        </p:nvPicPr>
+        <p:blipFill>
+          <a:blip r:embed="rId4"/>
+          <a:stretch>
+            <a:fillRect/>
+          </a:stretch>
+        </p:blipFill>
+        <p:spPr>
+          <a:xfrm>
+            <a:off x="7168896" y="2594042"/>
+            <a:ext cx="4142779" cy="2486908"/>
+          </a:xfrm>
+          <a:prstGeom prst="rect">
+            <a:avLst/>
+          </a:prstGeom>
+          <a:ln>
+            <a:solidFill>
+              <a:srgbClr val="FF0000"/>
+            </a:solidFill>
+          </a:ln>
+        </p:spPr>
+      </p:pic>
+      <p:sp>
+        <p:nvSpPr>
+          <p:cNvPr id="10" name="Rectangle 9">
+            <a:extLst>
+              <a:ext uri="{FF2B5EF4-FFF2-40B4-BE49-F238E27FC236}">
+                <a16:creationId xmlns:a16="http://schemas.microsoft.com/office/drawing/2014/main" id="{075C1C0C-BAEA-26DD-1BB3-423DAF1C8DDB}"/>
+              </a:ext>
+            </a:extLst>
+          </p:cNvPr>
+          <p:cNvSpPr/>
+          <p:nvPr/>
+        </p:nvSpPr>
+        <p:spPr>
+          <a:xfrm>
+            <a:off x="1089078" y="2838882"/>
+            <a:ext cx="1380744" cy="448056"/>
+          </a:xfrm>
+          <a:prstGeom prst="rect">
+            <a:avLst/>
+          </a:prstGeom>
+        </p:spPr>
+        <p:style>
+          <a:lnRef idx="2">
+            <a:schemeClr val="accent1">
+              <a:shade val="15000"/>
+            </a:schemeClr>
+          </a:lnRef>
+          <a:fillRef idx="1">
+            <a:schemeClr val="accent1"/>
+          </a:fillRef>
+          <a:effectRef idx="0">
+            <a:schemeClr val="accent1"/>
+          </a:effectRef>
+          <a:fontRef idx="minor">
+            <a:schemeClr val="lt1"/>
+          </a:fontRef>
+        </p:style>
+        <p:txBody>
+          <a:bodyPr rtlCol="0" anchor="ctr"/>
+          <a:lstStyle/>
+          <a:p>
+            <a:pPr algn="ctr"/>
+            <a:r>
+              <a:rPr lang="en-US" dirty="0"/>
+              <a:t>CQ4_4</a:t>
+            </a:r>
+          </a:p>
+        </p:txBody>
+      </p:sp>
+      <p:sp>
+        <p:nvSpPr>
+          <p:cNvPr id="11" name="Rectangle 10">
+            <a:extLst>
+              <a:ext uri="{FF2B5EF4-FFF2-40B4-BE49-F238E27FC236}">
+                <a16:creationId xmlns:a16="http://schemas.microsoft.com/office/drawing/2014/main" id="{2F0A06DC-B606-4F06-A921-466E8816C110}"/>
+              </a:ext>
+            </a:extLst>
+          </p:cNvPr>
+          <p:cNvSpPr/>
+          <p:nvPr/>
+        </p:nvSpPr>
+        <p:spPr>
+          <a:xfrm>
+            <a:off x="5382768" y="2810413"/>
+            <a:ext cx="1380744" cy="448056"/>
+          </a:xfrm>
+          <a:prstGeom prst="rect">
+            <a:avLst/>
+          </a:prstGeom>
+        </p:spPr>
+        <p:style>
+          <a:lnRef idx="2">
+            <a:schemeClr val="accent1">
+              <a:shade val="15000"/>
+            </a:schemeClr>
+          </a:lnRef>
+          <a:fillRef idx="1">
+            <a:schemeClr val="accent1"/>
+          </a:fillRef>
+          <a:effectRef idx="0">
+            <a:schemeClr val="accent1"/>
+          </a:effectRef>
+          <a:fontRef idx="minor">
+            <a:schemeClr val="lt1"/>
+          </a:fontRef>
+        </p:style>
+        <p:txBody>
+          <a:bodyPr rtlCol="0" anchor="ctr"/>
+          <a:lstStyle/>
+          <a:p>
+            <a:pPr algn="ctr"/>
+            <a:r>
+              <a:rPr lang="en-US" dirty="0"/>
+              <a:t>CQ4_10</a:t>
+            </a:r>
+          </a:p>
+        </p:txBody>
+      </p:sp>
+      <p:sp>
+        <p:nvSpPr>
+          <p:cNvPr id="12" name="Rectangle 11">
+            <a:extLst>
+              <a:ext uri="{FF2B5EF4-FFF2-40B4-BE49-F238E27FC236}">
+                <a16:creationId xmlns:a16="http://schemas.microsoft.com/office/drawing/2014/main" id="{65C79CA3-89EE-340D-8D60-56C1C6941F00}"/>
+              </a:ext>
+            </a:extLst>
+          </p:cNvPr>
+          <p:cNvSpPr/>
+          <p:nvPr/>
+        </p:nvSpPr>
+        <p:spPr>
+          <a:xfrm>
+            <a:off x="9757431" y="2810413"/>
+            <a:ext cx="1380744" cy="448056"/>
+          </a:xfrm>
+          <a:prstGeom prst="rect">
+            <a:avLst/>
+          </a:prstGeom>
+        </p:spPr>
+        <p:style>
+          <a:lnRef idx="2">
+            <a:schemeClr val="accent1">
+              <a:shade val="15000"/>
+            </a:schemeClr>
+          </a:lnRef>
+          <a:fillRef idx="1">
+            <a:schemeClr val="accent1"/>
+          </a:fillRef>
+          <a:effectRef idx="0">
+            <a:schemeClr val="accent1"/>
+          </a:effectRef>
+          <a:fontRef idx="minor">
+            <a:schemeClr val="lt1"/>
+          </a:fontRef>
+        </p:style>
+        <p:txBody>
+          <a:bodyPr rtlCol="0" anchor="ctr"/>
+          <a:lstStyle/>
+          <a:p>
+            <a:pPr algn="ctr"/>
+            <a:r>
+              <a:rPr lang="en-US" dirty="0"/>
+              <a:t>CQ4_28</a:t>
+            </a:r>
+          </a:p>
+        </p:txBody>
+      </p:sp>
+    </p:spTree>
+    <p:extLst>
+      <p:ext uri="{BB962C8B-B14F-4D97-AF65-F5344CB8AC3E}">
+        <p14:creationId xmlns:p14="http://schemas.microsoft.com/office/powerpoint/2010/main" val="3258427610"/>
+      </p:ext>
+    </p:extLst>
+  </p:cSld>
+  <p:clrMapOvr>
+    <a:masterClrMapping/>
+  </p:clrMapOvr>
+</p:sld>
+</file>
+
 <file path=ppt/slides/slide2.xml><?xml version="1.0" encoding="utf-8"?>
 <p:sld xmlns:a="http://schemas.openxmlformats.org/drawingml/2006/main" xmlns:r="http://schemas.openxmlformats.org/officeDocument/2006/relationships" xmlns:p="http://schemas.openxmlformats.org/presentationml/2006/main">
   <p:cSld>
@@ -3771,10 +4447,10 @@
       </p:grpSpPr>
       <p:pic>
         <p:nvPicPr>
-          <p:cNvPr id="5" name="Picture 4">
-            <a:extLst>
-              <a:ext uri="{FF2B5EF4-FFF2-40B4-BE49-F238E27FC236}">
-                <a16:creationId xmlns:a16="http://schemas.microsoft.com/office/drawing/2014/main" id="{07B8848B-9FB0-B906-5A97-760E36FDA281}"/>
+          <p:cNvPr id="3" name="Picture 2">
+            <a:extLst>
+              <a:ext uri="{FF2B5EF4-FFF2-40B4-BE49-F238E27FC236}">
+                <a16:creationId xmlns:a16="http://schemas.microsoft.com/office/drawing/2014/main" id="{C70E19E6-0459-16A3-14B9-687E01DD0178}"/>
               </a:ext>
             </a:extLst>
           </p:cNvPr>
@@ -3785,55 +4461,18 @@
         </p:nvPicPr>
         <p:blipFill>
           <a:blip r:embed="rId2"/>
-          <a:srcRect r="5312"/>
           <a:stretch>
             <a:fillRect/>
           </a:stretch>
         </p:blipFill>
         <p:spPr>
           <a:xfrm>
-            <a:off x="1933575" y="359327"/>
-            <a:ext cx="10125076" cy="5100556"/>
+            <a:off x="2200724" y="436817"/>
+            <a:ext cx="8769668" cy="4245334"/>
           </a:xfrm>
           <a:prstGeom prst="rect">
             <a:avLst/>
           </a:prstGeom>
-        </p:spPr>
-      </p:pic>
-      <p:pic>
-        <p:nvPicPr>
-          <p:cNvPr id="7" name="Picture 6">
-            <a:extLst>
-              <a:ext uri="{FF2B5EF4-FFF2-40B4-BE49-F238E27FC236}">
-                <a16:creationId xmlns:a16="http://schemas.microsoft.com/office/drawing/2014/main" id="{8D21CFA5-DCC7-47B9-DDCD-33A9B6913F29}"/>
-              </a:ext>
-            </a:extLst>
-          </p:cNvPr>
-          <p:cNvPicPr>
-            <a:picLocks noChangeAspect="1"/>
-          </p:cNvPicPr>
-          <p:nvPr/>
-        </p:nvPicPr>
-        <p:blipFill>
-          <a:blip r:embed="rId3"/>
-          <a:srcRect t="18553"/>
-          <a:stretch>
-            <a:fillRect/>
-          </a:stretch>
-        </p:blipFill>
-        <p:spPr>
-          <a:xfrm>
-            <a:off x="809176" y="2771774"/>
-            <a:ext cx="1391548" cy="2174323"/>
-          </a:xfrm>
-          <a:prstGeom prst="rect">
-            <a:avLst/>
-          </a:prstGeom>
-          <a:ln w="19050">
-            <a:solidFill>
-              <a:srgbClr val="FF0000"/>
-            </a:solidFill>
-          </a:ln>
         </p:spPr>
       </p:pic>
       <p:sp>
@@ -3930,6 +4569,41 @@
           </a:fontRef>
         </p:style>
       </p:cxnSp>
+      <p:pic>
+        <p:nvPicPr>
+          <p:cNvPr id="6" name="Picture 5">
+            <a:extLst>
+              <a:ext uri="{FF2B5EF4-FFF2-40B4-BE49-F238E27FC236}">
+                <a16:creationId xmlns:a16="http://schemas.microsoft.com/office/drawing/2014/main" id="{FF81C3C0-F4C5-68A9-2083-B85E02BA3289}"/>
+              </a:ext>
+            </a:extLst>
+          </p:cNvPr>
+          <p:cNvPicPr>
+            <a:picLocks noChangeAspect="1"/>
+          </p:cNvPicPr>
+          <p:nvPr/>
+        </p:nvPicPr>
+        <p:blipFill>
+          <a:blip r:embed="rId3"/>
+          <a:stretch>
+            <a:fillRect/>
+          </a:stretch>
+        </p:blipFill>
+        <p:spPr>
+          <a:xfrm rot="5400000">
+            <a:off x="45499" y="2035289"/>
+            <a:ext cx="3262061" cy="1048389"/>
+          </a:xfrm>
+          <a:prstGeom prst="rect">
+            <a:avLst/>
+          </a:prstGeom>
+          <a:ln w="19050">
+            <a:solidFill>
+              <a:srgbClr val="FF0000"/>
+            </a:solidFill>
+          </a:ln>
+        </p:spPr>
+      </p:pic>
     </p:spTree>
     <p:extLst>
       <p:ext uri="{BB962C8B-B14F-4D97-AF65-F5344CB8AC3E}">
@@ -3962,10 +4636,10 @@
       </p:grpSpPr>
       <p:pic>
         <p:nvPicPr>
-          <p:cNvPr id="4" name="Picture 3">
-            <a:extLst>
-              <a:ext uri="{FF2B5EF4-FFF2-40B4-BE49-F238E27FC236}">
-                <a16:creationId xmlns:a16="http://schemas.microsoft.com/office/drawing/2014/main" id="{415390CB-B302-27AE-57E5-8FD326EC6B3B}"/>
+          <p:cNvPr id="3" name="Picture 2">
+            <a:extLst>
+              <a:ext uri="{FF2B5EF4-FFF2-40B4-BE49-F238E27FC236}">
+                <a16:creationId xmlns:a16="http://schemas.microsoft.com/office/drawing/2014/main" id="{D6B10864-35FF-3CE2-D078-8946D1936DB6}"/>
               </a:ext>
             </a:extLst>
           </p:cNvPr>
@@ -3976,22 +4650,22 @@
         </p:nvPicPr>
         <p:blipFill>
           <a:blip r:embed="rId2"/>
-          <a:srcRect t="18553"/>
+          <a:srcRect l="25835" r="20404"/>
           <a:stretch>
             <a:fillRect/>
           </a:stretch>
         </p:blipFill>
         <p:spPr>
-          <a:xfrm>
-            <a:off x="3483795" y="694181"/>
-            <a:ext cx="3174179" cy="4959721"/>
+          <a:xfrm rot="5400000">
+            <a:off x="2983992" y="2109220"/>
+            <a:ext cx="3895343" cy="2328672"/>
           </a:xfrm>
           <a:prstGeom prst="rect">
             <a:avLst/>
           </a:prstGeom>
           <a:ln w="19050">
             <a:solidFill>
-              <a:schemeClr val="tx1"/>
+              <a:srgbClr val="FF0000"/>
             </a:solidFill>
           </a:ln>
         </p:spPr>
@@ -4504,6 +5178,41 @@
           </a:fontRef>
         </p:style>
       </p:cxnSp>
+      <p:pic>
+        <p:nvPicPr>
+          <p:cNvPr id="2" name="Picture 1">
+            <a:extLst>
+              <a:ext uri="{FF2B5EF4-FFF2-40B4-BE49-F238E27FC236}">
+                <a16:creationId xmlns:a16="http://schemas.microsoft.com/office/drawing/2014/main" id="{D768C42E-4D77-FB48-87E9-516302C74355}"/>
+              </a:ext>
+            </a:extLst>
+          </p:cNvPr>
+          <p:cNvPicPr>
+            <a:picLocks noChangeAspect="1"/>
+          </p:cNvPicPr>
+          <p:nvPr/>
+        </p:nvPicPr>
+        <p:blipFill>
+          <a:blip r:embed="rId2"/>
+          <a:stretch>
+            <a:fillRect/>
+          </a:stretch>
+        </p:blipFill>
+        <p:spPr>
+          <a:xfrm rot="5400000">
+            <a:off x="45499" y="2035289"/>
+            <a:ext cx="3262061" cy="1048389"/>
+          </a:xfrm>
+          <a:prstGeom prst="rect">
+            <a:avLst/>
+          </a:prstGeom>
+          <a:ln w="19050">
+            <a:solidFill>
+              <a:srgbClr val="FF0000"/>
+            </a:solidFill>
+          </a:ln>
+        </p:spPr>
+      </p:pic>
     </p:spTree>
     <p:extLst>
       <p:ext uri="{BB962C8B-B14F-4D97-AF65-F5344CB8AC3E}">
@@ -4522,7 +5231,13 @@
   <p:cSld>
     <p:spTree>
       <p:nvGrpSpPr>
-        <p:cNvPr id="1" name=""/>
+        <p:cNvPr id="1" name="">
+          <a:extLst>
+            <a:ext uri="{FF2B5EF4-FFF2-40B4-BE49-F238E27FC236}">
+              <a16:creationId xmlns:a16="http://schemas.microsoft.com/office/drawing/2014/main" id="{BA91C091-231F-768F-88A7-A7F8A9A881FE}"/>
+            </a:ext>
+          </a:extLst>
+        </p:cNvPr>
         <p:cNvGrpSpPr/>
         <p:nvPr/>
       </p:nvGrpSpPr>
@@ -4536,10 +5251,10 @@
       </p:grpSpPr>
       <p:pic>
         <p:nvPicPr>
-          <p:cNvPr id="5" name="Picture 4">
-            <a:extLst>
-              <a:ext uri="{FF2B5EF4-FFF2-40B4-BE49-F238E27FC236}">
-                <a16:creationId xmlns:a16="http://schemas.microsoft.com/office/drawing/2014/main" id="{08FE9AAB-0156-630F-DF6B-A819D1968EB7}"/>
+          <p:cNvPr id="11" name="Picture 10">
+            <a:extLst>
+              <a:ext uri="{FF2B5EF4-FFF2-40B4-BE49-F238E27FC236}">
+                <a16:creationId xmlns:a16="http://schemas.microsoft.com/office/drawing/2014/main" id="{B133FFB6-3E5C-DF41-2751-C5F90556DD2D}"/>
               </a:ext>
             </a:extLst>
           </p:cNvPr>
@@ -4556,8 +5271,8 @@
         </p:blipFill>
         <p:spPr>
           <a:xfrm>
-            <a:off x="1700212" y="1247775"/>
-            <a:ext cx="8791575" cy="4362450"/>
+            <a:off x="385762" y="1624012"/>
+            <a:ext cx="10201275" cy="3438525"/>
           </a:xfrm>
           <a:prstGeom prst="rect">
             <a:avLst/>
@@ -4569,7 +5284,7 @@
           <p:cNvPr id="6" name="Rectangle 5">
             <a:extLst>
               <a:ext uri="{FF2B5EF4-FFF2-40B4-BE49-F238E27FC236}">
-                <a16:creationId xmlns:a16="http://schemas.microsoft.com/office/drawing/2014/main" id="{2E607261-E12F-D42C-6F68-9D731CE6986B}"/>
+                <a16:creationId xmlns:a16="http://schemas.microsoft.com/office/drawing/2014/main" id="{07FDD1D8-3583-BA39-3120-8250618F5F56}"/>
               </a:ext>
             </a:extLst>
           </p:cNvPr>
@@ -4578,8 +5293,8 @@
         </p:nvSpPr>
         <p:spPr>
           <a:xfrm>
-            <a:off x="7515225" y="1428750"/>
-            <a:ext cx="1994536" cy="2000250"/>
+            <a:off x="6296025" y="1457325"/>
+            <a:ext cx="1581150" cy="1600200"/>
           </a:xfrm>
           <a:prstGeom prst="rect">
             <a:avLst/>
@@ -4607,50 +5322,50 @@
           <a:p>
             <a:pPr algn="ctr"/>
             <a:r>
-              <a:rPr lang="en-US" dirty="0"/>
-              <a:t>Over Conservative</a:t>
+              <a:rPr lang="en-US" sz="1200" dirty="0"/>
+              <a:t>Under Conservative</a:t>
             </a:r>
           </a:p>
           <a:p>
             <a:pPr algn="ctr"/>
             <a:r>
-              <a:rPr lang="en-US" dirty="0"/>
-              <a:t>H = 2*2.25 = 4.5</a:t>
+              <a:rPr lang="en-US" sz="1200" dirty="0"/>
+              <a:t>H = 2*(0.75+0.25) = 2</a:t>
             </a:r>
           </a:p>
           <a:p>
             <a:pPr algn="ctr"/>
             <a:r>
-              <a:rPr lang="en-US" dirty="0"/>
-              <a:t>d = 1.456</a:t>
+              <a:rPr lang="en-US" sz="1200" dirty="0"/>
+              <a:t>d = 2*0.75 = 1.5</a:t>
             </a:r>
           </a:p>
           <a:p>
             <a:pPr algn="ctr"/>
             <a:r>
-              <a:rPr lang="en-US" dirty="0"/>
+              <a:rPr lang="en-US" sz="1200" dirty="0"/>
               <a:t>R = 0.25</a:t>
             </a:r>
           </a:p>
           <a:p>
             <a:pPr algn="ctr"/>
             <a:r>
-              <a:rPr lang="en-US" dirty="0"/>
-              <a:t>H/d = 3.09</a:t>
+              <a:rPr lang="en-US" sz="1200" dirty="0"/>
+              <a:t>H/d = 1.33</a:t>
             </a:r>
           </a:p>
           <a:p>
             <a:pPr algn="ctr"/>
             <a:r>
-              <a:rPr lang="en-US" dirty="0"/>
+              <a:rPr lang="en-US" sz="1200" dirty="0"/>
               <a:t>r/d = 0.17</a:t>
             </a:r>
           </a:p>
           <a:p>
             <a:pPr algn="ctr"/>
             <a:r>
-              <a:rPr lang="en-US" dirty="0"/>
-              <a:t>Kt ~ 2</a:t>
+              <a:rPr lang="en-US" sz="1200" dirty="0"/>
+              <a:t>Kt ~ 1.82</a:t>
             </a:r>
           </a:p>
         </p:txBody>
@@ -4660,7 +5375,7 @@
           <p:cNvPr id="7" name="Rectangle 6">
             <a:extLst>
               <a:ext uri="{FF2B5EF4-FFF2-40B4-BE49-F238E27FC236}">
-                <a16:creationId xmlns:a16="http://schemas.microsoft.com/office/drawing/2014/main" id="{9B720F9E-0C63-589D-9694-A2886E7B7AE9}"/>
+                <a16:creationId xmlns:a16="http://schemas.microsoft.com/office/drawing/2014/main" id="{CF644CAB-D531-FE6E-33FE-F06154C36B27}"/>
               </a:ext>
             </a:extLst>
           </p:cNvPr>
@@ -4669,8 +5384,8 @@
         </p:nvSpPr>
         <p:spPr>
           <a:xfrm>
-            <a:off x="9606152" y="1428750"/>
-            <a:ext cx="2143887" cy="2000250"/>
+            <a:off x="8101107" y="1457325"/>
+            <a:ext cx="1471423" cy="1600200"/>
           </a:xfrm>
           <a:prstGeom prst="rect">
             <a:avLst/>
@@ -4698,50 +5413,57 @@
           <a:p>
             <a:pPr algn="ctr"/>
             <a:r>
-              <a:rPr lang="en-US" dirty="0"/>
-              <a:t>Under Conservative</a:t>
+              <a:rPr lang="en-US" sz="1200" dirty="0"/>
+              <a:t>Over</a:t>
             </a:r>
           </a:p>
           <a:p>
             <a:pPr algn="ctr"/>
             <a:r>
-              <a:rPr lang="en-US" dirty="0"/>
-              <a:t>H = 2*1.353 = 2.706</a:t>
+              <a:rPr lang="en-US" sz="1200" dirty="0"/>
+              <a:t>Conservative</a:t>
             </a:r>
           </a:p>
           <a:p>
             <a:pPr algn="ctr"/>
             <a:r>
-              <a:rPr lang="en-US" dirty="0"/>
-              <a:t>d = 1.456</a:t>
+              <a:rPr lang="en-US" sz="1200" dirty="0"/>
+              <a:t>H = 2*2.25 = 4.5</a:t>
             </a:r>
           </a:p>
           <a:p>
             <a:pPr algn="ctr"/>
             <a:r>
-              <a:rPr lang="en-US" dirty="0"/>
+              <a:rPr lang="en-US" sz="1200" dirty="0"/>
+              <a:t>d = 1.5</a:t>
+            </a:r>
+          </a:p>
+          <a:p>
+            <a:pPr algn="ctr"/>
+            <a:r>
+              <a:rPr lang="en-US" sz="1200" dirty="0"/>
               <a:t>R = 0.25</a:t>
             </a:r>
           </a:p>
           <a:p>
             <a:pPr algn="ctr"/>
             <a:r>
-              <a:rPr lang="en-US" dirty="0"/>
-              <a:t>H/d = 1.85</a:t>
+              <a:rPr lang="en-US" sz="1200" dirty="0"/>
+              <a:t>H/d = 3</a:t>
             </a:r>
           </a:p>
           <a:p>
             <a:pPr algn="ctr"/>
             <a:r>
-              <a:rPr lang="en-US" dirty="0"/>
+              <a:rPr lang="en-US" sz="1200" dirty="0"/>
               <a:t>r/d = 0.17</a:t>
             </a:r>
           </a:p>
           <a:p>
             <a:pPr algn="ctr"/>
             <a:r>
-              <a:rPr lang="en-US" dirty="0"/>
-              <a:t>Kt ~ 2.5</a:t>
+              <a:rPr lang="en-US" sz="1200" dirty="0"/>
+              <a:t>Kt ~ 2.6</a:t>
             </a:r>
           </a:p>
         </p:txBody>
@@ -4749,7 +5471,7 @@
     </p:spTree>
     <p:extLst>
       <p:ext uri="{BB962C8B-B14F-4D97-AF65-F5344CB8AC3E}">
-        <p14:creationId xmlns:p14="http://schemas.microsoft.com/office/powerpoint/2010/main" val="3267929133"/>
+        <p14:creationId xmlns:p14="http://schemas.microsoft.com/office/powerpoint/2010/main" val="2686135435"/>
       </p:ext>
     </p:extLst>
   </p:cSld>
@@ -4792,7 +5514,7 @@
         </p:nvSpPr>
         <p:spPr>
           <a:xfrm>
-            <a:off x="1444752" y="2066544"/>
+            <a:off x="1463040" y="941832"/>
             <a:ext cx="2176272" cy="2121408"/>
           </a:xfrm>
           <a:prstGeom prst="rect">
@@ -4843,7 +5565,7 @@
         </p:nvSpPr>
         <p:spPr>
           <a:xfrm>
-            <a:off x="1261872" y="4004518"/>
+            <a:off x="1280160" y="2879806"/>
             <a:ext cx="365760" cy="365760"/>
           </a:xfrm>
           <a:prstGeom prst="ellipse">
@@ -4906,7 +5628,7 @@
         </p:nvSpPr>
         <p:spPr>
           <a:xfrm>
-            <a:off x="3438144" y="4004518"/>
+            <a:off x="3456432" y="2879806"/>
             <a:ext cx="365760" cy="365760"/>
           </a:xfrm>
           <a:prstGeom prst="ellipse">
@@ -4969,7 +5691,7 @@
         </p:nvSpPr>
         <p:spPr>
           <a:xfrm>
-            <a:off x="3438144" y="1883664"/>
+            <a:off x="3456432" y="758952"/>
             <a:ext cx="365760" cy="365760"/>
           </a:xfrm>
           <a:prstGeom prst="ellipse">
@@ -5032,7 +5754,7 @@
         </p:nvSpPr>
         <p:spPr>
           <a:xfrm>
-            <a:off x="1261872" y="1883664"/>
+            <a:off x="1280160" y="758952"/>
             <a:ext cx="365760" cy="365760"/>
           </a:xfrm>
           <a:prstGeom prst="ellipse">
@@ -5095,7 +5817,7 @@
         </p:nvSpPr>
         <p:spPr>
           <a:xfrm>
-            <a:off x="2350008" y="4004518"/>
+            <a:off x="2368296" y="2879806"/>
             <a:ext cx="365760" cy="365760"/>
           </a:xfrm>
           <a:prstGeom prst="ellipse">
@@ -5158,7 +5880,7 @@
         </p:nvSpPr>
         <p:spPr>
           <a:xfrm>
-            <a:off x="3438144" y="2944368"/>
+            <a:off x="3456432" y="1819656"/>
             <a:ext cx="365760" cy="365760"/>
           </a:xfrm>
           <a:prstGeom prst="ellipse">
@@ -5221,7 +5943,7 @@
         </p:nvSpPr>
         <p:spPr>
           <a:xfrm>
-            <a:off x="2350008" y="1883664"/>
+            <a:off x="2368296" y="758952"/>
             <a:ext cx="365760" cy="365760"/>
           </a:xfrm>
           <a:prstGeom prst="ellipse">
@@ -5284,7 +6006,7 @@
         </p:nvSpPr>
         <p:spPr>
           <a:xfrm>
-            <a:off x="1261872" y="2944368"/>
+            <a:off x="1280160" y="1819656"/>
             <a:ext cx="365760" cy="365760"/>
           </a:xfrm>
           <a:prstGeom prst="ellipse">
@@ -5347,7 +6069,7 @@
         </p:nvSpPr>
         <p:spPr>
           <a:xfrm>
-            <a:off x="4931480" y="2066544"/>
+            <a:off x="4949768" y="941832"/>
             <a:ext cx="2176272" cy="2121408"/>
           </a:xfrm>
           <a:prstGeom prst="rect">
@@ -5398,7 +6120,7 @@
         </p:nvSpPr>
         <p:spPr>
           <a:xfrm>
-            <a:off x="4748600" y="4004518"/>
+            <a:off x="4766888" y="2879806"/>
             <a:ext cx="365760" cy="365760"/>
           </a:xfrm>
           <a:prstGeom prst="ellipse">
@@ -5461,7 +6183,7 @@
         </p:nvSpPr>
         <p:spPr>
           <a:xfrm>
-            <a:off x="6924872" y="4004518"/>
+            <a:off x="6943160" y="2879806"/>
             <a:ext cx="365760" cy="365760"/>
           </a:xfrm>
           <a:prstGeom prst="ellipse">
@@ -5524,7 +6246,7 @@
         </p:nvSpPr>
         <p:spPr>
           <a:xfrm>
-            <a:off x="6924872" y="1883664"/>
+            <a:off x="6943160" y="758952"/>
             <a:ext cx="365760" cy="365760"/>
           </a:xfrm>
           <a:prstGeom prst="ellipse">
@@ -5587,7 +6309,7 @@
         </p:nvSpPr>
         <p:spPr>
           <a:xfrm>
-            <a:off x="4748600" y="1883664"/>
+            <a:off x="4766888" y="758952"/>
             <a:ext cx="365760" cy="365760"/>
           </a:xfrm>
           <a:prstGeom prst="ellipse">
@@ -5650,7 +6372,7 @@
         </p:nvSpPr>
         <p:spPr>
           <a:xfrm>
-            <a:off x="5836736" y="4004518"/>
+            <a:off x="5855024" y="2879806"/>
             <a:ext cx="365760" cy="365760"/>
           </a:xfrm>
           <a:prstGeom prst="ellipse">
@@ -5713,7 +6435,7 @@
         </p:nvSpPr>
         <p:spPr>
           <a:xfrm>
-            <a:off x="6924872" y="2944368"/>
+            <a:off x="6943160" y="1819656"/>
             <a:ext cx="365760" cy="365760"/>
           </a:xfrm>
           <a:prstGeom prst="ellipse">
@@ -5776,7 +6498,7 @@
         </p:nvSpPr>
         <p:spPr>
           <a:xfrm>
-            <a:off x="5836736" y="1883664"/>
+            <a:off x="5855024" y="758952"/>
             <a:ext cx="365760" cy="365760"/>
           </a:xfrm>
           <a:prstGeom prst="ellipse">
@@ -5839,7 +6561,7 @@
         </p:nvSpPr>
         <p:spPr>
           <a:xfrm>
-            <a:off x="8235328" y="2066544"/>
+            <a:off x="8253616" y="941832"/>
             <a:ext cx="2176272" cy="2121408"/>
           </a:xfrm>
           <a:prstGeom prst="rect">
@@ -5890,7 +6612,7 @@
         </p:nvSpPr>
         <p:spPr>
           <a:xfrm>
-            <a:off x="8052448" y="4004518"/>
+            <a:off x="8070736" y="2879806"/>
             <a:ext cx="365760" cy="365760"/>
           </a:xfrm>
           <a:prstGeom prst="ellipse">
@@ -5953,7 +6675,7 @@
         </p:nvSpPr>
         <p:spPr>
           <a:xfrm>
-            <a:off x="10228720" y="4004518"/>
+            <a:off x="10247008" y="2879806"/>
             <a:ext cx="365760" cy="365760"/>
           </a:xfrm>
           <a:prstGeom prst="ellipse">
@@ -6016,7 +6738,7 @@
         </p:nvSpPr>
         <p:spPr>
           <a:xfrm>
-            <a:off x="10228720" y="1883664"/>
+            <a:off x="10247008" y="758952"/>
             <a:ext cx="365760" cy="365760"/>
           </a:xfrm>
           <a:prstGeom prst="ellipse">
@@ -6079,7 +6801,7 @@
         </p:nvSpPr>
         <p:spPr>
           <a:xfrm>
-            <a:off x="8052448" y="1883664"/>
+            <a:off x="8070736" y="758952"/>
             <a:ext cx="365760" cy="365760"/>
           </a:xfrm>
           <a:prstGeom prst="ellipse">
@@ -6142,7 +6864,7 @@
         </p:nvSpPr>
         <p:spPr>
           <a:xfrm>
-            <a:off x="9140584" y="4004518"/>
+            <a:off x="9158872" y="2879806"/>
             <a:ext cx="365760" cy="365760"/>
           </a:xfrm>
           <a:prstGeom prst="ellipse">
@@ -6205,7 +6927,7 @@
         </p:nvSpPr>
         <p:spPr>
           <a:xfrm>
-            <a:off x="10228720" y="2944368"/>
+            <a:off x="10247008" y="1819656"/>
             <a:ext cx="365760" cy="365760"/>
           </a:xfrm>
           <a:prstGeom prst="ellipse">
@@ -6252,10 +6974,3292 @@
           </a:p>
         </p:txBody>
       </p:sp>
+      <p:sp>
+        <p:nvSpPr>
+          <p:cNvPr id="35" name="Rectangle 34">
+            <a:extLst>
+              <a:ext uri="{FF2B5EF4-FFF2-40B4-BE49-F238E27FC236}">
+                <a16:creationId xmlns:a16="http://schemas.microsoft.com/office/drawing/2014/main" id="{E079E7A0-6603-0E2D-765F-BFCE0987BACD}"/>
+              </a:ext>
+            </a:extLst>
+          </p:cNvPr>
+          <p:cNvSpPr>
+            <a:spLocks noChangeAspect="1"/>
+          </p:cNvSpPr>
+          <p:nvPr/>
+        </p:nvSpPr>
+        <p:spPr>
+          <a:xfrm>
+            <a:off x="1463040" y="3977640"/>
+            <a:ext cx="2176272" cy="2121408"/>
+          </a:xfrm>
+          <a:prstGeom prst="rect">
+            <a:avLst/>
+          </a:prstGeom>
+        </p:spPr>
+        <p:style>
+          <a:lnRef idx="2">
+            <a:schemeClr val="accent1">
+              <a:shade val="15000"/>
+            </a:schemeClr>
+          </a:lnRef>
+          <a:fillRef idx="1">
+            <a:schemeClr val="accent1"/>
+          </a:fillRef>
+          <a:effectRef idx="0">
+            <a:schemeClr val="accent1"/>
+          </a:effectRef>
+          <a:fontRef idx="minor">
+            <a:schemeClr val="lt1"/>
+          </a:fontRef>
+        </p:style>
+        <p:txBody>
+          <a:bodyPr rtlCol="0" anchor="ctr"/>
+          <a:lstStyle/>
+          <a:p>
+            <a:pPr algn="ctr"/>
+            <a:r>
+              <a:rPr lang="en-US" dirty="0"/>
+              <a:t> </a:t>
+            </a:r>
+          </a:p>
+        </p:txBody>
+      </p:sp>
+      <p:sp>
+        <p:nvSpPr>
+          <p:cNvPr id="36" name="Oval 35">
+            <a:extLst>
+              <a:ext uri="{FF2B5EF4-FFF2-40B4-BE49-F238E27FC236}">
+                <a16:creationId xmlns:a16="http://schemas.microsoft.com/office/drawing/2014/main" id="{1BD329C8-9688-A637-C684-EECDC1E4CA6F}"/>
+              </a:ext>
+            </a:extLst>
+          </p:cNvPr>
+          <p:cNvSpPr>
+            <a:spLocks noChangeAspect="1"/>
+          </p:cNvSpPr>
+          <p:nvPr/>
+        </p:nvSpPr>
+        <p:spPr>
+          <a:xfrm>
+            <a:off x="1280160" y="5915614"/>
+            <a:ext cx="365760" cy="365760"/>
+          </a:xfrm>
+          <a:prstGeom prst="ellipse">
+            <a:avLst/>
+          </a:prstGeom>
+          <a:solidFill>
+            <a:schemeClr val="bg1"/>
+          </a:solidFill>
+          <a:ln>
+            <a:solidFill>
+              <a:schemeClr val="tx1"/>
+            </a:solidFill>
+          </a:ln>
+        </p:spPr>
+        <p:style>
+          <a:lnRef idx="2">
+            <a:schemeClr val="accent1">
+              <a:shade val="15000"/>
+            </a:schemeClr>
+          </a:lnRef>
+          <a:fillRef idx="1">
+            <a:schemeClr val="accent1"/>
+          </a:fillRef>
+          <a:effectRef idx="0">
+            <a:schemeClr val="accent1"/>
+          </a:effectRef>
+          <a:fontRef idx="minor">
+            <a:schemeClr val="lt1"/>
+          </a:fontRef>
+        </p:style>
+        <p:txBody>
+          <a:bodyPr rtlCol="0" anchor="ctr"/>
+          <a:lstStyle/>
+          <a:p>
+            <a:pPr algn="ctr"/>
+            <a:r>
+              <a:rPr lang="en-US" dirty="0">
+                <a:solidFill>
+                  <a:schemeClr val="tx1"/>
+                </a:solidFill>
+              </a:rPr>
+              <a:t>1</a:t>
+            </a:r>
+          </a:p>
+        </p:txBody>
+      </p:sp>
+      <p:sp>
+        <p:nvSpPr>
+          <p:cNvPr id="37" name="Oval 36">
+            <a:extLst>
+              <a:ext uri="{FF2B5EF4-FFF2-40B4-BE49-F238E27FC236}">
+                <a16:creationId xmlns:a16="http://schemas.microsoft.com/office/drawing/2014/main" id="{1B367665-D47C-A1EE-7D3E-AC64396A6368}"/>
+              </a:ext>
+            </a:extLst>
+          </p:cNvPr>
+          <p:cNvSpPr>
+            <a:spLocks noChangeAspect="1"/>
+          </p:cNvSpPr>
+          <p:nvPr/>
+        </p:nvSpPr>
+        <p:spPr>
+          <a:xfrm>
+            <a:off x="3456432" y="5915614"/>
+            <a:ext cx="365760" cy="365760"/>
+          </a:xfrm>
+          <a:prstGeom prst="ellipse">
+            <a:avLst/>
+          </a:prstGeom>
+          <a:solidFill>
+            <a:schemeClr val="bg1"/>
+          </a:solidFill>
+          <a:ln>
+            <a:solidFill>
+              <a:schemeClr val="tx1"/>
+            </a:solidFill>
+          </a:ln>
+        </p:spPr>
+        <p:style>
+          <a:lnRef idx="2">
+            <a:schemeClr val="accent1">
+              <a:shade val="15000"/>
+            </a:schemeClr>
+          </a:lnRef>
+          <a:fillRef idx="1">
+            <a:schemeClr val="accent1"/>
+          </a:fillRef>
+          <a:effectRef idx="0">
+            <a:schemeClr val="accent1"/>
+          </a:effectRef>
+          <a:fontRef idx="minor">
+            <a:schemeClr val="lt1"/>
+          </a:fontRef>
+        </p:style>
+        <p:txBody>
+          <a:bodyPr rtlCol="0" anchor="ctr"/>
+          <a:lstStyle/>
+          <a:p>
+            <a:pPr algn="ctr"/>
+            <a:r>
+              <a:rPr lang="en-US" dirty="0">
+                <a:solidFill>
+                  <a:schemeClr val="tx1"/>
+                </a:solidFill>
+              </a:rPr>
+              <a:t>2</a:t>
+            </a:r>
+          </a:p>
+        </p:txBody>
+      </p:sp>
+      <p:sp>
+        <p:nvSpPr>
+          <p:cNvPr id="38" name="Oval 37">
+            <a:extLst>
+              <a:ext uri="{FF2B5EF4-FFF2-40B4-BE49-F238E27FC236}">
+                <a16:creationId xmlns:a16="http://schemas.microsoft.com/office/drawing/2014/main" id="{CE949BB7-A96B-8915-9BE6-6DE60BEF6449}"/>
+              </a:ext>
+            </a:extLst>
+          </p:cNvPr>
+          <p:cNvSpPr>
+            <a:spLocks noChangeAspect="1"/>
+          </p:cNvSpPr>
+          <p:nvPr/>
+        </p:nvSpPr>
+        <p:spPr>
+          <a:xfrm>
+            <a:off x="3456432" y="3794760"/>
+            <a:ext cx="365760" cy="365760"/>
+          </a:xfrm>
+          <a:prstGeom prst="ellipse">
+            <a:avLst/>
+          </a:prstGeom>
+          <a:solidFill>
+            <a:schemeClr val="bg1"/>
+          </a:solidFill>
+          <a:ln>
+            <a:solidFill>
+              <a:schemeClr val="tx1"/>
+            </a:solidFill>
+          </a:ln>
+        </p:spPr>
+        <p:style>
+          <a:lnRef idx="2">
+            <a:schemeClr val="accent1">
+              <a:shade val="15000"/>
+            </a:schemeClr>
+          </a:lnRef>
+          <a:fillRef idx="1">
+            <a:schemeClr val="accent1"/>
+          </a:fillRef>
+          <a:effectRef idx="0">
+            <a:schemeClr val="accent1"/>
+          </a:effectRef>
+          <a:fontRef idx="minor">
+            <a:schemeClr val="lt1"/>
+          </a:fontRef>
+        </p:style>
+        <p:txBody>
+          <a:bodyPr rtlCol="0" anchor="ctr"/>
+          <a:lstStyle/>
+          <a:p>
+            <a:pPr algn="ctr"/>
+            <a:r>
+              <a:rPr lang="en-US" dirty="0">
+                <a:solidFill>
+                  <a:schemeClr val="tx1"/>
+                </a:solidFill>
+              </a:rPr>
+              <a:t>3</a:t>
+            </a:r>
+          </a:p>
+        </p:txBody>
+      </p:sp>
+      <p:sp>
+        <p:nvSpPr>
+          <p:cNvPr id="39" name="Oval 38">
+            <a:extLst>
+              <a:ext uri="{FF2B5EF4-FFF2-40B4-BE49-F238E27FC236}">
+                <a16:creationId xmlns:a16="http://schemas.microsoft.com/office/drawing/2014/main" id="{0114B1B1-52B9-D7E5-F3FE-A84B99BF9B72}"/>
+              </a:ext>
+            </a:extLst>
+          </p:cNvPr>
+          <p:cNvSpPr>
+            <a:spLocks noChangeAspect="1"/>
+          </p:cNvSpPr>
+          <p:nvPr/>
+        </p:nvSpPr>
+        <p:spPr>
+          <a:xfrm>
+            <a:off x="1280160" y="3794760"/>
+            <a:ext cx="365760" cy="365760"/>
+          </a:xfrm>
+          <a:prstGeom prst="ellipse">
+            <a:avLst/>
+          </a:prstGeom>
+          <a:solidFill>
+            <a:schemeClr val="bg1"/>
+          </a:solidFill>
+          <a:ln>
+            <a:solidFill>
+              <a:schemeClr val="tx1"/>
+            </a:solidFill>
+          </a:ln>
+        </p:spPr>
+        <p:style>
+          <a:lnRef idx="2">
+            <a:schemeClr val="accent1">
+              <a:shade val="15000"/>
+            </a:schemeClr>
+          </a:lnRef>
+          <a:fillRef idx="1">
+            <a:schemeClr val="accent1"/>
+          </a:fillRef>
+          <a:effectRef idx="0">
+            <a:schemeClr val="accent1"/>
+          </a:effectRef>
+          <a:fontRef idx="minor">
+            <a:schemeClr val="lt1"/>
+          </a:fontRef>
+        </p:style>
+        <p:txBody>
+          <a:bodyPr rtlCol="0" anchor="ctr"/>
+          <a:lstStyle/>
+          <a:p>
+            <a:pPr algn="ctr"/>
+            <a:r>
+              <a:rPr lang="en-US" dirty="0">
+                <a:solidFill>
+                  <a:schemeClr val="tx1"/>
+                </a:solidFill>
+              </a:rPr>
+              <a:t>4</a:t>
+            </a:r>
+          </a:p>
+        </p:txBody>
+      </p:sp>
+      <p:grpSp>
+        <p:nvGrpSpPr>
+          <p:cNvPr id="54" name="Group 53">
+            <a:extLst>
+              <a:ext uri="{FF2B5EF4-FFF2-40B4-BE49-F238E27FC236}">
+                <a16:creationId xmlns:a16="http://schemas.microsoft.com/office/drawing/2014/main" id="{A9AF2378-10AE-DF88-EE4A-12F632A20B67}"/>
+              </a:ext>
+            </a:extLst>
+          </p:cNvPr>
+          <p:cNvGrpSpPr/>
+          <p:nvPr/>
+        </p:nvGrpSpPr>
+        <p:grpSpPr>
+          <a:xfrm>
+            <a:off x="2328856" y="1133717"/>
+            <a:ext cx="969264" cy="920035"/>
+            <a:chOff x="2340863" y="4100021"/>
+            <a:chExt cx="969264" cy="920035"/>
+          </a:xfrm>
+        </p:grpSpPr>
+        <p:cxnSp>
+          <p:nvCxnSpPr>
+            <p:cNvPr id="55" name="Straight Arrow Connector 54">
+              <a:extLst>
+                <a:ext uri="{FF2B5EF4-FFF2-40B4-BE49-F238E27FC236}">
+                  <a16:creationId xmlns:a16="http://schemas.microsoft.com/office/drawing/2014/main" id="{FA373E75-1503-BAE7-E175-28F00E3ECA73}"/>
+                </a:ext>
+              </a:extLst>
+            </p:cNvPr>
+            <p:cNvCxnSpPr>
+              <a:cxnSpLocks/>
+            </p:cNvCxnSpPr>
+            <p:nvPr/>
+          </p:nvCxnSpPr>
+          <p:spPr>
+            <a:xfrm>
+              <a:off x="2606038" y="5010912"/>
+              <a:ext cx="640080" cy="0"/>
+            </a:xfrm>
+            <a:prstGeom prst="straightConnector1">
+              <a:avLst/>
+            </a:prstGeom>
+            <a:ln w="28575">
+              <a:tailEnd type="triangle"/>
+            </a:ln>
+          </p:spPr>
+          <p:style>
+            <a:lnRef idx="2">
+              <a:schemeClr val="dk1"/>
+            </a:lnRef>
+            <a:fillRef idx="0">
+              <a:schemeClr val="dk1"/>
+            </a:fillRef>
+            <a:effectRef idx="1">
+              <a:schemeClr val="dk1"/>
+            </a:effectRef>
+            <a:fontRef idx="minor">
+              <a:schemeClr val="tx1"/>
+            </a:fontRef>
+          </p:style>
+        </p:cxnSp>
+        <p:cxnSp>
+          <p:nvCxnSpPr>
+            <p:cNvPr id="56" name="Straight Arrow Connector 55">
+              <a:extLst>
+                <a:ext uri="{FF2B5EF4-FFF2-40B4-BE49-F238E27FC236}">
+                  <a16:creationId xmlns:a16="http://schemas.microsoft.com/office/drawing/2014/main" id="{E625543A-2333-42EC-E473-CA67BA2F3555}"/>
+                </a:ext>
+              </a:extLst>
+            </p:cNvPr>
+            <p:cNvCxnSpPr>
+              <a:cxnSpLocks/>
+            </p:cNvCxnSpPr>
+            <p:nvPr/>
+          </p:nvCxnSpPr>
+          <p:spPr>
+            <a:xfrm flipV="1">
+              <a:off x="2606040" y="4379976"/>
+              <a:ext cx="0" cy="640080"/>
+            </a:xfrm>
+            <a:prstGeom prst="straightConnector1">
+              <a:avLst/>
+            </a:prstGeom>
+            <a:ln w="28575">
+              <a:tailEnd type="triangle"/>
+            </a:ln>
+          </p:spPr>
+          <p:style>
+            <a:lnRef idx="2">
+              <a:schemeClr val="dk1"/>
+            </a:lnRef>
+            <a:fillRef idx="0">
+              <a:schemeClr val="dk1"/>
+            </a:fillRef>
+            <a:effectRef idx="1">
+              <a:schemeClr val="dk1"/>
+            </a:effectRef>
+            <a:fontRef idx="minor">
+              <a:schemeClr val="tx1"/>
+            </a:fontRef>
+          </p:style>
+        </p:cxnSp>
+        <mc:AlternateContent xmlns:mc="http://schemas.openxmlformats.org/markup-compatibility/2006">
+          <mc:Choice xmlns:a14="http://schemas.microsoft.com/office/drawing/2010/main" Requires="a14">
+            <p:sp>
+              <p:nvSpPr>
+                <p:cNvPr id="57" name="TextBox 56">
+                  <a:extLst>
+                    <a:ext uri="{FF2B5EF4-FFF2-40B4-BE49-F238E27FC236}">
+                      <a16:creationId xmlns:a16="http://schemas.microsoft.com/office/drawing/2014/main" id="{5288CAE4-5C32-1271-F692-C7079A323E4E}"/>
+                    </a:ext>
+                  </a:extLst>
+                </p:cNvPr>
+                <p:cNvSpPr txBox="1"/>
+                <p:nvPr/>
+              </p:nvSpPr>
+              <p:spPr>
+                <a:xfrm>
+                  <a:off x="3026664" y="4590288"/>
+                  <a:ext cx="283463" cy="369332"/>
+                </a:xfrm>
+                <a:prstGeom prst="rect">
+                  <a:avLst/>
+                </a:prstGeom>
+                <a:noFill/>
+              </p:spPr>
+              <p:txBody>
+                <a:bodyPr wrap="square" rtlCol="0">
+                  <a:spAutoFit/>
+                </a:bodyPr>
+                <a:lstStyle/>
+                <a:p>
+                  <a14:m>
+                    <m:oMathPara xmlns:m="http://schemas.openxmlformats.org/officeDocument/2006/math">
+                      <m:oMathParaPr>
+                        <m:jc m:val="centerGroup"/>
+                      </m:oMathParaPr>
+                      <m:oMath xmlns:m="http://schemas.openxmlformats.org/officeDocument/2006/math">
+                        <m:r>
+                          <a:rPr lang="en-US" b="0" i="1" smtClean="0">
+                            <a:latin typeface="Cambria Math" panose="02040503050406030204" pitchFamily="18" charset="0"/>
+                          </a:rPr>
+                          <m:t>𝜉</m:t>
+                        </m:r>
+                      </m:oMath>
+                    </m:oMathPara>
+                  </a14:m>
+                  <a:endParaRPr lang="en-US" dirty="0"/>
+                </a:p>
+              </p:txBody>
+            </p:sp>
+          </mc:Choice>
+          <mc:Fallback>
+            <p:sp>
+              <p:nvSpPr>
+                <p:cNvPr id="57" name="TextBox 56">
+                  <a:extLst>
+                    <a:ext uri="{FF2B5EF4-FFF2-40B4-BE49-F238E27FC236}">
+                      <a16:creationId xmlns:a16="http://schemas.microsoft.com/office/drawing/2014/main" id="{5288CAE4-5C32-1271-F692-C7079A323E4E}"/>
+                    </a:ext>
+                  </a:extLst>
+                </p:cNvPr>
+                <p:cNvSpPr txBox="1">
+                  <a:spLocks noRot="1" noChangeAspect="1" noMove="1" noResize="1" noEditPoints="1" noAdjustHandles="1" noChangeArrowheads="1" noChangeShapeType="1" noTextEdit="1"/>
+                </p:cNvSpPr>
+                <p:nvPr/>
+              </p:nvSpPr>
+              <p:spPr>
+                <a:xfrm>
+                  <a:off x="3026664" y="4590288"/>
+                  <a:ext cx="283463" cy="369332"/>
+                </a:xfrm>
+                <a:prstGeom prst="rect">
+                  <a:avLst/>
+                </a:prstGeom>
+                <a:blipFill>
+                  <a:blip r:embed="rId2"/>
+                  <a:stretch>
+                    <a:fillRect l="-6522" r="-10870" b="-13115"/>
+                  </a:stretch>
+                </a:blipFill>
+              </p:spPr>
+              <p:txBody>
+                <a:bodyPr/>
+                <a:lstStyle/>
+                <a:p>
+                  <a:r>
+                    <a:rPr lang="en-US">
+                      <a:noFill/>
+                    </a:rPr>
+                    <a:t> </a:t>
+                  </a:r>
+                </a:p>
+              </p:txBody>
+            </p:sp>
+          </mc:Fallback>
+        </mc:AlternateContent>
+        <mc:AlternateContent xmlns:mc="http://schemas.openxmlformats.org/markup-compatibility/2006">
+          <mc:Choice xmlns:a14="http://schemas.microsoft.com/office/drawing/2010/main" Requires="a14">
+            <p:sp>
+              <p:nvSpPr>
+                <p:cNvPr id="58" name="TextBox 57">
+                  <a:extLst>
+                    <a:ext uri="{FF2B5EF4-FFF2-40B4-BE49-F238E27FC236}">
+                      <a16:creationId xmlns:a16="http://schemas.microsoft.com/office/drawing/2014/main" id="{4BA97977-61B0-E486-9198-754B8B010FA8}"/>
+                    </a:ext>
+                  </a:extLst>
+                </p:cNvPr>
+                <p:cNvSpPr txBox="1"/>
+                <p:nvPr/>
+              </p:nvSpPr>
+              <p:spPr>
+                <a:xfrm>
+                  <a:off x="2340863" y="4100021"/>
+                  <a:ext cx="283463" cy="369332"/>
+                </a:xfrm>
+                <a:prstGeom prst="rect">
+                  <a:avLst/>
+                </a:prstGeom>
+                <a:noFill/>
+              </p:spPr>
+              <p:txBody>
+                <a:bodyPr wrap="square" rtlCol="0">
+                  <a:spAutoFit/>
+                </a:bodyPr>
+                <a:lstStyle/>
+                <a:p>
+                  <a14:m>
+                    <m:oMathPara xmlns:m="http://schemas.openxmlformats.org/officeDocument/2006/math">
+                      <m:oMathParaPr>
+                        <m:jc m:val="centerGroup"/>
+                      </m:oMathParaPr>
+                      <m:oMath xmlns:m="http://schemas.openxmlformats.org/officeDocument/2006/math">
+                        <m:r>
+                          <a:rPr lang="en-US" b="0" i="1" smtClean="0">
+                            <a:latin typeface="Cambria Math" panose="02040503050406030204" pitchFamily="18" charset="0"/>
+                          </a:rPr>
+                          <m:t>𝜂</m:t>
+                        </m:r>
+                      </m:oMath>
+                    </m:oMathPara>
+                  </a14:m>
+                  <a:endParaRPr lang="en-US" dirty="0"/>
+                </a:p>
+              </p:txBody>
+            </p:sp>
+          </mc:Choice>
+          <mc:Fallback>
+            <p:sp>
+              <p:nvSpPr>
+                <p:cNvPr id="58" name="TextBox 57">
+                  <a:extLst>
+                    <a:ext uri="{FF2B5EF4-FFF2-40B4-BE49-F238E27FC236}">
+                      <a16:creationId xmlns:a16="http://schemas.microsoft.com/office/drawing/2014/main" id="{4BA97977-61B0-E486-9198-754B8B010FA8}"/>
+                    </a:ext>
+                  </a:extLst>
+                </p:cNvPr>
+                <p:cNvSpPr txBox="1">
+                  <a:spLocks noRot="1" noChangeAspect="1" noMove="1" noResize="1" noEditPoints="1" noAdjustHandles="1" noChangeArrowheads="1" noChangeShapeType="1" noTextEdit="1"/>
+                </p:cNvSpPr>
+                <p:nvPr/>
+              </p:nvSpPr>
+              <p:spPr>
+                <a:xfrm>
+                  <a:off x="2340863" y="4100021"/>
+                  <a:ext cx="283463" cy="369332"/>
+                </a:xfrm>
+                <a:prstGeom prst="rect">
+                  <a:avLst/>
+                </a:prstGeom>
+                <a:blipFill>
+                  <a:blip r:embed="rId3"/>
+                  <a:stretch>
+                    <a:fillRect r="-4255" b="-4918"/>
+                  </a:stretch>
+                </a:blipFill>
+              </p:spPr>
+              <p:txBody>
+                <a:bodyPr/>
+                <a:lstStyle/>
+                <a:p>
+                  <a:r>
+                    <a:rPr lang="en-US">
+                      <a:noFill/>
+                    </a:rPr>
+                    <a:t> </a:t>
+                  </a:r>
+                </a:p>
+              </p:txBody>
+            </p:sp>
+          </mc:Fallback>
+        </mc:AlternateContent>
+      </p:grpSp>
+      <p:grpSp>
+        <p:nvGrpSpPr>
+          <p:cNvPr id="59" name="Group 58">
+            <a:extLst>
+              <a:ext uri="{FF2B5EF4-FFF2-40B4-BE49-F238E27FC236}">
+                <a16:creationId xmlns:a16="http://schemas.microsoft.com/office/drawing/2014/main" id="{A7DEB3E6-20D0-599C-6C3B-EBAF3F5DB914}"/>
+              </a:ext>
+            </a:extLst>
+          </p:cNvPr>
+          <p:cNvGrpSpPr/>
+          <p:nvPr/>
+        </p:nvGrpSpPr>
+        <p:grpSpPr>
+          <a:xfrm>
+            <a:off x="5803300" y="1163966"/>
+            <a:ext cx="969264" cy="920035"/>
+            <a:chOff x="2340863" y="4100021"/>
+            <a:chExt cx="969264" cy="920035"/>
+          </a:xfrm>
+        </p:grpSpPr>
+        <p:cxnSp>
+          <p:nvCxnSpPr>
+            <p:cNvPr id="60" name="Straight Arrow Connector 59">
+              <a:extLst>
+                <a:ext uri="{FF2B5EF4-FFF2-40B4-BE49-F238E27FC236}">
+                  <a16:creationId xmlns:a16="http://schemas.microsoft.com/office/drawing/2014/main" id="{5B9C745A-111E-2326-D4C6-EE86751328D8}"/>
+                </a:ext>
+              </a:extLst>
+            </p:cNvPr>
+            <p:cNvCxnSpPr>
+              <a:cxnSpLocks/>
+            </p:cNvCxnSpPr>
+            <p:nvPr/>
+          </p:nvCxnSpPr>
+          <p:spPr>
+            <a:xfrm>
+              <a:off x="2606038" y="5010912"/>
+              <a:ext cx="640080" cy="0"/>
+            </a:xfrm>
+            <a:prstGeom prst="straightConnector1">
+              <a:avLst/>
+            </a:prstGeom>
+            <a:ln w="28575">
+              <a:tailEnd type="triangle"/>
+            </a:ln>
+          </p:spPr>
+          <p:style>
+            <a:lnRef idx="2">
+              <a:schemeClr val="dk1"/>
+            </a:lnRef>
+            <a:fillRef idx="0">
+              <a:schemeClr val="dk1"/>
+            </a:fillRef>
+            <a:effectRef idx="1">
+              <a:schemeClr val="dk1"/>
+            </a:effectRef>
+            <a:fontRef idx="minor">
+              <a:schemeClr val="tx1"/>
+            </a:fontRef>
+          </p:style>
+        </p:cxnSp>
+        <p:cxnSp>
+          <p:nvCxnSpPr>
+            <p:cNvPr id="61" name="Straight Arrow Connector 60">
+              <a:extLst>
+                <a:ext uri="{FF2B5EF4-FFF2-40B4-BE49-F238E27FC236}">
+                  <a16:creationId xmlns:a16="http://schemas.microsoft.com/office/drawing/2014/main" id="{BADB4D80-572F-36A5-F74A-172CBC07196B}"/>
+                </a:ext>
+              </a:extLst>
+            </p:cNvPr>
+            <p:cNvCxnSpPr>
+              <a:cxnSpLocks/>
+            </p:cNvCxnSpPr>
+            <p:nvPr/>
+          </p:nvCxnSpPr>
+          <p:spPr>
+            <a:xfrm flipV="1">
+              <a:off x="2606040" y="4379976"/>
+              <a:ext cx="0" cy="640080"/>
+            </a:xfrm>
+            <a:prstGeom prst="straightConnector1">
+              <a:avLst/>
+            </a:prstGeom>
+            <a:ln w="28575">
+              <a:tailEnd type="triangle"/>
+            </a:ln>
+          </p:spPr>
+          <p:style>
+            <a:lnRef idx="2">
+              <a:schemeClr val="dk1"/>
+            </a:lnRef>
+            <a:fillRef idx="0">
+              <a:schemeClr val="dk1"/>
+            </a:fillRef>
+            <a:effectRef idx="1">
+              <a:schemeClr val="dk1"/>
+            </a:effectRef>
+            <a:fontRef idx="minor">
+              <a:schemeClr val="tx1"/>
+            </a:fontRef>
+          </p:style>
+        </p:cxnSp>
+        <mc:AlternateContent xmlns:mc="http://schemas.openxmlformats.org/markup-compatibility/2006">
+          <mc:Choice xmlns:a14="http://schemas.microsoft.com/office/drawing/2010/main" Requires="a14">
+            <p:sp>
+              <p:nvSpPr>
+                <p:cNvPr id="62" name="TextBox 61">
+                  <a:extLst>
+                    <a:ext uri="{FF2B5EF4-FFF2-40B4-BE49-F238E27FC236}">
+                      <a16:creationId xmlns:a16="http://schemas.microsoft.com/office/drawing/2014/main" id="{E61BD464-DBF2-E1B7-2DB7-F4AC9897F60F}"/>
+                    </a:ext>
+                  </a:extLst>
+                </p:cNvPr>
+                <p:cNvSpPr txBox="1"/>
+                <p:nvPr/>
+              </p:nvSpPr>
+              <p:spPr>
+                <a:xfrm>
+                  <a:off x="3026664" y="4590288"/>
+                  <a:ext cx="283463" cy="369332"/>
+                </a:xfrm>
+                <a:prstGeom prst="rect">
+                  <a:avLst/>
+                </a:prstGeom>
+                <a:noFill/>
+              </p:spPr>
+              <p:txBody>
+                <a:bodyPr wrap="square" rtlCol="0">
+                  <a:spAutoFit/>
+                </a:bodyPr>
+                <a:lstStyle/>
+                <a:p>
+                  <a14:m>
+                    <m:oMathPara xmlns:m="http://schemas.openxmlformats.org/officeDocument/2006/math">
+                      <m:oMathParaPr>
+                        <m:jc m:val="centerGroup"/>
+                      </m:oMathParaPr>
+                      <m:oMath xmlns:m="http://schemas.openxmlformats.org/officeDocument/2006/math">
+                        <m:r>
+                          <a:rPr lang="en-US" b="0" i="1" smtClean="0">
+                            <a:latin typeface="Cambria Math" panose="02040503050406030204" pitchFamily="18" charset="0"/>
+                          </a:rPr>
+                          <m:t>𝜉</m:t>
+                        </m:r>
+                      </m:oMath>
+                    </m:oMathPara>
+                  </a14:m>
+                  <a:endParaRPr lang="en-US" dirty="0"/>
+                </a:p>
+              </p:txBody>
+            </p:sp>
+          </mc:Choice>
+          <mc:Fallback>
+            <p:sp>
+              <p:nvSpPr>
+                <p:cNvPr id="62" name="TextBox 61">
+                  <a:extLst>
+                    <a:ext uri="{FF2B5EF4-FFF2-40B4-BE49-F238E27FC236}">
+                      <a16:creationId xmlns:a16="http://schemas.microsoft.com/office/drawing/2014/main" id="{E61BD464-DBF2-E1B7-2DB7-F4AC9897F60F}"/>
+                    </a:ext>
+                  </a:extLst>
+                </p:cNvPr>
+                <p:cNvSpPr txBox="1">
+                  <a:spLocks noRot="1" noChangeAspect="1" noMove="1" noResize="1" noEditPoints="1" noAdjustHandles="1" noChangeArrowheads="1" noChangeShapeType="1" noTextEdit="1"/>
+                </p:cNvSpPr>
+                <p:nvPr/>
+              </p:nvSpPr>
+              <p:spPr>
+                <a:xfrm>
+                  <a:off x="3026664" y="4590288"/>
+                  <a:ext cx="283463" cy="369332"/>
+                </a:xfrm>
+                <a:prstGeom prst="rect">
+                  <a:avLst/>
+                </a:prstGeom>
+                <a:blipFill>
+                  <a:blip r:embed="rId4"/>
+                  <a:stretch>
+                    <a:fillRect l="-6383" r="-8511" b="-13115"/>
+                  </a:stretch>
+                </a:blipFill>
+              </p:spPr>
+              <p:txBody>
+                <a:bodyPr/>
+                <a:lstStyle/>
+                <a:p>
+                  <a:r>
+                    <a:rPr lang="en-US">
+                      <a:noFill/>
+                    </a:rPr>
+                    <a:t> </a:t>
+                  </a:r>
+                </a:p>
+              </p:txBody>
+            </p:sp>
+          </mc:Fallback>
+        </mc:AlternateContent>
+        <mc:AlternateContent xmlns:mc="http://schemas.openxmlformats.org/markup-compatibility/2006">
+          <mc:Choice xmlns:a14="http://schemas.microsoft.com/office/drawing/2010/main" Requires="a14">
+            <p:sp>
+              <p:nvSpPr>
+                <p:cNvPr id="63" name="TextBox 62">
+                  <a:extLst>
+                    <a:ext uri="{FF2B5EF4-FFF2-40B4-BE49-F238E27FC236}">
+                      <a16:creationId xmlns:a16="http://schemas.microsoft.com/office/drawing/2014/main" id="{F0E8CCBE-FF8B-6420-7CDC-8697FD2AF7D4}"/>
+                    </a:ext>
+                  </a:extLst>
+                </p:cNvPr>
+                <p:cNvSpPr txBox="1"/>
+                <p:nvPr/>
+              </p:nvSpPr>
+              <p:spPr>
+                <a:xfrm>
+                  <a:off x="2340863" y="4100021"/>
+                  <a:ext cx="283463" cy="369332"/>
+                </a:xfrm>
+                <a:prstGeom prst="rect">
+                  <a:avLst/>
+                </a:prstGeom>
+                <a:noFill/>
+              </p:spPr>
+              <p:txBody>
+                <a:bodyPr wrap="square" rtlCol="0">
+                  <a:spAutoFit/>
+                </a:bodyPr>
+                <a:lstStyle/>
+                <a:p>
+                  <a14:m>
+                    <m:oMathPara xmlns:m="http://schemas.openxmlformats.org/officeDocument/2006/math">
+                      <m:oMathParaPr>
+                        <m:jc m:val="centerGroup"/>
+                      </m:oMathParaPr>
+                      <m:oMath xmlns:m="http://schemas.openxmlformats.org/officeDocument/2006/math">
+                        <m:r>
+                          <a:rPr lang="en-US" b="0" i="1" smtClean="0">
+                            <a:latin typeface="Cambria Math" panose="02040503050406030204" pitchFamily="18" charset="0"/>
+                          </a:rPr>
+                          <m:t>𝜂</m:t>
+                        </m:r>
+                      </m:oMath>
+                    </m:oMathPara>
+                  </a14:m>
+                  <a:endParaRPr lang="en-US" dirty="0"/>
+                </a:p>
+              </p:txBody>
+            </p:sp>
+          </mc:Choice>
+          <mc:Fallback>
+            <p:sp>
+              <p:nvSpPr>
+                <p:cNvPr id="63" name="TextBox 62">
+                  <a:extLst>
+                    <a:ext uri="{FF2B5EF4-FFF2-40B4-BE49-F238E27FC236}">
+                      <a16:creationId xmlns:a16="http://schemas.microsoft.com/office/drawing/2014/main" id="{F0E8CCBE-FF8B-6420-7CDC-8697FD2AF7D4}"/>
+                    </a:ext>
+                  </a:extLst>
+                </p:cNvPr>
+                <p:cNvSpPr txBox="1">
+                  <a:spLocks noRot="1" noChangeAspect="1" noMove="1" noResize="1" noEditPoints="1" noAdjustHandles="1" noChangeArrowheads="1" noChangeShapeType="1" noTextEdit="1"/>
+                </p:cNvSpPr>
+                <p:nvPr/>
+              </p:nvSpPr>
+              <p:spPr>
+                <a:xfrm>
+                  <a:off x="2340863" y="4100021"/>
+                  <a:ext cx="283463" cy="369332"/>
+                </a:xfrm>
+                <a:prstGeom prst="rect">
+                  <a:avLst/>
+                </a:prstGeom>
+                <a:blipFill>
+                  <a:blip r:embed="rId5"/>
+                  <a:stretch>
+                    <a:fillRect r="-6522" b="-4918"/>
+                  </a:stretch>
+                </a:blipFill>
+              </p:spPr>
+              <p:txBody>
+                <a:bodyPr/>
+                <a:lstStyle/>
+                <a:p>
+                  <a:r>
+                    <a:rPr lang="en-US">
+                      <a:noFill/>
+                    </a:rPr>
+                    <a:t> </a:t>
+                  </a:r>
+                </a:p>
+              </p:txBody>
+            </p:sp>
+          </mc:Fallback>
+        </mc:AlternateContent>
+      </p:grpSp>
+      <p:grpSp>
+        <p:nvGrpSpPr>
+          <p:cNvPr id="64" name="Group 63">
+            <a:extLst>
+              <a:ext uri="{FF2B5EF4-FFF2-40B4-BE49-F238E27FC236}">
+                <a16:creationId xmlns:a16="http://schemas.microsoft.com/office/drawing/2014/main" id="{CB311F27-C10E-A586-643D-A1E77DEB0FF6}"/>
+              </a:ext>
+            </a:extLst>
+          </p:cNvPr>
+          <p:cNvGrpSpPr/>
+          <p:nvPr/>
+        </p:nvGrpSpPr>
+        <p:grpSpPr>
+          <a:xfrm>
+            <a:off x="9158872" y="1073280"/>
+            <a:ext cx="969264" cy="920035"/>
+            <a:chOff x="2340863" y="4100021"/>
+            <a:chExt cx="969264" cy="920035"/>
+          </a:xfrm>
+        </p:grpSpPr>
+        <p:cxnSp>
+          <p:nvCxnSpPr>
+            <p:cNvPr id="65" name="Straight Arrow Connector 64">
+              <a:extLst>
+                <a:ext uri="{FF2B5EF4-FFF2-40B4-BE49-F238E27FC236}">
+                  <a16:creationId xmlns:a16="http://schemas.microsoft.com/office/drawing/2014/main" id="{3183B6D5-3181-E8FC-8005-1C01EA009482}"/>
+                </a:ext>
+              </a:extLst>
+            </p:cNvPr>
+            <p:cNvCxnSpPr>
+              <a:cxnSpLocks/>
+            </p:cNvCxnSpPr>
+            <p:nvPr/>
+          </p:nvCxnSpPr>
+          <p:spPr>
+            <a:xfrm>
+              <a:off x="2606038" y="5010912"/>
+              <a:ext cx="640080" cy="0"/>
+            </a:xfrm>
+            <a:prstGeom prst="straightConnector1">
+              <a:avLst/>
+            </a:prstGeom>
+            <a:ln w="28575">
+              <a:tailEnd type="triangle"/>
+            </a:ln>
+          </p:spPr>
+          <p:style>
+            <a:lnRef idx="2">
+              <a:schemeClr val="dk1"/>
+            </a:lnRef>
+            <a:fillRef idx="0">
+              <a:schemeClr val="dk1"/>
+            </a:fillRef>
+            <a:effectRef idx="1">
+              <a:schemeClr val="dk1"/>
+            </a:effectRef>
+            <a:fontRef idx="minor">
+              <a:schemeClr val="tx1"/>
+            </a:fontRef>
+          </p:style>
+        </p:cxnSp>
+        <p:cxnSp>
+          <p:nvCxnSpPr>
+            <p:cNvPr id="66" name="Straight Arrow Connector 65">
+              <a:extLst>
+                <a:ext uri="{FF2B5EF4-FFF2-40B4-BE49-F238E27FC236}">
+                  <a16:creationId xmlns:a16="http://schemas.microsoft.com/office/drawing/2014/main" id="{F88B15B3-E297-2938-6503-89E8DED4BDD0}"/>
+                </a:ext>
+              </a:extLst>
+            </p:cNvPr>
+            <p:cNvCxnSpPr>
+              <a:cxnSpLocks/>
+            </p:cNvCxnSpPr>
+            <p:nvPr/>
+          </p:nvCxnSpPr>
+          <p:spPr>
+            <a:xfrm flipV="1">
+              <a:off x="2606040" y="4379976"/>
+              <a:ext cx="0" cy="640080"/>
+            </a:xfrm>
+            <a:prstGeom prst="straightConnector1">
+              <a:avLst/>
+            </a:prstGeom>
+            <a:ln w="28575">
+              <a:tailEnd type="triangle"/>
+            </a:ln>
+          </p:spPr>
+          <p:style>
+            <a:lnRef idx="2">
+              <a:schemeClr val="dk1"/>
+            </a:lnRef>
+            <a:fillRef idx="0">
+              <a:schemeClr val="dk1"/>
+            </a:fillRef>
+            <a:effectRef idx="1">
+              <a:schemeClr val="dk1"/>
+            </a:effectRef>
+            <a:fontRef idx="minor">
+              <a:schemeClr val="tx1"/>
+            </a:fontRef>
+          </p:style>
+        </p:cxnSp>
+        <mc:AlternateContent xmlns:mc="http://schemas.openxmlformats.org/markup-compatibility/2006">
+          <mc:Choice xmlns:a14="http://schemas.microsoft.com/office/drawing/2010/main" Requires="a14">
+            <p:sp>
+              <p:nvSpPr>
+                <p:cNvPr id="67" name="TextBox 66">
+                  <a:extLst>
+                    <a:ext uri="{FF2B5EF4-FFF2-40B4-BE49-F238E27FC236}">
+                      <a16:creationId xmlns:a16="http://schemas.microsoft.com/office/drawing/2014/main" id="{6EB532BB-742D-2055-C486-BB6D6C5EDC6C}"/>
+                    </a:ext>
+                  </a:extLst>
+                </p:cNvPr>
+                <p:cNvSpPr txBox="1"/>
+                <p:nvPr/>
+              </p:nvSpPr>
+              <p:spPr>
+                <a:xfrm>
+                  <a:off x="3026664" y="4590288"/>
+                  <a:ext cx="283463" cy="369332"/>
+                </a:xfrm>
+                <a:prstGeom prst="rect">
+                  <a:avLst/>
+                </a:prstGeom>
+                <a:noFill/>
+              </p:spPr>
+              <p:txBody>
+                <a:bodyPr wrap="square" rtlCol="0">
+                  <a:spAutoFit/>
+                </a:bodyPr>
+                <a:lstStyle/>
+                <a:p>
+                  <a14:m>
+                    <m:oMathPara xmlns:m="http://schemas.openxmlformats.org/officeDocument/2006/math">
+                      <m:oMathParaPr>
+                        <m:jc m:val="centerGroup"/>
+                      </m:oMathParaPr>
+                      <m:oMath xmlns:m="http://schemas.openxmlformats.org/officeDocument/2006/math">
+                        <m:r>
+                          <a:rPr lang="en-US" b="0" i="1" smtClean="0">
+                            <a:latin typeface="Cambria Math" panose="02040503050406030204" pitchFamily="18" charset="0"/>
+                          </a:rPr>
+                          <m:t>𝜉</m:t>
+                        </m:r>
+                      </m:oMath>
+                    </m:oMathPara>
+                  </a14:m>
+                  <a:endParaRPr lang="en-US" dirty="0"/>
+                </a:p>
+              </p:txBody>
+            </p:sp>
+          </mc:Choice>
+          <mc:Fallback>
+            <p:sp>
+              <p:nvSpPr>
+                <p:cNvPr id="67" name="TextBox 66">
+                  <a:extLst>
+                    <a:ext uri="{FF2B5EF4-FFF2-40B4-BE49-F238E27FC236}">
+                      <a16:creationId xmlns:a16="http://schemas.microsoft.com/office/drawing/2014/main" id="{6EB532BB-742D-2055-C486-BB6D6C5EDC6C}"/>
+                    </a:ext>
+                  </a:extLst>
+                </p:cNvPr>
+                <p:cNvSpPr txBox="1">
+                  <a:spLocks noRot="1" noChangeAspect="1" noMove="1" noResize="1" noEditPoints="1" noAdjustHandles="1" noChangeArrowheads="1" noChangeShapeType="1" noTextEdit="1"/>
+                </p:cNvSpPr>
+                <p:nvPr/>
+              </p:nvSpPr>
+              <p:spPr>
+                <a:xfrm>
+                  <a:off x="3026664" y="4590288"/>
+                  <a:ext cx="283463" cy="369332"/>
+                </a:xfrm>
+                <a:prstGeom prst="rect">
+                  <a:avLst/>
+                </a:prstGeom>
+                <a:blipFill>
+                  <a:blip r:embed="rId6"/>
+                  <a:stretch>
+                    <a:fillRect l="-6522" r="-10870" b="-13115"/>
+                  </a:stretch>
+                </a:blipFill>
+              </p:spPr>
+              <p:txBody>
+                <a:bodyPr/>
+                <a:lstStyle/>
+                <a:p>
+                  <a:r>
+                    <a:rPr lang="en-US">
+                      <a:noFill/>
+                    </a:rPr>
+                    <a:t> </a:t>
+                  </a:r>
+                </a:p>
+              </p:txBody>
+            </p:sp>
+          </mc:Fallback>
+        </mc:AlternateContent>
+        <mc:AlternateContent xmlns:mc="http://schemas.openxmlformats.org/markup-compatibility/2006">
+          <mc:Choice xmlns:a14="http://schemas.microsoft.com/office/drawing/2010/main" Requires="a14">
+            <p:sp>
+              <p:nvSpPr>
+                <p:cNvPr id="68" name="TextBox 67">
+                  <a:extLst>
+                    <a:ext uri="{FF2B5EF4-FFF2-40B4-BE49-F238E27FC236}">
+                      <a16:creationId xmlns:a16="http://schemas.microsoft.com/office/drawing/2014/main" id="{F53B274C-268D-3826-0C46-FF4990146450}"/>
+                    </a:ext>
+                  </a:extLst>
+                </p:cNvPr>
+                <p:cNvSpPr txBox="1"/>
+                <p:nvPr/>
+              </p:nvSpPr>
+              <p:spPr>
+                <a:xfrm>
+                  <a:off x="2340863" y="4100021"/>
+                  <a:ext cx="283463" cy="369332"/>
+                </a:xfrm>
+                <a:prstGeom prst="rect">
+                  <a:avLst/>
+                </a:prstGeom>
+                <a:noFill/>
+              </p:spPr>
+              <p:txBody>
+                <a:bodyPr wrap="square" rtlCol="0">
+                  <a:spAutoFit/>
+                </a:bodyPr>
+                <a:lstStyle/>
+                <a:p>
+                  <a14:m>
+                    <m:oMathPara xmlns:m="http://schemas.openxmlformats.org/officeDocument/2006/math">
+                      <m:oMathParaPr>
+                        <m:jc m:val="centerGroup"/>
+                      </m:oMathParaPr>
+                      <m:oMath xmlns:m="http://schemas.openxmlformats.org/officeDocument/2006/math">
+                        <m:r>
+                          <a:rPr lang="en-US" b="0" i="1" smtClean="0">
+                            <a:latin typeface="Cambria Math" panose="02040503050406030204" pitchFamily="18" charset="0"/>
+                          </a:rPr>
+                          <m:t>𝜂</m:t>
+                        </m:r>
+                      </m:oMath>
+                    </m:oMathPara>
+                  </a14:m>
+                  <a:endParaRPr lang="en-US" dirty="0"/>
+                </a:p>
+              </p:txBody>
+            </p:sp>
+          </mc:Choice>
+          <mc:Fallback>
+            <p:sp>
+              <p:nvSpPr>
+                <p:cNvPr id="68" name="TextBox 67">
+                  <a:extLst>
+                    <a:ext uri="{FF2B5EF4-FFF2-40B4-BE49-F238E27FC236}">
+                      <a16:creationId xmlns:a16="http://schemas.microsoft.com/office/drawing/2014/main" id="{F53B274C-268D-3826-0C46-FF4990146450}"/>
+                    </a:ext>
+                  </a:extLst>
+                </p:cNvPr>
+                <p:cNvSpPr txBox="1">
+                  <a:spLocks noRot="1" noChangeAspect="1" noMove="1" noResize="1" noEditPoints="1" noAdjustHandles="1" noChangeArrowheads="1" noChangeShapeType="1" noTextEdit="1"/>
+                </p:cNvSpPr>
+                <p:nvPr/>
+              </p:nvSpPr>
+              <p:spPr>
+                <a:xfrm>
+                  <a:off x="2340863" y="4100021"/>
+                  <a:ext cx="283463" cy="369332"/>
+                </a:xfrm>
+                <a:prstGeom prst="rect">
+                  <a:avLst/>
+                </a:prstGeom>
+                <a:blipFill>
+                  <a:blip r:embed="rId7"/>
+                  <a:stretch>
+                    <a:fillRect r="-4255" b="-6557"/>
+                  </a:stretch>
+                </a:blipFill>
+              </p:spPr>
+              <p:txBody>
+                <a:bodyPr/>
+                <a:lstStyle/>
+                <a:p>
+                  <a:r>
+                    <a:rPr lang="en-US">
+                      <a:noFill/>
+                    </a:rPr>
+                    <a:t> </a:t>
+                  </a:r>
+                </a:p>
+              </p:txBody>
+            </p:sp>
+          </mc:Fallback>
+        </mc:AlternateContent>
+      </p:grpSp>
+      <p:sp>
+        <p:nvSpPr>
+          <p:cNvPr id="69" name="Isosceles Triangle 68">
+            <a:extLst>
+              <a:ext uri="{FF2B5EF4-FFF2-40B4-BE49-F238E27FC236}">
+                <a16:creationId xmlns:a16="http://schemas.microsoft.com/office/drawing/2014/main" id="{952F2291-A633-BE9E-1B90-FF86317FD5E0}"/>
+              </a:ext>
+            </a:extLst>
+          </p:cNvPr>
+          <p:cNvSpPr/>
+          <p:nvPr/>
+        </p:nvSpPr>
+        <p:spPr>
+          <a:xfrm>
+            <a:off x="4715164" y="3959352"/>
+            <a:ext cx="2176272" cy="2121408"/>
+          </a:xfrm>
+          <a:prstGeom prst="triangle">
+            <a:avLst/>
+          </a:prstGeom>
+        </p:spPr>
+        <p:style>
+          <a:lnRef idx="2">
+            <a:schemeClr val="accent1">
+              <a:shade val="15000"/>
+            </a:schemeClr>
+          </a:lnRef>
+          <a:fillRef idx="1">
+            <a:schemeClr val="accent1"/>
+          </a:fillRef>
+          <a:effectRef idx="0">
+            <a:schemeClr val="accent1"/>
+          </a:effectRef>
+          <a:fontRef idx="minor">
+            <a:schemeClr val="lt1"/>
+          </a:fontRef>
+        </p:style>
+        <p:txBody>
+          <a:bodyPr rtlCol="0" anchor="ctr"/>
+          <a:lstStyle/>
+          <a:p>
+            <a:pPr algn="ctr"/>
+            <a:endParaRPr lang="en-US"/>
+          </a:p>
+        </p:txBody>
+      </p:sp>
+      <p:sp>
+        <p:nvSpPr>
+          <p:cNvPr id="72" name="Oval 71">
+            <a:extLst>
+              <a:ext uri="{FF2B5EF4-FFF2-40B4-BE49-F238E27FC236}">
+                <a16:creationId xmlns:a16="http://schemas.microsoft.com/office/drawing/2014/main" id="{DA5683CD-C7F0-C0F9-11B5-DBFE185195F2}"/>
+              </a:ext>
+            </a:extLst>
+          </p:cNvPr>
+          <p:cNvSpPr>
+            <a:spLocks noChangeAspect="1"/>
+          </p:cNvSpPr>
+          <p:nvPr/>
+        </p:nvSpPr>
+        <p:spPr>
+          <a:xfrm>
+            <a:off x="6685696" y="5897326"/>
+            <a:ext cx="365760" cy="365760"/>
+          </a:xfrm>
+          <a:prstGeom prst="ellipse">
+            <a:avLst/>
+          </a:prstGeom>
+          <a:solidFill>
+            <a:schemeClr val="bg1"/>
+          </a:solidFill>
+          <a:ln>
+            <a:solidFill>
+              <a:schemeClr val="tx1"/>
+            </a:solidFill>
+          </a:ln>
+        </p:spPr>
+        <p:style>
+          <a:lnRef idx="2">
+            <a:schemeClr val="accent1">
+              <a:shade val="15000"/>
+            </a:schemeClr>
+          </a:lnRef>
+          <a:fillRef idx="1">
+            <a:schemeClr val="accent1"/>
+          </a:fillRef>
+          <a:effectRef idx="0">
+            <a:schemeClr val="accent1"/>
+          </a:effectRef>
+          <a:fontRef idx="minor">
+            <a:schemeClr val="lt1"/>
+          </a:fontRef>
+        </p:style>
+        <p:txBody>
+          <a:bodyPr rtlCol="0" anchor="ctr"/>
+          <a:lstStyle/>
+          <a:p>
+            <a:pPr algn="ctr"/>
+            <a:r>
+              <a:rPr lang="en-US" dirty="0">
+                <a:solidFill>
+                  <a:schemeClr val="tx1"/>
+                </a:solidFill>
+              </a:rPr>
+              <a:t>2</a:t>
+            </a:r>
+          </a:p>
+        </p:txBody>
+      </p:sp>
+      <p:sp>
+        <p:nvSpPr>
+          <p:cNvPr id="73" name="Oval 72">
+            <a:extLst>
+              <a:ext uri="{FF2B5EF4-FFF2-40B4-BE49-F238E27FC236}">
+                <a16:creationId xmlns:a16="http://schemas.microsoft.com/office/drawing/2014/main" id="{36FF0570-7EE5-0433-FCA5-8E41B5832FC0}"/>
+              </a:ext>
+            </a:extLst>
+          </p:cNvPr>
+          <p:cNvSpPr>
+            <a:spLocks noChangeAspect="1"/>
+          </p:cNvSpPr>
+          <p:nvPr/>
+        </p:nvSpPr>
+        <p:spPr>
+          <a:xfrm>
+            <a:off x="5620420" y="3849901"/>
+            <a:ext cx="365760" cy="365760"/>
+          </a:xfrm>
+          <a:prstGeom prst="ellipse">
+            <a:avLst/>
+          </a:prstGeom>
+          <a:solidFill>
+            <a:schemeClr val="bg1"/>
+          </a:solidFill>
+          <a:ln>
+            <a:solidFill>
+              <a:schemeClr val="tx1"/>
+            </a:solidFill>
+          </a:ln>
+        </p:spPr>
+        <p:style>
+          <a:lnRef idx="2">
+            <a:schemeClr val="accent1">
+              <a:shade val="15000"/>
+            </a:schemeClr>
+          </a:lnRef>
+          <a:fillRef idx="1">
+            <a:schemeClr val="accent1"/>
+          </a:fillRef>
+          <a:effectRef idx="0">
+            <a:schemeClr val="accent1"/>
+          </a:effectRef>
+          <a:fontRef idx="minor">
+            <a:schemeClr val="lt1"/>
+          </a:fontRef>
+        </p:style>
+        <p:txBody>
+          <a:bodyPr rtlCol="0" anchor="ctr"/>
+          <a:lstStyle/>
+          <a:p>
+            <a:pPr algn="ctr"/>
+            <a:r>
+              <a:rPr lang="en-US" dirty="0">
+                <a:solidFill>
+                  <a:schemeClr val="tx1"/>
+                </a:solidFill>
+              </a:rPr>
+              <a:t>3</a:t>
+            </a:r>
+          </a:p>
+        </p:txBody>
+      </p:sp>
+      <p:grpSp>
+        <p:nvGrpSpPr>
+          <p:cNvPr id="74" name="Group 73">
+            <a:extLst>
+              <a:ext uri="{FF2B5EF4-FFF2-40B4-BE49-F238E27FC236}">
+                <a16:creationId xmlns:a16="http://schemas.microsoft.com/office/drawing/2014/main" id="{AF0B0563-0D09-363F-CFF5-6F4E0632C6CB}"/>
+              </a:ext>
+            </a:extLst>
+          </p:cNvPr>
+          <p:cNvGrpSpPr/>
+          <p:nvPr/>
+        </p:nvGrpSpPr>
+        <p:grpSpPr>
+          <a:xfrm>
+            <a:off x="2493263" y="4252421"/>
+            <a:ext cx="969264" cy="920035"/>
+            <a:chOff x="2340863" y="4100021"/>
+            <a:chExt cx="969264" cy="920035"/>
+          </a:xfrm>
+        </p:grpSpPr>
+        <p:cxnSp>
+          <p:nvCxnSpPr>
+            <p:cNvPr id="75" name="Straight Arrow Connector 74">
+              <a:extLst>
+                <a:ext uri="{FF2B5EF4-FFF2-40B4-BE49-F238E27FC236}">
+                  <a16:creationId xmlns:a16="http://schemas.microsoft.com/office/drawing/2014/main" id="{B9E8C1E3-E75D-5A97-85BD-93A761B5BBEB}"/>
+                </a:ext>
+              </a:extLst>
+            </p:cNvPr>
+            <p:cNvCxnSpPr>
+              <a:cxnSpLocks/>
+            </p:cNvCxnSpPr>
+            <p:nvPr/>
+          </p:nvCxnSpPr>
+          <p:spPr>
+            <a:xfrm>
+              <a:off x="2606038" y="5010912"/>
+              <a:ext cx="640080" cy="0"/>
+            </a:xfrm>
+            <a:prstGeom prst="straightConnector1">
+              <a:avLst/>
+            </a:prstGeom>
+            <a:ln w="28575">
+              <a:tailEnd type="triangle"/>
+            </a:ln>
+          </p:spPr>
+          <p:style>
+            <a:lnRef idx="2">
+              <a:schemeClr val="dk1"/>
+            </a:lnRef>
+            <a:fillRef idx="0">
+              <a:schemeClr val="dk1"/>
+            </a:fillRef>
+            <a:effectRef idx="1">
+              <a:schemeClr val="dk1"/>
+            </a:effectRef>
+            <a:fontRef idx="minor">
+              <a:schemeClr val="tx1"/>
+            </a:fontRef>
+          </p:style>
+        </p:cxnSp>
+        <p:cxnSp>
+          <p:nvCxnSpPr>
+            <p:cNvPr id="76" name="Straight Arrow Connector 75">
+              <a:extLst>
+                <a:ext uri="{FF2B5EF4-FFF2-40B4-BE49-F238E27FC236}">
+                  <a16:creationId xmlns:a16="http://schemas.microsoft.com/office/drawing/2014/main" id="{248F6A5C-AD1B-941E-26D5-0D2A3A0ECA3E}"/>
+                </a:ext>
+              </a:extLst>
+            </p:cNvPr>
+            <p:cNvCxnSpPr>
+              <a:cxnSpLocks/>
+            </p:cNvCxnSpPr>
+            <p:nvPr/>
+          </p:nvCxnSpPr>
+          <p:spPr>
+            <a:xfrm flipV="1">
+              <a:off x="2606040" y="4379976"/>
+              <a:ext cx="0" cy="640080"/>
+            </a:xfrm>
+            <a:prstGeom prst="straightConnector1">
+              <a:avLst/>
+            </a:prstGeom>
+            <a:ln w="28575">
+              <a:tailEnd type="triangle"/>
+            </a:ln>
+          </p:spPr>
+          <p:style>
+            <a:lnRef idx="2">
+              <a:schemeClr val="dk1"/>
+            </a:lnRef>
+            <a:fillRef idx="0">
+              <a:schemeClr val="dk1"/>
+            </a:fillRef>
+            <a:effectRef idx="1">
+              <a:schemeClr val="dk1"/>
+            </a:effectRef>
+            <a:fontRef idx="minor">
+              <a:schemeClr val="tx1"/>
+            </a:fontRef>
+          </p:style>
+        </p:cxnSp>
+        <mc:AlternateContent xmlns:mc="http://schemas.openxmlformats.org/markup-compatibility/2006">
+          <mc:Choice xmlns:a14="http://schemas.microsoft.com/office/drawing/2010/main" Requires="a14">
+            <p:sp>
+              <p:nvSpPr>
+                <p:cNvPr id="77" name="TextBox 76">
+                  <a:extLst>
+                    <a:ext uri="{FF2B5EF4-FFF2-40B4-BE49-F238E27FC236}">
+                      <a16:creationId xmlns:a16="http://schemas.microsoft.com/office/drawing/2014/main" id="{580FBA4C-6402-790A-2050-31D5A7539263}"/>
+                    </a:ext>
+                  </a:extLst>
+                </p:cNvPr>
+                <p:cNvSpPr txBox="1"/>
+                <p:nvPr/>
+              </p:nvSpPr>
+              <p:spPr>
+                <a:xfrm>
+                  <a:off x="3026664" y="4590288"/>
+                  <a:ext cx="283463" cy="369332"/>
+                </a:xfrm>
+                <a:prstGeom prst="rect">
+                  <a:avLst/>
+                </a:prstGeom>
+                <a:noFill/>
+              </p:spPr>
+              <p:txBody>
+                <a:bodyPr wrap="square" rtlCol="0">
+                  <a:spAutoFit/>
+                </a:bodyPr>
+                <a:lstStyle/>
+                <a:p>
+                  <a14:m>
+                    <m:oMathPara xmlns:m="http://schemas.openxmlformats.org/officeDocument/2006/math">
+                      <m:oMathParaPr>
+                        <m:jc m:val="centerGroup"/>
+                      </m:oMathParaPr>
+                      <m:oMath xmlns:m="http://schemas.openxmlformats.org/officeDocument/2006/math">
+                        <m:r>
+                          <a:rPr lang="en-US" b="0" i="1" smtClean="0">
+                            <a:latin typeface="Cambria Math" panose="02040503050406030204" pitchFamily="18" charset="0"/>
+                          </a:rPr>
+                          <m:t>𝜉</m:t>
+                        </m:r>
+                      </m:oMath>
+                    </m:oMathPara>
+                  </a14:m>
+                  <a:endParaRPr lang="en-US" dirty="0"/>
+                </a:p>
+              </p:txBody>
+            </p:sp>
+          </mc:Choice>
+          <mc:Fallback>
+            <p:sp>
+              <p:nvSpPr>
+                <p:cNvPr id="77" name="TextBox 76">
+                  <a:extLst>
+                    <a:ext uri="{FF2B5EF4-FFF2-40B4-BE49-F238E27FC236}">
+                      <a16:creationId xmlns:a16="http://schemas.microsoft.com/office/drawing/2014/main" id="{580FBA4C-6402-790A-2050-31D5A7539263}"/>
+                    </a:ext>
+                  </a:extLst>
+                </p:cNvPr>
+                <p:cNvSpPr txBox="1">
+                  <a:spLocks noRot="1" noChangeAspect="1" noMove="1" noResize="1" noEditPoints="1" noAdjustHandles="1" noChangeArrowheads="1" noChangeShapeType="1" noTextEdit="1"/>
+                </p:cNvSpPr>
+                <p:nvPr/>
+              </p:nvSpPr>
+              <p:spPr>
+                <a:xfrm>
+                  <a:off x="3026664" y="4590288"/>
+                  <a:ext cx="283463" cy="369332"/>
+                </a:xfrm>
+                <a:prstGeom prst="rect">
+                  <a:avLst/>
+                </a:prstGeom>
+                <a:blipFill>
+                  <a:blip r:embed="rId8"/>
+                  <a:stretch>
+                    <a:fillRect l="-6522" r="-8696" b="-11475"/>
+                  </a:stretch>
+                </a:blipFill>
+              </p:spPr>
+              <p:txBody>
+                <a:bodyPr/>
+                <a:lstStyle/>
+                <a:p>
+                  <a:r>
+                    <a:rPr lang="en-US">
+                      <a:noFill/>
+                    </a:rPr>
+                    <a:t> </a:t>
+                  </a:r>
+                </a:p>
+              </p:txBody>
+            </p:sp>
+          </mc:Fallback>
+        </mc:AlternateContent>
+        <mc:AlternateContent xmlns:mc="http://schemas.openxmlformats.org/markup-compatibility/2006">
+          <mc:Choice xmlns:a14="http://schemas.microsoft.com/office/drawing/2010/main" Requires="a14">
+            <p:sp>
+              <p:nvSpPr>
+                <p:cNvPr id="78" name="TextBox 77">
+                  <a:extLst>
+                    <a:ext uri="{FF2B5EF4-FFF2-40B4-BE49-F238E27FC236}">
+                      <a16:creationId xmlns:a16="http://schemas.microsoft.com/office/drawing/2014/main" id="{55D5FDA0-B949-3F93-4970-902D9675A747}"/>
+                    </a:ext>
+                  </a:extLst>
+                </p:cNvPr>
+                <p:cNvSpPr txBox="1"/>
+                <p:nvPr/>
+              </p:nvSpPr>
+              <p:spPr>
+                <a:xfrm>
+                  <a:off x="2340863" y="4100021"/>
+                  <a:ext cx="283463" cy="369332"/>
+                </a:xfrm>
+                <a:prstGeom prst="rect">
+                  <a:avLst/>
+                </a:prstGeom>
+                <a:noFill/>
+              </p:spPr>
+              <p:txBody>
+                <a:bodyPr wrap="square" rtlCol="0">
+                  <a:spAutoFit/>
+                </a:bodyPr>
+                <a:lstStyle/>
+                <a:p>
+                  <a14:m>
+                    <m:oMathPara xmlns:m="http://schemas.openxmlformats.org/officeDocument/2006/math">
+                      <m:oMathParaPr>
+                        <m:jc m:val="centerGroup"/>
+                      </m:oMathParaPr>
+                      <m:oMath xmlns:m="http://schemas.openxmlformats.org/officeDocument/2006/math">
+                        <m:r>
+                          <a:rPr lang="en-US" b="0" i="1" smtClean="0">
+                            <a:latin typeface="Cambria Math" panose="02040503050406030204" pitchFamily="18" charset="0"/>
+                          </a:rPr>
+                          <m:t>𝜂</m:t>
+                        </m:r>
+                      </m:oMath>
+                    </m:oMathPara>
+                  </a14:m>
+                  <a:endParaRPr lang="en-US" dirty="0"/>
+                </a:p>
+              </p:txBody>
+            </p:sp>
+          </mc:Choice>
+          <mc:Fallback>
+            <p:sp>
+              <p:nvSpPr>
+                <p:cNvPr id="78" name="TextBox 77">
+                  <a:extLst>
+                    <a:ext uri="{FF2B5EF4-FFF2-40B4-BE49-F238E27FC236}">
+                      <a16:creationId xmlns:a16="http://schemas.microsoft.com/office/drawing/2014/main" id="{55D5FDA0-B949-3F93-4970-902D9675A747}"/>
+                    </a:ext>
+                  </a:extLst>
+                </p:cNvPr>
+                <p:cNvSpPr txBox="1">
+                  <a:spLocks noRot="1" noChangeAspect="1" noMove="1" noResize="1" noEditPoints="1" noAdjustHandles="1" noChangeArrowheads="1" noChangeShapeType="1" noTextEdit="1"/>
+                </p:cNvSpPr>
+                <p:nvPr/>
+              </p:nvSpPr>
+              <p:spPr>
+                <a:xfrm>
+                  <a:off x="2340863" y="4100021"/>
+                  <a:ext cx="283463" cy="369332"/>
+                </a:xfrm>
+                <a:prstGeom prst="rect">
+                  <a:avLst/>
+                </a:prstGeom>
+                <a:blipFill>
+                  <a:blip r:embed="rId9"/>
+                  <a:stretch>
+                    <a:fillRect r="-6522" b="-6667"/>
+                  </a:stretch>
+                </a:blipFill>
+              </p:spPr>
+              <p:txBody>
+                <a:bodyPr/>
+                <a:lstStyle/>
+                <a:p>
+                  <a:r>
+                    <a:rPr lang="en-US">
+                      <a:noFill/>
+                    </a:rPr>
+                    <a:t> </a:t>
+                  </a:r>
+                </a:p>
+              </p:txBody>
+            </p:sp>
+          </mc:Fallback>
+        </mc:AlternateContent>
+      </p:grpSp>
+      <p:grpSp>
+        <p:nvGrpSpPr>
+          <p:cNvPr id="53" name="Group 52">
+            <a:extLst>
+              <a:ext uri="{FF2B5EF4-FFF2-40B4-BE49-F238E27FC236}">
+                <a16:creationId xmlns:a16="http://schemas.microsoft.com/office/drawing/2014/main" id="{5B7793AD-58B8-F585-C0B8-9CC7F176A4C3}"/>
+              </a:ext>
+            </a:extLst>
+          </p:cNvPr>
+          <p:cNvGrpSpPr/>
+          <p:nvPr/>
+        </p:nvGrpSpPr>
+        <p:grpSpPr>
+          <a:xfrm>
+            <a:off x="4494369" y="5163312"/>
+            <a:ext cx="969264" cy="920035"/>
+            <a:chOff x="2340863" y="4100021"/>
+            <a:chExt cx="969264" cy="920035"/>
+          </a:xfrm>
+        </p:grpSpPr>
+        <p:cxnSp>
+          <p:nvCxnSpPr>
+            <p:cNvPr id="45" name="Straight Arrow Connector 44">
+              <a:extLst>
+                <a:ext uri="{FF2B5EF4-FFF2-40B4-BE49-F238E27FC236}">
+                  <a16:creationId xmlns:a16="http://schemas.microsoft.com/office/drawing/2014/main" id="{0E81C214-A73F-F930-90D2-C971652CCA1D}"/>
+                </a:ext>
+              </a:extLst>
+            </p:cNvPr>
+            <p:cNvCxnSpPr>
+              <a:cxnSpLocks/>
+            </p:cNvCxnSpPr>
+            <p:nvPr/>
+          </p:nvCxnSpPr>
+          <p:spPr>
+            <a:xfrm>
+              <a:off x="2606038" y="5010912"/>
+              <a:ext cx="640080" cy="0"/>
+            </a:xfrm>
+            <a:prstGeom prst="straightConnector1">
+              <a:avLst/>
+            </a:prstGeom>
+            <a:ln w="28575">
+              <a:tailEnd type="triangle"/>
+            </a:ln>
+          </p:spPr>
+          <p:style>
+            <a:lnRef idx="2">
+              <a:schemeClr val="dk1"/>
+            </a:lnRef>
+            <a:fillRef idx="0">
+              <a:schemeClr val="dk1"/>
+            </a:fillRef>
+            <a:effectRef idx="1">
+              <a:schemeClr val="dk1"/>
+            </a:effectRef>
+            <a:fontRef idx="minor">
+              <a:schemeClr val="tx1"/>
+            </a:fontRef>
+          </p:style>
+        </p:cxnSp>
+        <p:cxnSp>
+          <p:nvCxnSpPr>
+            <p:cNvPr id="47" name="Straight Arrow Connector 46">
+              <a:extLst>
+                <a:ext uri="{FF2B5EF4-FFF2-40B4-BE49-F238E27FC236}">
+                  <a16:creationId xmlns:a16="http://schemas.microsoft.com/office/drawing/2014/main" id="{E55470BB-6E22-51CF-2CC6-BE0F0B27E78C}"/>
+                </a:ext>
+              </a:extLst>
+            </p:cNvPr>
+            <p:cNvCxnSpPr>
+              <a:cxnSpLocks/>
+            </p:cNvCxnSpPr>
+            <p:nvPr/>
+          </p:nvCxnSpPr>
+          <p:spPr>
+            <a:xfrm flipV="1">
+              <a:off x="2606040" y="4379976"/>
+              <a:ext cx="0" cy="640080"/>
+            </a:xfrm>
+            <a:prstGeom prst="straightConnector1">
+              <a:avLst/>
+            </a:prstGeom>
+            <a:ln w="28575">
+              <a:tailEnd type="triangle"/>
+            </a:ln>
+          </p:spPr>
+          <p:style>
+            <a:lnRef idx="2">
+              <a:schemeClr val="dk1"/>
+            </a:lnRef>
+            <a:fillRef idx="0">
+              <a:schemeClr val="dk1"/>
+            </a:fillRef>
+            <a:effectRef idx="1">
+              <a:schemeClr val="dk1"/>
+            </a:effectRef>
+            <a:fontRef idx="minor">
+              <a:schemeClr val="tx1"/>
+            </a:fontRef>
+          </p:style>
+        </p:cxnSp>
+        <mc:AlternateContent xmlns:mc="http://schemas.openxmlformats.org/markup-compatibility/2006">
+          <mc:Choice xmlns:a14="http://schemas.microsoft.com/office/drawing/2010/main" Requires="a14">
+            <p:sp>
+              <p:nvSpPr>
+                <p:cNvPr id="51" name="TextBox 50">
+                  <a:extLst>
+                    <a:ext uri="{FF2B5EF4-FFF2-40B4-BE49-F238E27FC236}">
+                      <a16:creationId xmlns:a16="http://schemas.microsoft.com/office/drawing/2014/main" id="{20AC3036-A744-3CE2-AAB6-F88FB4132E86}"/>
+                    </a:ext>
+                  </a:extLst>
+                </p:cNvPr>
+                <p:cNvSpPr txBox="1"/>
+                <p:nvPr/>
+              </p:nvSpPr>
+              <p:spPr>
+                <a:xfrm>
+                  <a:off x="3026664" y="4590288"/>
+                  <a:ext cx="283463" cy="369332"/>
+                </a:xfrm>
+                <a:prstGeom prst="rect">
+                  <a:avLst/>
+                </a:prstGeom>
+                <a:noFill/>
+              </p:spPr>
+              <p:txBody>
+                <a:bodyPr wrap="square" rtlCol="0">
+                  <a:spAutoFit/>
+                </a:bodyPr>
+                <a:lstStyle/>
+                <a:p>
+                  <a14:m>
+                    <m:oMathPara xmlns:m="http://schemas.openxmlformats.org/officeDocument/2006/math">
+                      <m:oMathParaPr>
+                        <m:jc m:val="centerGroup"/>
+                      </m:oMathParaPr>
+                      <m:oMath xmlns:m="http://schemas.openxmlformats.org/officeDocument/2006/math">
+                        <m:r>
+                          <a:rPr lang="en-US" b="0" i="1" smtClean="0">
+                            <a:latin typeface="Cambria Math" panose="02040503050406030204" pitchFamily="18" charset="0"/>
+                          </a:rPr>
+                          <m:t>𝜉</m:t>
+                        </m:r>
+                      </m:oMath>
+                    </m:oMathPara>
+                  </a14:m>
+                  <a:endParaRPr lang="en-US" dirty="0"/>
+                </a:p>
+              </p:txBody>
+            </p:sp>
+          </mc:Choice>
+          <mc:Fallback>
+            <p:sp>
+              <p:nvSpPr>
+                <p:cNvPr id="51" name="TextBox 50">
+                  <a:extLst>
+                    <a:ext uri="{FF2B5EF4-FFF2-40B4-BE49-F238E27FC236}">
+                      <a16:creationId xmlns:a16="http://schemas.microsoft.com/office/drawing/2014/main" id="{20AC3036-A744-3CE2-AAB6-F88FB4132E86}"/>
+                    </a:ext>
+                  </a:extLst>
+                </p:cNvPr>
+                <p:cNvSpPr txBox="1">
+                  <a:spLocks noRot="1" noChangeAspect="1" noMove="1" noResize="1" noEditPoints="1" noAdjustHandles="1" noChangeArrowheads="1" noChangeShapeType="1" noTextEdit="1"/>
+                </p:cNvSpPr>
+                <p:nvPr/>
+              </p:nvSpPr>
+              <p:spPr>
+                <a:xfrm>
+                  <a:off x="3026664" y="4590288"/>
+                  <a:ext cx="283463" cy="369332"/>
+                </a:xfrm>
+                <a:prstGeom prst="rect">
+                  <a:avLst/>
+                </a:prstGeom>
+                <a:blipFill>
+                  <a:blip r:embed="rId10"/>
+                  <a:stretch>
+                    <a:fillRect l="-6522" r="-10870" b="-13115"/>
+                  </a:stretch>
+                </a:blipFill>
+              </p:spPr>
+              <p:txBody>
+                <a:bodyPr/>
+                <a:lstStyle/>
+                <a:p>
+                  <a:r>
+                    <a:rPr lang="en-US">
+                      <a:noFill/>
+                    </a:rPr>
+                    <a:t> </a:t>
+                  </a:r>
+                </a:p>
+              </p:txBody>
+            </p:sp>
+          </mc:Fallback>
+        </mc:AlternateContent>
+        <mc:AlternateContent xmlns:mc="http://schemas.openxmlformats.org/markup-compatibility/2006">
+          <mc:Choice xmlns:a14="http://schemas.microsoft.com/office/drawing/2010/main" Requires="a14">
+            <p:sp>
+              <p:nvSpPr>
+                <p:cNvPr id="52" name="TextBox 51">
+                  <a:extLst>
+                    <a:ext uri="{FF2B5EF4-FFF2-40B4-BE49-F238E27FC236}">
+                      <a16:creationId xmlns:a16="http://schemas.microsoft.com/office/drawing/2014/main" id="{ABDE8D79-431A-F4AB-2132-186CFD3A1FF6}"/>
+                    </a:ext>
+                  </a:extLst>
+                </p:cNvPr>
+                <p:cNvSpPr txBox="1"/>
+                <p:nvPr/>
+              </p:nvSpPr>
+              <p:spPr>
+                <a:xfrm>
+                  <a:off x="2340863" y="4100021"/>
+                  <a:ext cx="283463" cy="369332"/>
+                </a:xfrm>
+                <a:prstGeom prst="rect">
+                  <a:avLst/>
+                </a:prstGeom>
+                <a:noFill/>
+              </p:spPr>
+              <p:txBody>
+                <a:bodyPr wrap="square" rtlCol="0">
+                  <a:spAutoFit/>
+                </a:bodyPr>
+                <a:lstStyle/>
+                <a:p>
+                  <a14:m>
+                    <m:oMathPara xmlns:m="http://schemas.openxmlformats.org/officeDocument/2006/math">
+                      <m:oMathParaPr>
+                        <m:jc m:val="centerGroup"/>
+                      </m:oMathParaPr>
+                      <m:oMath xmlns:m="http://schemas.openxmlformats.org/officeDocument/2006/math">
+                        <m:r>
+                          <a:rPr lang="en-US" b="0" i="1" smtClean="0">
+                            <a:latin typeface="Cambria Math" panose="02040503050406030204" pitchFamily="18" charset="0"/>
+                          </a:rPr>
+                          <m:t>𝜂</m:t>
+                        </m:r>
+                      </m:oMath>
+                    </m:oMathPara>
+                  </a14:m>
+                  <a:endParaRPr lang="en-US" dirty="0"/>
+                </a:p>
+              </p:txBody>
+            </p:sp>
+          </mc:Choice>
+          <mc:Fallback>
+            <p:sp>
+              <p:nvSpPr>
+                <p:cNvPr id="52" name="TextBox 51">
+                  <a:extLst>
+                    <a:ext uri="{FF2B5EF4-FFF2-40B4-BE49-F238E27FC236}">
+                      <a16:creationId xmlns:a16="http://schemas.microsoft.com/office/drawing/2014/main" id="{ABDE8D79-431A-F4AB-2132-186CFD3A1FF6}"/>
+                    </a:ext>
+                  </a:extLst>
+                </p:cNvPr>
+                <p:cNvSpPr txBox="1">
+                  <a:spLocks noRot="1" noChangeAspect="1" noMove="1" noResize="1" noEditPoints="1" noAdjustHandles="1" noChangeArrowheads="1" noChangeShapeType="1" noTextEdit="1"/>
+                </p:cNvSpPr>
+                <p:nvPr/>
+              </p:nvSpPr>
+              <p:spPr>
+                <a:xfrm>
+                  <a:off x="2340863" y="4100021"/>
+                  <a:ext cx="283463" cy="369332"/>
+                </a:xfrm>
+                <a:prstGeom prst="rect">
+                  <a:avLst/>
+                </a:prstGeom>
+                <a:blipFill>
+                  <a:blip r:embed="rId11"/>
+                  <a:stretch>
+                    <a:fillRect r="-4255" b="-4918"/>
+                  </a:stretch>
+                </a:blipFill>
+              </p:spPr>
+              <p:txBody>
+                <a:bodyPr/>
+                <a:lstStyle/>
+                <a:p>
+                  <a:r>
+                    <a:rPr lang="en-US">
+                      <a:noFill/>
+                    </a:rPr>
+                    <a:t> </a:t>
+                  </a:r>
+                </a:p>
+              </p:txBody>
+            </p:sp>
+          </mc:Fallback>
+        </mc:AlternateContent>
+      </p:grpSp>
+      <p:sp>
+        <p:nvSpPr>
+          <p:cNvPr id="70" name="Oval 69">
+            <a:extLst>
+              <a:ext uri="{FF2B5EF4-FFF2-40B4-BE49-F238E27FC236}">
+                <a16:creationId xmlns:a16="http://schemas.microsoft.com/office/drawing/2014/main" id="{348F0306-021B-9ED9-C3F0-F627C2F459CC}"/>
+              </a:ext>
+            </a:extLst>
+          </p:cNvPr>
+          <p:cNvSpPr>
+            <a:spLocks noChangeAspect="1"/>
+          </p:cNvSpPr>
+          <p:nvPr/>
+        </p:nvSpPr>
+        <p:spPr>
+          <a:xfrm>
+            <a:off x="4584008" y="5897326"/>
+            <a:ext cx="365760" cy="365760"/>
+          </a:xfrm>
+          <a:prstGeom prst="ellipse">
+            <a:avLst/>
+          </a:prstGeom>
+          <a:solidFill>
+            <a:schemeClr val="bg1"/>
+          </a:solidFill>
+          <a:ln>
+            <a:solidFill>
+              <a:schemeClr val="tx1"/>
+            </a:solidFill>
+          </a:ln>
+        </p:spPr>
+        <p:style>
+          <a:lnRef idx="2">
+            <a:schemeClr val="accent1">
+              <a:shade val="15000"/>
+            </a:schemeClr>
+          </a:lnRef>
+          <a:fillRef idx="1">
+            <a:schemeClr val="accent1"/>
+          </a:fillRef>
+          <a:effectRef idx="0">
+            <a:schemeClr val="accent1"/>
+          </a:effectRef>
+          <a:fontRef idx="minor">
+            <a:schemeClr val="lt1"/>
+          </a:fontRef>
+        </p:style>
+        <p:txBody>
+          <a:bodyPr rtlCol="0" anchor="ctr"/>
+          <a:lstStyle/>
+          <a:p>
+            <a:pPr algn="ctr"/>
+            <a:r>
+              <a:rPr lang="en-US" dirty="0">
+                <a:solidFill>
+                  <a:schemeClr val="tx1"/>
+                </a:solidFill>
+              </a:rPr>
+              <a:t>1</a:t>
+            </a:r>
+          </a:p>
+        </p:txBody>
+      </p:sp>
     </p:spTree>
     <p:extLst>
       <p:ext uri="{BB962C8B-B14F-4D97-AF65-F5344CB8AC3E}">
         <p14:creationId xmlns:p14="http://schemas.microsoft.com/office/powerpoint/2010/main" val="773246975"/>
+      </p:ext>
+    </p:extLst>
+  </p:cSld>
+  <p:clrMapOvr>
+    <a:masterClrMapping/>
+  </p:clrMapOvr>
+</p:sld>
+</file>
+
+<file path=ppt/slides/slide6.xml><?xml version="1.0" encoding="utf-8"?>
+<p:sld xmlns:a="http://schemas.openxmlformats.org/drawingml/2006/main" xmlns:r="http://schemas.openxmlformats.org/officeDocument/2006/relationships" xmlns:p="http://schemas.openxmlformats.org/presentationml/2006/main">
+  <p:cSld>
+    <p:spTree>
+      <p:nvGrpSpPr>
+        <p:cNvPr id="1" name=""/>
+        <p:cNvGrpSpPr/>
+        <p:nvPr/>
+      </p:nvGrpSpPr>
+      <p:grpSpPr>
+        <a:xfrm>
+          <a:off x="0" y="0"/>
+          <a:ext cx="0" cy="0"/>
+          <a:chOff x="0" y="0"/>
+          <a:chExt cx="0" cy="0"/>
+        </a:xfrm>
+      </p:grpSpPr>
+      <p:sp>
+        <p:nvSpPr>
+          <p:cNvPr id="2" name="Title 1">
+            <a:extLst>
+              <a:ext uri="{FF2B5EF4-FFF2-40B4-BE49-F238E27FC236}">
+                <a16:creationId xmlns:a16="http://schemas.microsoft.com/office/drawing/2014/main" id="{FF40259F-4A33-6EB0-9940-323484A2ACC3}"/>
+              </a:ext>
+            </a:extLst>
+          </p:cNvPr>
+          <p:cNvSpPr>
+            <a:spLocks noGrp="1"/>
+          </p:cNvSpPr>
+          <p:nvPr>
+            <p:ph type="title"/>
+          </p:nvPr>
+        </p:nvSpPr>
+        <p:spPr/>
+        <p:txBody>
+          <a:bodyPr/>
+          <a:lstStyle/>
+          <a:p>
+            <a:endParaRPr lang="en-US"/>
+          </a:p>
+        </p:txBody>
+      </p:sp>
+      <p:pic>
+        <p:nvPicPr>
+          <p:cNvPr id="4" name="Picture 3" descr="A grid with a spider web&#10;&#10;AI-generated content may be incorrect.">
+            <a:extLst>
+              <a:ext uri="{FF2B5EF4-FFF2-40B4-BE49-F238E27FC236}">
+                <a16:creationId xmlns:a16="http://schemas.microsoft.com/office/drawing/2014/main" id="{4AFB203E-A2DA-BC2B-873B-E4A102B48C88}"/>
+              </a:ext>
+            </a:extLst>
+          </p:cNvPr>
+          <p:cNvPicPr>
+            <a:picLocks noChangeAspect="1"/>
+          </p:cNvPicPr>
+          <p:nvPr/>
+        </p:nvPicPr>
+        <p:blipFill>
+          <a:blip r:embed="rId2"/>
+          <a:stretch>
+            <a:fillRect/>
+          </a:stretch>
+        </p:blipFill>
+        <p:spPr>
+          <a:xfrm>
+            <a:off x="2097881" y="0"/>
+            <a:ext cx="7996237" cy="6564503"/>
+          </a:xfrm>
+          <a:prstGeom prst="rect">
+            <a:avLst/>
+          </a:prstGeom>
+        </p:spPr>
+      </p:pic>
+      <p:sp>
+        <p:nvSpPr>
+          <p:cNvPr id="11" name="Rectangle 10">
+            <a:extLst>
+              <a:ext uri="{FF2B5EF4-FFF2-40B4-BE49-F238E27FC236}">
+                <a16:creationId xmlns:a16="http://schemas.microsoft.com/office/drawing/2014/main" id="{FC51489A-348F-2DC5-2708-8820B005B50D}"/>
+              </a:ext>
+            </a:extLst>
+          </p:cNvPr>
+          <p:cNvSpPr/>
+          <p:nvPr/>
+        </p:nvSpPr>
+        <p:spPr>
+          <a:xfrm>
+            <a:off x="5422392" y="2523744"/>
+            <a:ext cx="673608" cy="722376"/>
+          </a:xfrm>
+          <a:prstGeom prst="rect">
+            <a:avLst/>
+          </a:prstGeom>
+          <a:noFill/>
+          <a:ln w="28575">
+            <a:solidFill>
+              <a:srgbClr val="FF0000"/>
+            </a:solidFill>
+          </a:ln>
+        </p:spPr>
+        <p:style>
+          <a:lnRef idx="2">
+            <a:schemeClr val="accent1">
+              <a:shade val="15000"/>
+            </a:schemeClr>
+          </a:lnRef>
+          <a:fillRef idx="1">
+            <a:schemeClr val="accent1"/>
+          </a:fillRef>
+          <a:effectRef idx="0">
+            <a:schemeClr val="accent1"/>
+          </a:effectRef>
+          <a:fontRef idx="minor">
+            <a:schemeClr val="lt1"/>
+          </a:fontRef>
+        </p:style>
+        <p:txBody>
+          <a:bodyPr rtlCol="0" anchor="ctr"/>
+          <a:lstStyle/>
+          <a:p>
+            <a:pPr algn="ctr"/>
+            <a:endParaRPr lang="en-US"/>
+          </a:p>
+        </p:txBody>
+      </p:sp>
+      <p:pic>
+        <p:nvPicPr>
+          <p:cNvPr id="6" name="Content Placeholder 5">
+            <a:extLst>
+              <a:ext uri="{FF2B5EF4-FFF2-40B4-BE49-F238E27FC236}">
+                <a16:creationId xmlns:a16="http://schemas.microsoft.com/office/drawing/2014/main" id="{ADF8453B-0CC3-C29E-5D67-84CF1E2643B9}"/>
+              </a:ext>
+            </a:extLst>
+          </p:cNvPr>
+          <p:cNvPicPr>
+            <a:picLocks noGrp="1" noChangeAspect="1"/>
+          </p:cNvPicPr>
+          <p:nvPr>
+            <p:ph idx="1"/>
+          </p:nvPr>
+        </p:nvPicPr>
+        <p:blipFill>
+          <a:blip r:embed="rId3"/>
+          <a:stretch>
+            <a:fillRect/>
+          </a:stretch>
+        </p:blipFill>
+        <p:spPr>
+          <a:xfrm>
+            <a:off x="5738813" y="1180139"/>
+            <a:ext cx="1966912" cy="1918583"/>
+          </a:xfrm>
+          <a:prstGeom prst="rect">
+            <a:avLst/>
+          </a:prstGeom>
+          <a:ln w="19050">
+            <a:solidFill>
+              <a:srgbClr val="FF0000"/>
+            </a:solidFill>
+          </a:ln>
+        </p:spPr>
+      </p:pic>
+      <p:cxnSp>
+        <p:nvCxnSpPr>
+          <p:cNvPr id="13" name="Straight Connector 12">
+            <a:extLst>
+              <a:ext uri="{FF2B5EF4-FFF2-40B4-BE49-F238E27FC236}">
+                <a16:creationId xmlns:a16="http://schemas.microsoft.com/office/drawing/2014/main" id="{AD70A883-176A-9297-77DB-7ECDFFF66E52}"/>
+              </a:ext>
+            </a:extLst>
+          </p:cNvPr>
+          <p:cNvCxnSpPr/>
+          <p:nvPr/>
+        </p:nvCxnSpPr>
+        <p:spPr>
+          <a:xfrm flipH="1">
+            <a:off x="6096000" y="3098722"/>
+            <a:ext cx="1609725" cy="147398"/>
+          </a:xfrm>
+          <a:prstGeom prst="line">
+            <a:avLst/>
+          </a:prstGeom>
+          <a:ln>
+            <a:solidFill>
+              <a:srgbClr val="FF0000"/>
+            </a:solidFill>
+          </a:ln>
+        </p:spPr>
+        <p:style>
+          <a:lnRef idx="2">
+            <a:schemeClr val="accent1"/>
+          </a:lnRef>
+          <a:fillRef idx="0">
+            <a:schemeClr val="accent1"/>
+          </a:fillRef>
+          <a:effectRef idx="1">
+            <a:schemeClr val="accent1"/>
+          </a:effectRef>
+          <a:fontRef idx="minor">
+            <a:schemeClr val="tx1"/>
+          </a:fontRef>
+        </p:style>
+      </p:cxnSp>
+      <p:cxnSp>
+        <p:nvCxnSpPr>
+          <p:cNvPr id="14" name="Straight Connector 13">
+            <a:extLst>
+              <a:ext uri="{FF2B5EF4-FFF2-40B4-BE49-F238E27FC236}">
+                <a16:creationId xmlns:a16="http://schemas.microsoft.com/office/drawing/2014/main" id="{7536469A-4C07-EB60-6EE6-DFD87868FCF9}"/>
+              </a:ext>
+            </a:extLst>
+          </p:cNvPr>
+          <p:cNvCxnSpPr>
+            <a:cxnSpLocks/>
+          </p:cNvCxnSpPr>
+          <p:nvPr/>
+        </p:nvCxnSpPr>
+        <p:spPr>
+          <a:xfrm flipH="1">
+            <a:off x="5422392" y="1180139"/>
+            <a:ext cx="316421" cy="1343605"/>
+          </a:xfrm>
+          <a:prstGeom prst="line">
+            <a:avLst/>
+          </a:prstGeom>
+          <a:ln>
+            <a:solidFill>
+              <a:srgbClr val="FF0000"/>
+            </a:solidFill>
+          </a:ln>
+        </p:spPr>
+        <p:style>
+          <a:lnRef idx="2">
+            <a:schemeClr val="accent1"/>
+          </a:lnRef>
+          <a:fillRef idx="0">
+            <a:schemeClr val="accent1"/>
+          </a:fillRef>
+          <a:effectRef idx="1">
+            <a:schemeClr val="accent1"/>
+          </a:effectRef>
+          <a:fontRef idx="minor">
+            <a:schemeClr val="tx1"/>
+          </a:fontRef>
+        </p:style>
+      </p:cxnSp>
+      <p:sp>
+        <p:nvSpPr>
+          <p:cNvPr id="7" name="TextBox 6">
+            <a:extLst>
+              <a:ext uri="{FF2B5EF4-FFF2-40B4-BE49-F238E27FC236}">
+                <a16:creationId xmlns:a16="http://schemas.microsoft.com/office/drawing/2014/main" id="{91095A95-AF61-4E79-4EFD-63BFCB4F2D5A}"/>
+              </a:ext>
+            </a:extLst>
+          </p:cNvPr>
+          <p:cNvSpPr txBox="1"/>
+          <p:nvPr/>
+        </p:nvSpPr>
+        <p:spPr>
+          <a:xfrm>
+            <a:off x="6646069" y="2151145"/>
+            <a:ext cx="371475" cy="200055"/>
+          </a:xfrm>
+          <a:prstGeom prst="rect">
+            <a:avLst/>
+          </a:prstGeom>
+          <a:noFill/>
+        </p:spPr>
+        <p:txBody>
+          <a:bodyPr wrap="square" rtlCol="0">
+            <a:spAutoFit/>
+          </a:bodyPr>
+          <a:lstStyle/>
+          <a:p>
+            <a:r>
+              <a:rPr lang="en-US" sz="700" dirty="0"/>
+              <a:t>CQ8</a:t>
+            </a:r>
+          </a:p>
+        </p:txBody>
+      </p:sp>
+      <p:sp>
+        <p:nvSpPr>
+          <p:cNvPr id="8" name="TextBox 7">
+            <a:extLst>
+              <a:ext uri="{FF2B5EF4-FFF2-40B4-BE49-F238E27FC236}">
+                <a16:creationId xmlns:a16="http://schemas.microsoft.com/office/drawing/2014/main" id="{2258499B-6A25-F6F2-9220-A6050987948D}"/>
+              </a:ext>
+            </a:extLst>
+          </p:cNvPr>
+          <p:cNvSpPr txBox="1"/>
+          <p:nvPr/>
+        </p:nvSpPr>
+        <p:spPr>
+          <a:xfrm>
+            <a:off x="6831807" y="2039402"/>
+            <a:ext cx="371475" cy="200055"/>
+          </a:xfrm>
+          <a:prstGeom prst="rect">
+            <a:avLst/>
+          </a:prstGeom>
+          <a:noFill/>
+        </p:spPr>
+        <p:txBody>
+          <a:bodyPr wrap="square" rtlCol="0">
+            <a:spAutoFit/>
+          </a:bodyPr>
+          <a:lstStyle/>
+          <a:p>
+            <a:r>
+              <a:rPr lang="en-US" sz="700" dirty="0"/>
+              <a:t>CQ7</a:t>
+            </a:r>
+          </a:p>
+        </p:txBody>
+      </p:sp>
+      <p:sp>
+        <p:nvSpPr>
+          <p:cNvPr id="9" name="TextBox 8">
+            <a:extLst>
+              <a:ext uri="{FF2B5EF4-FFF2-40B4-BE49-F238E27FC236}">
+                <a16:creationId xmlns:a16="http://schemas.microsoft.com/office/drawing/2014/main" id="{7383DD82-4EBA-C124-90CD-5563F6495854}"/>
+              </a:ext>
+            </a:extLst>
+          </p:cNvPr>
+          <p:cNvSpPr txBox="1"/>
+          <p:nvPr/>
+        </p:nvSpPr>
+        <p:spPr>
+          <a:xfrm>
+            <a:off x="7173516" y="1827631"/>
+            <a:ext cx="371475" cy="200055"/>
+          </a:xfrm>
+          <a:prstGeom prst="rect">
+            <a:avLst/>
+          </a:prstGeom>
+          <a:noFill/>
+        </p:spPr>
+        <p:txBody>
+          <a:bodyPr wrap="square" rtlCol="0">
+            <a:spAutoFit/>
+          </a:bodyPr>
+          <a:lstStyle/>
+          <a:p>
+            <a:r>
+              <a:rPr lang="en-US" sz="700" dirty="0"/>
+              <a:t>CQ4</a:t>
+            </a:r>
+          </a:p>
+        </p:txBody>
+      </p:sp>
+    </p:spTree>
+    <p:extLst>
+      <p:ext uri="{BB962C8B-B14F-4D97-AF65-F5344CB8AC3E}">
+        <p14:creationId xmlns:p14="http://schemas.microsoft.com/office/powerpoint/2010/main" val="3494643617"/>
+      </p:ext>
+    </p:extLst>
+  </p:cSld>
+  <p:clrMapOvr>
+    <a:masterClrMapping/>
+  </p:clrMapOvr>
+</p:sld>
+</file>
+
+<file path=ppt/slides/slide7.xml><?xml version="1.0" encoding="utf-8"?>
+<p:sld xmlns:a="http://schemas.openxmlformats.org/drawingml/2006/main" xmlns:r="http://schemas.openxmlformats.org/officeDocument/2006/relationships" xmlns:p="http://schemas.openxmlformats.org/presentationml/2006/main">
+  <p:cSld>
+    <p:spTree>
+      <p:nvGrpSpPr>
+        <p:cNvPr id="1" name=""/>
+        <p:cNvGrpSpPr/>
+        <p:nvPr/>
+      </p:nvGrpSpPr>
+      <p:grpSpPr>
+        <a:xfrm>
+          <a:off x="0" y="0"/>
+          <a:ext cx="0" cy="0"/>
+          <a:chOff x="0" y="0"/>
+          <a:chExt cx="0" cy="0"/>
+        </a:xfrm>
+      </p:grpSpPr>
+      <p:sp>
+        <p:nvSpPr>
+          <p:cNvPr id="2" name="Title 1">
+            <a:extLst>
+              <a:ext uri="{FF2B5EF4-FFF2-40B4-BE49-F238E27FC236}">
+                <a16:creationId xmlns:a16="http://schemas.microsoft.com/office/drawing/2014/main" id="{7F250786-8C2A-304F-4CB3-C3DA4E187465}"/>
+              </a:ext>
+            </a:extLst>
+          </p:cNvPr>
+          <p:cNvSpPr>
+            <a:spLocks noGrp="1"/>
+          </p:cNvSpPr>
+          <p:nvPr>
+            <p:ph type="title"/>
+          </p:nvPr>
+        </p:nvSpPr>
+        <p:spPr/>
+        <p:txBody>
+          <a:bodyPr/>
+          <a:lstStyle/>
+          <a:p>
+            <a:endParaRPr lang="en-US" dirty="0"/>
+          </a:p>
+        </p:txBody>
+      </p:sp>
+      <p:sp>
+        <p:nvSpPr>
+          <p:cNvPr id="3" name="Content Placeholder 2">
+            <a:extLst>
+              <a:ext uri="{FF2B5EF4-FFF2-40B4-BE49-F238E27FC236}">
+                <a16:creationId xmlns:a16="http://schemas.microsoft.com/office/drawing/2014/main" id="{F30FEA81-9BCD-FCBC-8F51-1840438AC29E}"/>
+              </a:ext>
+            </a:extLst>
+          </p:cNvPr>
+          <p:cNvSpPr>
+            <a:spLocks noGrp="1"/>
+          </p:cNvSpPr>
+          <p:nvPr>
+            <p:ph idx="1"/>
+          </p:nvPr>
+        </p:nvSpPr>
+        <p:spPr/>
+        <p:txBody>
+          <a:bodyPr/>
+          <a:lstStyle/>
+          <a:p>
+            <a:endParaRPr lang="en-US" dirty="0"/>
+          </a:p>
+        </p:txBody>
+      </p:sp>
+      <p:pic>
+        <p:nvPicPr>
+          <p:cNvPr id="5" name="Picture 4">
+            <a:extLst>
+              <a:ext uri="{FF2B5EF4-FFF2-40B4-BE49-F238E27FC236}">
+                <a16:creationId xmlns:a16="http://schemas.microsoft.com/office/drawing/2014/main" id="{66FF8F63-0F7F-53AE-E13A-360734FD1F86}"/>
+              </a:ext>
+            </a:extLst>
+          </p:cNvPr>
+          <p:cNvPicPr>
+            <a:picLocks noChangeAspect="1"/>
+          </p:cNvPicPr>
+          <p:nvPr/>
+        </p:nvPicPr>
+        <p:blipFill>
+          <a:blip r:embed="rId2"/>
+          <a:stretch>
+            <a:fillRect/>
+          </a:stretch>
+        </p:blipFill>
+        <p:spPr>
+          <a:xfrm>
+            <a:off x="3648075" y="85725"/>
+            <a:ext cx="4895850" cy="6686550"/>
+          </a:xfrm>
+          <a:prstGeom prst="rect">
+            <a:avLst/>
+          </a:prstGeom>
+          <a:ln>
+            <a:solidFill>
+              <a:srgbClr val="FF0000"/>
+            </a:solidFill>
+          </a:ln>
+        </p:spPr>
+      </p:pic>
+      <p:cxnSp>
+        <p:nvCxnSpPr>
+          <p:cNvPr id="7" name="Straight Connector 6">
+            <a:extLst>
+              <a:ext uri="{FF2B5EF4-FFF2-40B4-BE49-F238E27FC236}">
+                <a16:creationId xmlns:a16="http://schemas.microsoft.com/office/drawing/2014/main" id="{F4CA7227-F7D7-BFDC-21A7-5949802BC24E}"/>
+              </a:ext>
+            </a:extLst>
+          </p:cNvPr>
+          <p:cNvCxnSpPr/>
+          <p:nvPr/>
+        </p:nvCxnSpPr>
+        <p:spPr>
+          <a:xfrm>
+            <a:off x="6391275" y="4533900"/>
+            <a:ext cx="0" cy="1419225"/>
+          </a:xfrm>
+          <a:prstGeom prst="line">
+            <a:avLst/>
+          </a:prstGeom>
+          <a:ln w="28575">
+            <a:solidFill>
+              <a:srgbClr val="FF0000"/>
+            </a:solidFill>
+          </a:ln>
+        </p:spPr>
+        <p:style>
+          <a:lnRef idx="2">
+            <a:schemeClr val="accent1"/>
+          </a:lnRef>
+          <a:fillRef idx="0">
+            <a:schemeClr val="accent1"/>
+          </a:fillRef>
+          <a:effectRef idx="1">
+            <a:schemeClr val="accent1"/>
+          </a:effectRef>
+          <a:fontRef idx="minor">
+            <a:schemeClr val="tx1"/>
+          </a:fontRef>
+        </p:style>
+      </p:cxnSp>
+      <p:cxnSp>
+        <p:nvCxnSpPr>
+          <p:cNvPr id="9" name="Straight Connector 8">
+            <a:extLst>
+              <a:ext uri="{FF2B5EF4-FFF2-40B4-BE49-F238E27FC236}">
+                <a16:creationId xmlns:a16="http://schemas.microsoft.com/office/drawing/2014/main" id="{403CE871-2DE2-2C8D-F802-B813D7E95CCC}"/>
+              </a:ext>
+            </a:extLst>
+          </p:cNvPr>
+          <p:cNvCxnSpPr>
+            <a:cxnSpLocks/>
+          </p:cNvCxnSpPr>
+          <p:nvPr/>
+        </p:nvCxnSpPr>
+        <p:spPr>
+          <a:xfrm flipH="1">
+            <a:off x="3971925" y="4791075"/>
+            <a:ext cx="2419350" cy="0"/>
+          </a:xfrm>
+          <a:prstGeom prst="line">
+            <a:avLst/>
+          </a:prstGeom>
+          <a:ln w="28575">
+            <a:solidFill>
+              <a:srgbClr val="FF0000"/>
+            </a:solidFill>
+          </a:ln>
+        </p:spPr>
+        <p:style>
+          <a:lnRef idx="2">
+            <a:schemeClr val="accent1"/>
+          </a:lnRef>
+          <a:fillRef idx="0">
+            <a:schemeClr val="accent1"/>
+          </a:fillRef>
+          <a:effectRef idx="1">
+            <a:schemeClr val="accent1"/>
+          </a:effectRef>
+          <a:fontRef idx="minor">
+            <a:schemeClr val="tx1"/>
+          </a:fontRef>
+        </p:style>
+      </p:cxnSp>
+      <p:cxnSp>
+        <p:nvCxnSpPr>
+          <p:cNvPr id="11" name="Straight Arrow Connector 10">
+            <a:extLst>
+              <a:ext uri="{FF2B5EF4-FFF2-40B4-BE49-F238E27FC236}">
+                <a16:creationId xmlns:a16="http://schemas.microsoft.com/office/drawing/2014/main" id="{2B78B3B0-A628-B587-5533-C45395A3F741}"/>
+              </a:ext>
+            </a:extLst>
+          </p:cNvPr>
+          <p:cNvCxnSpPr>
+            <a:cxnSpLocks/>
+          </p:cNvCxnSpPr>
+          <p:nvPr/>
+        </p:nvCxnSpPr>
+        <p:spPr>
+          <a:xfrm flipV="1">
+            <a:off x="6391275" y="3676650"/>
+            <a:ext cx="0" cy="857250"/>
+          </a:xfrm>
+          <a:prstGeom prst="straightConnector1">
+            <a:avLst/>
+          </a:prstGeom>
+          <a:ln w="28575">
+            <a:solidFill>
+              <a:srgbClr val="FF0000"/>
+            </a:solidFill>
+            <a:headEnd type="none" w="med" len="med"/>
+            <a:tailEnd type="none" w="med" len="med"/>
+          </a:ln>
+        </p:spPr>
+        <p:style>
+          <a:lnRef idx="2">
+            <a:schemeClr val="accent1"/>
+          </a:lnRef>
+          <a:fillRef idx="0">
+            <a:schemeClr val="accent1"/>
+          </a:fillRef>
+          <a:effectRef idx="1">
+            <a:schemeClr val="accent1"/>
+          </a:effectRef>
+          <a:fontRef idx="minor">
+            <a:schemeClr val="tx1"/>
+          </a:fontRef>
+        </p:style>
+      </p:cxnSp>
+      <p:cxnSp>
+        <p:nvCxnSpPr>
+          <p:cNvPr id="14" name="Straight Connector 13">
+            <a:extLst>
+              <a:ext uri="{FF2B5EF4-FFF2-40B4-BE49-F238E27FC236}">
+                <a16:creationId xmlns:a16="http://schemas.microsoft.com/office/drawing/2014/main" id="{0E600B60-6068-D4C4-5EE7-DC4D16FEBF89}"/>
+              </a:ext>
+            </a:extLst>
+          </p:cNvPr>
+          <p:cNvCxnSpPr/>
+          <p:nvPr/>
+        </p:nvCxnSpPr>
+        <p:spPr>
+          <a:xfrm flipH="1">
+            <a:off x="3971925" y="3686175"/>
+            <a:ext cx="2419350" cy="0"/>
+          </a:xfrm>
+          <a:prstGeom prst="line">
+            <a:avLst/>
+          </a:prstGeom>
+          <a:ln w="28575">
+            <a:solidFill>
+              <a:srgbClr val="FF0000"/>
+            </a:solidFill>
+          </a:ln>
+        </p:spPr>
+        <p:style>
+          <a:lnRef idx="2">
+            <a:schemeClr val="accent1"/>
+          </a:lnRef>
+          <a:fillRef idx="0">
+            <a:schemeClr val="accent1"/>
+          </a:fillRef>
+          <a:effectRef idx="1">
+            <a:schemeClr val="accent1"/>
+          </a:effectRef>
+          <a:fontRef idx="minor">
+            <a:schemeClr val="tx1"/>
+          </a:fontRef>
+        </p:style>
+      </p:cxnSp>
+    </p:spTree>
+    <p:extLst>
+      <p:ext uri="{BB962C8B-B14F-4D97-AF65-F5344CB8AC3E}">
+        <p14:creationId xmlns:p14="http://schemas.microsoft.com/office/powerpoint/2010/main" val="1205599796"/>
+      </p:ext>
+    </p:extLst>
+  </p:cSld>
+  <p:clrMapOvr>
+    <a:masterClrMapping/>
+  </p:clrMapOvr>
+</p:sld>
+</file>
+
+<file path=ppt/slides/slide8.xml><?xml version="1.0" encoding="utf-8"?>
+<p:sld xmlns:a="http://schemas.openxmlformats.org/drawingml/2006/main" xmlns:r="http://schemas.openxmlformats.org/officeDocument/2006/relationships" xmlns:p="http://schemas.openxmlformats.org/presentationml/2006/main">
+  <p:cSld>
+    <p:spTree>
+      <p:nvGrpSpPr>
+        <p:cNvPr id="1" name=""/>
+        <p:cNvGrpSpPr/>
+        <p:nvPr/>
+      </p:nvGrpSpPr>
+      <p:grpSpPr>
+        <a:xfrm>
+          <a:off x="0" y="0"/>
+          <a:ext cx="0" cy="0"/>
+          <a:chOff x="0" y="0"/>
+          <a:chExt cx="0" cy="0"/>
+        </a:xfrm>
+      </p:grpSpPr>
+      <p:sp>
+        <p:nvSpPr>
+          <p:cNvPr id="2" name="Title 1">
+            <a:extLst>
+              <a:ext uri="{FF2B5EF4-FFF2-40B4-BE49-F238E27FC236}">
+                <a16:creationId xmlns:a16="http://schemas.microsoft.com/office/drawing/2014/main" id="{556DFBFD-E43C-AE98-EC64-B4D526EEDAF5}"/>
+              </a:ext>
+            </a:extLst>
+          </p:cNvPr>
+          <p:cNvSpPr>
+            <a:spLocks noGrp="1"/>
+          </p:cNvSpPr>
+          <p:nvPr>
+            <p:ph type="title"/>
+          </p:nvPr>
+        </p:nvSpPr>
+        <p:spPr/>
+        <p:txBody>
+          <a:bodyPr/>
+          <a:lstStyle/>
+          <a:p>
+            <a:endParaRPr lang="en-US"/>
+          </a:p>
+        </p:txBody>
+      </p:sp>
+      <p:sp>
+        <p:nvSpPr>
+          <p:cNvPr id="3" name="Content Placeholder 2">
+            <a:extLst>
+              <a:ext uri="{FF2B5EF4-FFF2-40B4-BE49-F238E27FC236}">
+                <a16:creationId xmlns:a16="http://schemas.microsoft.com/office/drawing/2014/main" id="{D5C5E764-C241-22AE-BE45-E523EF6E3138}"/>
+              </a:ext>
+            </a:extLst>
+          </p:cNvPr>
+          <p:cNvSpPr>
+            <a:spLocks noGrp="1"/>
+          </p:cNvSpPr>
+          <p:nvPr>
+            <p:ph idx="1"/>
+          </p:nvPr>
+        </p:nvSpPr>
+        <p:spPr/>
+        <p:txBody>
+          <a:bodyPr/>
+          <a:lstStyle/>
+          <a:p>
+            <a:endParaRPr lang="en-US" dirty="0"/>
+          </a:p>
+        </p:txBody>
+      </p:sp>
+      <p:pic>
+        <p:nvPicPr>
+          <p:cNvPr id="5" name="Picture 4">
+            <a:extLst>
+              <a:ext uri="{FF2B5EF4-FFF2-40B4-BE49-F238E27FC236}">
+                <a16:creationId xmlns:a16="http://schemas.microsoft.com/office/drawing/2014/main" id="{DE98316B-3259-C46F-0A41-9E32C1E08250}"/>
+              </a:ext>
+            </a:extLst>
+          </p:cNvPr>
+          <p:cNvPicPr>
+            <a:picLocks noChangeAspect="1"/>
+          </p:cNvPicPr>
+          <p:nvPr/>
+        </p:nvPicPr>
+        <p:blipFill>
+          <a:blip r:embed="rId2"/>
+          <a:stretch>
+            <a:fillRect/>
+          </a:stretch>
+        </p:blipFill>
+        <p:spPr>
+          <a:xfrm>
+            <a:off x="246888" y="1825625"/>
+            <a:ext cx="11201400" cy="2847975"/>
+          </a:xfrm>
+          <a:prstGeom prst="rect">
+            <a:avLst/>
+          </a:prstGeom>
+        </p:spPr>
+      </p:pic>
+      <p:sp>
+        <p:nvSpPr>
+          <p:cNvPr id="6" name="Rectangle 5">
+            <a:extLst>
+              <a:ext uri="{FF2B5EF4-FFF2-40B4-BE49-F238E27FC236}">
+                <a16:creationId xmlns:a16="http://schemas.microsoft.com/office/drawing/2014/main" id="{BED35952-CFF2-EAE3-EAB8-9225EAEB7E6E}"/>
+              </a:ext>
+            </a:extLst>
+          </p:cNvPr>
+          <p:cNvSpPr/>
+          <p:nvPr/>
+        </p:nvSpPr>
+        <p:spPr>
+          <a:xfrm>
+            <a:off x="6647688" y="2606040"/>
+            <a:ext cx="1380744" cy="448056"/>
+          </a:xfrm>
+          <a:prstGeom prst="rect">
+            <a:avLst/>
+          </a:prstGeom>
+        </p:spPr>
+        <p:style>
+          <a:lnRef idx="2">
+            <a:schemeClr val="accent1">
+              <a:shade val="15000"/>
+            </a:schemeClr>
+          </a:lnRef>
+          <a:fillRef idx="1">
+            <a:schemeClr val="accent1"/>
+          </a:fillRef>
+          <a:effectRef idx="0">
+            <a:schemeClr val="accent1"/>
+          </a:effectRef>
+          <a:fontRef idx="minor">
+            <a:schemeClr val="lt1"/>
+          </a:fontRef>
+        </p:style>
+        <p:txBody>
+          <a:bodyPr rtlCol="0" anchor="ctr"/>
+          <a:lstStyle/>
+          <a:p>
+            <a:pPr algn="ctr"/>
+            <a:r>
+              <a:rPr lang="en-US" dirty="0"/>
+              <a:t>CQ8_4</a:t>
+            </a:r>
+          </a:p>
+        </p:txBody>
+      </p:sp>
+      <p:sp>
+        <p:nvSpPr>
+          <p:cNvPr id="7" name="Freeform: Shape 6">
+            <a:extLst>
+              <a:ext uri="{FF2B5EF4-FFF2-40B4-BE49-F238E27FC236}">
+                <a16:creationId xmlns:a16="http://schemas.microsoft.com/office/drawing/2014/main" id="{67530C57-36E9-9349-037A-D27262DF469E}"/>
+              </a:ext>
+            </a:extLst>
+          </p:cNvPr>
+          <p:cNvSpPr/>
+          <p:nvPr/>
+        </p:nvSpPr>
+        <p:spPr>
+          <a:xfrm>
+            <a:off x="5943600" y="3392424"/>
+            <a:ext cx="1188720" cy="667512"/>
+          </a:xfrm>
+          <a:custGeom>
+            <a:avLst/>
+            <a:gdLst>
+              <a:gd name="connsiteX0" fmla="*/ 1188720 w 1188720"/>
+              <a:gd name="connsiteY0" fmla="*/ 256032 h 667512"/>
+              <a:gd name="connsiteX1" fmla="*/ 1179576 w 1188720"/>
+              <a:gd name="connsiteY1" fmla="*/ 667512 h 667512"/>
+              <a:gd name="connsiteX2" fmla="*/ 585216 w 1188720"/>
+              <a:gd name="connsiteY2" fmla="*/ 630936 h 667512"/>
+              <a:gd name="connsiteX3" fmla="*/ 502920 w 1188720"/>
+              <a:gd name="connsiteY3" fmla="*/ 630936 h 667512"/>
+              <a:gd name="connsiteX4" fmla="*/ 256032 w 1188720"/>
+              <a:gd name="connsiteY4" fmla="*/ 512064 h 667512"/>
+              <a:gd name="connsiteX5" fmla="*/ 64008 w 1188720"/>
+              <a:gd name="connsiteY5" fmla="*/ 274320 h 667512"/>
+              <a:gd name="connsiteX6" fmla="*/ 36576 w 1188720"/>
+              <a:gd name="connsiteY6" fmla="*/ 118872 h 667512"/>
+              <a:gd name="connsiteX7" fmla="*/ 0 w 1188720"/>
+              <a:gd name="connsiteY7" fmla="*/ 9144 h 667512"/>
+              <a:gd name="connsiteX8" fmla="*/ 393192 w 1188720"/>
+              <a:gd name="connsiteY8" fmla="*/ 0 h 667512"/>
+              <a:gd name="connsiteX9" fmla="*/ 411480 w 1188720"/>
+              <a:gd name="connsiteY9" fmla="*/ 91440 h 667512"/>
+              <a:gd name="connsiteX10" fmla="*/ 530352 w 1188720"/>
+              <a:gd name="connsiteY10" fmla="*/ 201168 h 667512"/>
+              <a:gd name="connsiteX11" fmla="*/ 621792 w 1188720"/>
+              <a:gd name="connsiteY11" fmla="*/ 237744 h 667512"/>
+              <a:gd name="connsiteX12" fmla="*/ 804672 w 1188720"/>
+              <a:gd name="connsiteY12" fmla="*/ 246888 h 667512"/>
+              <a:gd name="connsiteX13" fmla="*/ 1188720 w 1188720"/>
+              <a:gd name="connsiteY13" fmla="*/ 256032 h 667512"/>
+            </a:gdLst>
+            <a:ahLst/>
+            <a:cxnLst>
+              <a:cxn ang="0">
+                <a:pos x="connsiteX0" y="connsiteY0"/>
+              </a:cxn>
+              <a:cxn ang="0">
+                <a:pos x="connsiteX1" y="connsiteY1"/>
+              </a:cxn>
+              <a:cxn ang="0">
+                <a:pos x="connsiteX2" y="connsiteY2"/>
+              </a:cxn>
+              <a:cxn ang="0">
+                <a:pos x="connsiteX3" y="connsiteY3"/>
+              </a:cxn>
+              <a:cxn ang="0">
+                <a:pos x="connsiteX4" y="connsiteY4"/>
+              </a:cxn>
+              <a:cxn ang="0">
+                <a:pos x="connsiteX5" y="connsiteY5"/>
+              </a:cxn>
+              <a:cxn ang="0">
+                <a:pos x="connsiteX6" y="connsiteY6"/>
+              </a:cxn>
+              <a:cxn ang="0">
+                <a:pos x="connsiteX7" y="connsiteY7"/>
+              </a:cxn>
+              <a:cxn ang="0">
+                <a:pos x="connsiteX8" y="connsiteY8"/>
+              </a:cxn>
+              <a:cxn ang="0">
+                <a:pos x="connsiteX9" y="connsiteY9"/>
+              </a:cxn>
+              <a:cxn ang="0">
+                <a:pos x="connsiteX10" y="connsiteY10"/>
+              </a:cxn>
+              <a:cxn ang="0">
+                <a:pos x="connsiteX11" y="connsiteY11"/>
+              </a:cxn>
+              <a:cxn ang="0">
+                <a:pos x="connsiteX12" y="connsiteY12"/>
+              </a:cxn>
+              <a:cxn ang="0">
+                <a:pos x="connsiteX13" y="connsiteY13"/>
+              </a:cxn>
+            </a:cxnLst>
+            <a:rect l="l" t="t" r="r" b="b"/>
+            <a:pathLst>
+              <a:path w="1188720" h="667512">
+                <a:moveTo>
+                  <a:pt x="1188720" y="256032"/>
+                </a:moveTo>
+                <a:lnTo>
+                  <a:pt x="1179576" y="667512"/>
+                </a:lnTo>
+                <a:lnTo>
+                  <a:pt x="585216" y="630936"/>
+                </a:lnTo>
+                <a:lnTo>
+                  <a:pt x="502920" y="630936"/>
+                </a:lnTo>
+                <a:lnTo>
+                  <a:pt x="256032" y="512064"/>
+                </a:lnTo>
+                <a:lnTo>
+                  <a:pt x="64008" y="274320"/>
+                </a:lnTo>
+                <a:lnTo>
+                  <a:pt x="36576" y="118872"/>
+                </a:lnTo>
+                <a:lnTo>
+                  <a:pt x="0" y="9144"/>
+                </a:lnTo>
+                <a:lnTo>
+                  <a:pt x="393192" y="0"/>
+                </a:lnTo>
+                <a:lnTo>
+                  <a:pt x="411480" y="91440"/>
+                </a:lnTo>
+                <a:lnTo>
+                  <a:pt x="530352" y="201168"/>
+                </a:lnTo>
+                <a:lnTo>
+                  <a:pt x="621792" y="237744"/>
+                </a:lnTo>
+                <a:lnTo>
+                  <a:pt x="804672" y="246888"/>
+                </a:lnTo>
+                <a:lnTo>
+                  <a:pt x="1188720" y="256032"/>
+                </a:lnTo>
+                <a:close/>
+              </a:path>
+            </a:pathLst>
+          </a:custGeom>
+          <a:noFill/>
+          <a:ln>
+            <a:solidFill>
+              <a:srgbClr val="FF0000"/>
+            </a:solidFill>
+          </a:ln>
+        </p:spPr>
+        <p:style>
+          <a:lnRef idx="2">
+            <a:schemeClr val="accent1">
+              <a:shade val="15000"/>
+            </a:schemeClr>
+          </a:lnRef>
+          <a:fillRef idx="1">
+            <a:schemeClr val="accent1"/>
+          </a:fillRef>
+          <a:effectRef idx="0">
+            <a:schemeClr val="accent1"/>
+          </a:effectRef>
+          <a:fontRef idx="minor">
+            <a:schemeClr val="lt1"/>
+          </a:fontRef>
+        </p:style>
+        <p:txBody>
+          <a:bodyPr rtlCol="0" anchor="ctr"/>
+          <a:lstStyle/>
+          <a:p>
+            <a:pPr algn="ctr"/>
+            <a:endParaRPr lang="en-US"/>
+          </a:p>
+        </p:txBody>
+      </p:sp>
+      <p:cxnSp>
+        <p:nvCxnSpPr>
+          <p:cNvPr id="9" name="Straight Arrow Connector 8">
+            <a:extLst>
+              <a:ext uri="{FF2B5EF4-FFF2-40B4-BE49-F238E27FC236}">
+                <a16:creationId xmlns:a16="http://schemas.microsoft.com/office/drawing/2014/main" id="{A1F6C34A-70AC-18B5-8D66-C6B38E73B28D}"/>
+              </a:ext>
+            </a:extLst>
+          </p:cNvPr>
+          <p:cNvCxnSpPr>
+            <a:stCxn id="6" idx="2"/>
+            <a:endCxn id="7" idx="0"/>
+          </p:cNvCxnSpPr>
+          <p:nvPr/>
+        </p:nvCxnSpPr>
+        <p:spPr>
+          <a:xfrm flipH="1">
+            <a:off x="7132320" y="3054096"/>
+            <a:ext cx="205740" cy="594360"/>
+          </a:xfrm>
+          <a:prstGeom prst="straightConnector1">
+            <a:avLst/>
+          </a:prstGeom>
+          <a:ln>
+            <a:tailEnd type="triangle"/>
+          </a:ln>
+        </p:spPr>
+        <p:style>
+          <a:lnRef idx="2">
+            <a:schemeClr val="accent1"/>
+          </a:lnRef>
+          <a:fillRef idx="0">
+            <a:schemeClr val="accent1"/>
+          </a:fillRef>
+          <a:effectRef idx="1">
+            <a:schemeClr val="accent1"/>
+          </a:effectRef>
+          <a:fontRef idx="minor">
+            <a:schemeClr val="tx1"/>
+          </a:fontRef>
+        </p:style>
+      </p:cxnSp>
+    </p:spTree>
+    <p:extLst>
+      <p:ext uri="{BB962C8B-B14F-4D97-AF65-F5344CB8AC3E}">
+        <p14:creationId xmlns:p14="http://schemas.microsoft.com/office/powerpoint/2010/main" val="299071488"/>
+      </p:ext>
+    </p:extLst>
+  </p:cSld>
+  <p:clrMapOvr>
+    <a:masterClrMapping/>
+  </p:clrMapOvr>
+</p:sld>
+</file>
+
+<file path=ppt/slides/slide9.xml><?xml version="1.0" encoding="utf-8"?>
+<p:sld xmlns:a="http://schemas.openxmlformats.org/drawingml/2006/main" xmlns:r="http://schemas.openxmlformats.org/officeDocument/2006/relationships" xmlns:p="http://schemas.openxmlformats.org/presentationml/2006/main">
+  <p:cSld>
+    <p:spTree>
+      <p:nvGrpSpPr>
+        <p:cNvPr id="1" name=""/>
+        <p:cNvGrpSpPr/>
+        <p:nvPr/>
+      </p:nvGrpSpPr>
+      <p:grpSpPr>
+        <a:xfrm>
+          <a:off x="0" y="0"/>
+          <a:ext cx="0" cy="0"/>
+          <a:chOff x="0" y="0"/>
+          <a:chExt cx="0" cy="0"/>
+        </a:xfrm>
+      </p:grpSpPr>
+      <p:sp>
+        <p:nvSpPr>
+          <p:cNvPr id="2" name="Title 1">
+            <a:extLst>
+              <a:ext uri="{FF2B5EF4-FFF2-40B4-BE49-F238E27FC236}">
+                <a16:creationId xmlns:a16="http://schemas.microsoft.com/office/drawing/2014/main" id="{8CAD7C2E-97C4-602B-8A6B-93E8A2A4A320}"/>
+              </a:ext>
+            </a:extLst>
+          </p:cNvPr>
+          <p:cNvSpPr>
+            <a:spLocks noGrp="1"/>
+          </p:cNvSpPr>
+          <p:nvPr>
+            <p:ph type="title"/>
+          </p:nvPr>
+        </p:nvSpPr>
+        <p:spPr/>
+        <p:txBody>
+          <a:bodyPr/>
+          <a:lstStyle/>
+          <a:p>
+            <a:endParaRPr lang="en-US"/>
+          </a:p>
+        </p:txBody>
+      </p:sp>
+      <p:sp>
+        <p:nvSpPr>
+          <p:cNvPr id="3" name="Content Placeholder 2">
+            <a:extLst>
+              <a:ext uri="{FF2B5EF4-FFF2-40B4-BE49-F238E27FC236}">
+                <a16:creationId xmlns:a16="http://schemas.microsoft.com/office/drawing/2014/main" id="{0E5D7DF5-8387-5528-F1DC-F913BC36292B}"/>
+              </a:ext>
+            </a:extLst>
+          </p:cNvPr>
+          <p:cNvSpPr>
+            <a:spLocks noGrp="1"/>
+          </p:cNvSpPr>
+          <p:nvPr>
+            <p:ph idx="1"/>
+          </p:nvPr>
+        </p:nvSpPr>
+        <p:spPr/>
+        <p:txBody>
+          <a:bodyPr/>
+          <a:lstStyle/>
+          <a:p>
+            <a:endParaRPr lang="en-US"/>
+          </a:p>
+        </p:txBody>
+      </p:sp>
+      <p:pic>
+        <p:nvPicPr>
+          <p:cNvPr id="5" name="Picture 4">
+            <a:extLst>
+              <a:ext uri="{FF2B5EF4-FFF2-40B4-BE49-F238E27FC236}">
+                <a16:creationId xmlns:a16="http://schemas.microsoft.com/office/drawing/2014/main" id="{7B23D3BF-3EB7-5C4F-E443-E1BC57EE42CC}"/>
+              </a:ext>
+            </a:extLst>
+          </p:cNvPr>
+          <p:cNvPicPr>
+            <a:picLocks noChangeAspect="1"/>
+          </p:cNvPicPr>
+          <p:nvPr/>
+        </p:nvPicPr>
+        <p:blipFill>
+          <a:blip r:embed="rId2"/>
+          <a:stretch>
+            <a:fillRect/>
+          </a:stretch>
+        </p:blipFill>
+        <p:spPr>
+          <a:xfrm>
+            <a:off x="1155192" y="1027906"/>
+            <a:ext cx="7924800" cy="4962525"/>
+          </a:xfrm>
+          <a:prstGeom prst="rect">
+            <a:avLst/>
+          </a:prstGeom>
+          <a:ln>
+            <a:solidFill>
+              <a:srgbClr val="FF0000"/>
+            </a:solidFill>
+          </a:ln>
+        </p:spPr>
+      </p:pic>
+      <p:sp>
+        <p:nvSpPr>
+          <p:cNvPr id="6" name="TextBox 5">
+            <a:extLst>
+              <a:ext uri="{FF2B5EF4-FFF2-40B4-BE49-F238E27FC236}">
+                <a16:creationId xmlns:a16="http://schemas.microsoft.com/office/drawing/2014/main" id="{EB9833E5-AEEA-E412-95CC-432781D5652F}"/>
+              </a:ext>
+            </a:extLst>
+          </p:cNvPr>
+          <p:cNvSpPr txBox="1"/>
+          <p:nvPr/>
+        </p:nvSpPr>
+        <p:spPr>
+          <a:xfrm>
+            <a:off x="7443216" y="4695339"/>
+            <a:ext cx="576072" cy="261610"/>
+          </a:xfrm>
+          <a:prstGeom prst="rect">
+            <a:avLst/>
+          </a:prstGeom>
+          <a:noFill/>
+        </p:spPr>
+        <p:txBody>
+          <a:bodyPr wrap="square" rtlCol="0">
+            <a:spAutoFit/>
+          </a:bodyPr>
+          <a:lstStyle/>
+          <a:p>
+            <a:r>
+              <a:rPr lang="en-US" sz="1050" dirty="0"/>
+              <a:t>CQ6</a:t>
+            </a:r>
+          </a:p>
+        </p:txBody>
+      </p:sp>
+      <p:sp>
+        <p:nvSpPr>
+          <p:cNvPr id="7" name="TextBox 6">
+            <a:extLst>
+              <a:ext uri="{FF2B5EF4-FFF2-40B4-BE49-F238E27FC236}">
+                <a16:creationId xmlns:a16="http://schemas.microsoft.com/office/drawing/2014/main" id="{D347B219-5577-7C6A-B265-E42632D7EE34}"/>
+              </a:ext>
+            </a:extLst>
+          </p:cNvPr>
+          <p:cNvSpPr txBox="1"/>
+          <p:nvPr/>
+        </p:nvSpPr>
+        <p:spPr>
+          <a:xfrm>
+            <a:off x="6825996" y="4695339"/>
+            <a:ext cx="576072" cy="261610"/>
+          </a:xfrm>
+          <a:prstGeom prst="rect">
+            <a:avLst/>
+          </a:prstGeom>
+          <a:noFill/>
+        </p:spPr>
+        <p:txBody>
+          <a:bodyPr wrap="square" rtlCol="0">
+            <a:spAutoFit/>
+          </a:bodyPr>
+          <a:lstStyle/>
+          <a:p>
+            <a:r>
+              <a:rPr lang="en-US" sz="1050" dirty="0"/>
+              <a:t>CQ7</a:t>
+            </a:r>
+          </a:p>
+        </p:txBody>
+      </p:sp>
+      <p:sp>
+        <p:nvSpPr>
+          <p:cNvPr id="8" name="TextBox 7">
+            <a:extLst>
+              <a:ext uri="{FF2B5EF4-FFF2-40B4-BE49-F238E27FC236}">
+                <a16:creationId xmlns:a16="http://schemas.microsoft.com/office/drawing/2014/main" id="{46A20057-81F0-5458-47FD-FE2B9D1AE9AB}"/>
+              </a:ext>
+            </a:extLst>
+          </p:cNvPr>
+          <p:cNvSpPr txBox="1"/>
+          <p:nvPr/>
+        </p:nvSpPr>
+        <p:spPr>
+          <a:xfrm>
+            <a:off x="7484364" y="4150807"/>
+            <a:ext cx="576072" cy="237827"/>
+          </a:xfrm>
+          <a:prstGeom prst="rect">
+            <a:avLst/>
+          </a:prstGeom>
+          <a:noFill/>
+        </p:spPr>
+        <p:txBody>
+          <a:bodyPr wrap="square" rtlCol="0">
+            <a:spAutoFit/>
+          </a:bodyPr>
+          <a:lstStyle/>
+          <a:p>
+            <a:r>
+              <a:rPr lang="en-US" sz="1050" dirty="0"/>
+              <a:t>CQ7</a:t>
+            </a:r>
+          </a:p>
+        </p:txBody>
+      </p:sp>
+      <p:sp>
+        <p:nvSpPr>
+          <p:cNvPr id="9" name="TextBox 8">
+            <a:extLst>
+              <a:ext uri="{FF2B5EF4-FFF2-40B4-BE49-F238E27FC236}">
+                <a16:creationId xmlns:a16="http://schemas.microsoft.com/office/drawing/2014/main" id="{BACA4128-D2E9-088E-C8B5-441DCB624486}"/>
+              </a:ext>
+            </a:extLst>
+          </p:cNvPr>
+          <p:cNvSpPr txBox="1"/>
+          <p:nvPr/>
+        </p:nvSpPr>
+        <p:spPr>
+          <a:xfrm>
+            <a:off x="6825996" y="4150807"/>
+            <a:ext cx="576072" cy="261610"/>
+          </a:xfrm>
+          <a:prstGeom prst="rect">
+            <a:avLst/>
+          </a:prstGeom>
+          <a:noFill/>
+        </p:spPr>
+        <p:txBody>
+          <a:bodyPr wrap="square" rtlCol="0">
+            <a:spAutoFit/>
+          </a:bodyPr>
+          <a:lstStyle/>
+          <a:p>
+            <a:r>
+              <a:rPr lang="en-US" sz="1050" dirty="0"/>
+              <a:t>CQ8</a:t>
+            </a:r>
+          </a:p>
+        </p:txBody>
+      </p:sp>
+    </p:spTree>
+    <p:extLst>
+      <p:ext uri="{BB962C8B-B14F-4D97-AF65-F5344CB8AC3E}">
+        <p14:creationId xmlns:p14="http://schemas.microsoft.com/office/powerpoint/2010/main" val="2384995101"/>
       </p:ext>
     </p:extLst>
   </p:cSld>
